--- a/nguyen-thai-hoa/slide-quy-trinh-phat-trien-phan-mem.pptx
+++ b/nguyen-thai-hoa/slide-quy-trinh-phat-trien-phan-mem.pptx
@@ -5,7 +5,7 @@
     <p:sldMasterId id="2147483648" r:id="rId1"/>
   </p:sldMasterIdLst>
   <p:notesMasterIdLst>
-    <p:notesMasterId r:id="rId13"/>
+    <p:notesMasterId r:id="rId15"/>
   </p:notesMasterIdLst>
   <p:sldIdLst>
     <p:sldId id="270" r:id="rId2"/>
@@ -13,12 +13,14 @@
     <p:sldId id="286" r:id="rId4"/>
     <p:sldId id="285" r:id="rId5"/>
     <p:sldId id="274" r:id="rId6"/>
-    <p:sldId id="287" r:id="rId7"/>
-    <p:sldId id="288" r:id="rId8"/>
-    <p:sldId id="289" r:id="rId9"/>
-    <p:sldId id="290" r:id="rId10"/>
-    <p:sldId id="291" r:id="rId11"/>
-    <p:sldId id="271" r:id="rId12"/>
+    <p:sldId id="294" r:id="rId7"/>
+    <p:sldId id="287" r:id="rId8"/>
+    <p:sldId id="292" r:id="rId9"/>
+    <p:sldId id="288" r:id="rId10"/>
+    <p:sldId id="289" r:id="rId11"/>
+    <p:sldId id="293" r:id="rId12"/>
+    <p:sldId id="290" r:id="rId13"/>
+    <p:sldId id="291" r:id="rId14"/>
   </p:sldIdLst>
   <p:sldSz cx="12192000" cy="6858000"/>
   <p:notesSz cx="6858000" cy="9144000"/>
@@ -4792,6 +4794,1979 @@
         <p:cNvPr id="1" name="">
           <a:extLst>
             <a:ext uri="{FF2B5EF4-FFF2-40B4-BE49-F238E27FC236}">
+              <a16:creationId xmlns:a16="http://schemas.microsoft.com/office/drawing/2014/main" id="{FED50985-65D0-9DCC-6D6B-0618F0DEDAA3}"/>
+            </a:ext>
+          </a:extLst>
+        </p:cNvPr>
+        <p:cNvGrpSpPr/>
+        <p:nvPr/>
+      </p:nvGrpSpPr>
+      <p:grpSpPr>
+        <a:xfrm>
+          <a:off x="0" y="0"/>
+          <a:ext cx="0" cy="0"/>
+          <a:chOff x="0" y="0"/>
+          <a:chExt cx="0" cy="0"/>
+        </a:xfrm>
+      </p:grpSpPr>
+      <p:sp>
+        <p:nvSpPr>
+          <p:cNvPr id="2" name="Rectangle 1">
+            <a:extLst>
+              <a:ext uri="{FF2B5EF4-FFF2-40B4-BE49-F238E27FC236}">
+                <a16:creationId xmlns:a16="http://schemas.microsoft.com/office/drawing/2014/main" id="{6563B49D-49CF-A197-DA7F-2306AD3364C2}"/>
+              </a:ext>
+            </a:extLst>
+          </p:cNvPr>
+          <p:cNvSpPr/>
+          <p:nvPr/>
+        </p:nvSpPr>
+        <p:spPr>
+          <a:xfrm>
+            <a:off x="0" y="0"/>
+            <a:ext cx="12191695" cy="1078992"/>
+          </a:xfrm>
+          <a:prstGeom prst="rect">
+            <a:avLst/>
+          </a:prstGeom>
+          <a:solidFill>
+            <a:srgbClr val="FFFFFF"/>
+          </a:solidFill>
+          <a:ln>
+            <a:noFill/>
+          </a:ln>
+        </p:spPr>
+        <p:style>
+          <a:lnRef idx="1">
+            <a:schemeClr val="accent1"/>
+          </a:lnRef>
+          <a:fillRef idx="3">
+            <a:schemeClr val="accent1"/>
+          </a:fillRef>
+          <a:effectRef idx="2">
+            <a:schemeClr val="accent1"/>
+          </a:effectRef>
+          <a:fontRef idx="minor">
+            <a:schemeClr val="lt1"/>
+          </a:fontRef>
+        </p:style>
+        <p:txBody>
+          <a:bodyPr rtlCol="0" anchor="ctr"/>
+          <a:lstStyle/>
+          <a:p>
+            <a:pPr algn="ctr"/>
+            <a:endParaRPr/>
+          </a:p>
+        </p:txBody>
+      </p:sp>
+      <p:sp>
+        <p:nvSpPr>
+          <p:cNvPr id="3" name="Rectangle 2">
+            <a:extLst>
+              <a:ext uri="{FF2B5EF4-FFF2-40B4-BE49-F238E27FC236}">
+                <a16:creationId xmlns:a16="http://schemas.microsoft.com/office/drawing/2014/main" id="{8B8C9C5E-0D5B-0849-6A84-64B8332F673D}"/>
+              </a:ext>
+            </a:extLst>
+          </p:cNvPr>
+          <p:cNvSpPr/>
+          <p:nvPr/>
+        </p:nvSpPr>
+        <p:spPr>
+          <a:xfrm>
+            <a:off x="731520" y="1051560"/>
+            <a:ext cx="7772400" cy="36576"/>
+          </a:xfrm>
+          <a:prstGeom prst="rect">
+            <a:avLst/>
+          </a:prstGeom>
+          <a:solidFill>
+            <a:srgbClr val="005BAA"/>
+          </a:solidFill>
+          <a:ln>
+            <a:noFill/>
+          </a:ln>
+        </p:spPr>
+        <p:style>
+          <a:lnRef idx="1">
+            <a:schemeClr val="accent1"/>
+          </a:lnRef>
+          <a:fillRef idx="3">
+            <a:schemeClr val="accent1"/>
+          </a:fillRef>
+          <a:effectRef idx="2">
+            <a:schemeClr val="accent1"/>
+          </a:effectRef>
+          <a:fontRef idx="minor">
+            <a:schemeClr val="lt1"/>
+          </a:fontRef>
+        </p:style>
+        <p:txBody>
+          <a:bodyPr rtlCol="0" anchor="ctr"/>
+          <a:lstStyle/>
+          <a:p>
+            <a:pPr algn="ctr"/>
+            <a:endParaRPr/>
+          </a:p>
+        </p:txBody>
+      </p:sp>
+      <p:sp>
+        <p:nvSpPr>
+          <p:cNvPr id="4" name="Rectangle 3">
+            <a:extLst>
+              <a:ext uri="{FF2B5EF4-FFF2-40B4-BE49-F238E27FC236}">
+                <a16:creationId xmlns:a16="http://schemas.microsoft.com/office/drawing/2014/main" id="{B49F23B0-29CC-D972-FCDE-1E4DC06E42E5}"/>
+              </a:ext>
+            </a:extLst>
+          </p:cNvPr>
+          <p:cNvSpPr/>
+          <p:nvPr/>
+        </p:nvSpPr>
+        <p:spPr>
+          <a:xfrm>
+            <a:off x="8503920" y="1051560"/>
+            <a:ext cx="2926080" cy="36576"/>
+          </a:xfrm>
+          <a:prstGeom prst="rect">
+            <a:avLst/>
+          </a:prstGeom>
+          <a:solidFill>
+            <a:srgbClr val="F37021"/>
+          </a:solidFill>
+          <a:ln>
+            <a:noFill/>
+          </a:ln>
+        </p:spPr>
+        <p:style>
+          <a:lnRef idx="1">
+            <a:schemeClr val="accent1"/>
+          </a:lnRef>
+          <a:fillRef idx="3">
+            <a:schemeClr val="accent1"/>
+          </a:fillRef>
+          <a:effectRef idx="2">
+            <a:schemeClr val="accent1"/>
+          </a:effectRef>
+          <a:fontRef idx="minor">
+            <a:schemeClr val="lt1"/>
+          </a:fontRef>
+        </p:style>
+        <p:txBody>
+          <a:bodyPr rtlCol="0" anchor="ctr"/>
+          <a:lstStyle/>
+          <a:p>
+            <a:pPr algn="ctr"/>
+            <a:endParaRPr/>
+          </a:p>
+        </p:txBody>
+      </p:sp>
+      <p:sp>
+        <p:nvSpPr>
+          <p:cNvPr id="5" name="Rounded Rectangle 4">
+            <a:extLst>
+              <a:ext uri="{FF2B5EF4-FFF2-40B4-BE49-F238E27FC236}">
+                <a16:creationId xmlns:a16="http://schemas.microsoft.com/office/drawing/2014/main" id="{91FEA4B8-B8A8-0C0E-CBB7-527449897E7D}"/>
+              </a:ext>
+            </a:extLst>
+          </p:cNvPr>
+          <p:cNvSpPr/>
+          <p:nvPr/>
+        </p:nvSpPr>
+        <p:spPr>
+          <a:xfrm>
+            <a:off x="731520" y="146304"/>
+            <a:ext cx="3840480" cy="256032"/>
+          </a:xfrm>
+          <a:prstGeom prst="roundRect">
+            <a:avLst/>
+          </a:prstGeom>
+          <a:solidFill>
+            <a:srgbClr val="FFF7ED"/>
+          </a:solidFill>
+          <a:ln w="9525">
+            <a:solidFill>
+              <a:srgbClr val="F37021"/>
+            </a:solidFill>
+          </a:ln>
+        </p:spPr>
+        <p:style>
+          <a:lnRef idx="1">
+            <a:schemeClr val="accent1"/>
+          </a:lnRef>
+          <a:fillRef idx="3">
+            <a:schemeClr val="accent1"/>
+          </a:fillRef>
+          <a:effectRef idx="2">
+            <a:schemeClr val="accent1"/>
+          </a:effectRef>
+          <a:fontRef idx="minor">
+            <a:schemeClr val="lt1"/>
+          </a:fontRef>
+        </p:style>
+        <p:txBody>
+          <a:bodyPr wrap="square" lIns="109728" tIns="18288" rtlCol="0" anchor="ctr"/>
+          <a:lstStyle/>
+          <a:p>
+            <a:pPr algn="ctr">
+              <a:defRPr sz="950" b="1">
+                <a:solidFill>
+                  <a:srgbClr val="F37021"/>
+                </a:solidFill>
+                <a:latin typeface="Segoe UI"/>
+              </a:defRPr>
+            </a:pPr>
+            <a:r>
+              <a:t>PHẦN 3: QUY TRÌNH QUẢN LÝ</a:t>
+            </a:r>
+          </a:p>
+        </p:txBody>
+      </p:sp>
+      <p:sp>
+        <p:nvSpPr>
+          <p:cNvPr id="6" name="TextBox 5">
+            <a:extLst>
+              <a:ext uri="{FF2B5EF4-FFF2-40B4-BE49-F238E27FC236}">
+                <a16:creationId xmlns:a16="http://schemas.microsoft.com/office/drawing/2014/main" id="{E4A6BF32-7C30-2E10-85DB-1FBC509DD62D}"/>
+              </a:ext>
+            </a:extLst>
+          </p:cNvPr>
+          <p:cNvSpPr txBox="1"/>
+          <p:nvPr/>
+        </p:nvSpPr>
+        <p:spPr>
+          <a:xfrm>
+            <a:off x="731520" y="438912"/>
+            <a:ext cx="8686800" cy="338554"/>
+          </a:xfrm>
+          <a:prstGeom prst="rect">
+            <a:avLst/>
+          </a:prstGeom>
+          <a:noFill/>
+        </p:spPr>
+        <p:txBody>
+          <a:bodyPr wrap="square" lIns="0" tIns="0">
+            <a:spAutoFit/>
+          </a:bodyPr>
+          <a:lstStyle/>
+          <a:p>
+            <a:pPr>
+              <a:defRPr sz="1900" b="1">
+                <a:solidFill>
+                  <a:srgbClr val="0A2540"/>
+                </a:solidFill>
+                <a:latin typeface="Segoe UI"/>
+              </a:defRPr>
+            </a:pPr>
+            <a:r>
+              <a:rPr lang="vi-VN" dirty="0"/>
+              <a:t>Phân Tích Quy Trình – Phân Tích Sự Lãng Phí</a:t>
+            </a:r>
+            <a:endParaRPr dirty="0"/>
+          </a:p>
+        </p:txBody>
+      </p:sp>
+      <p:pic>
+        <p:nvPicPr>
+          <p:cNvPr id="7" name="Picture 6" descr="fpt_software_logo.png">
+            <a:extLst>
+              <a:ext uri="{FF2B5EF4-FFF2-40B4-BE49-F238E27FC236}">
+                <a16:creationId xmlns:a16="http://schemas.microsoft.com/office/drawing/2014/main" id="{525D0DDB-4032-BB55-4B51-C84D6E2A4900}"/>
+              </a:ext>
+            </a:extLst>
+          </p:cNvPr>
+          <p:cNvPicPr>
+            <a:picLocks noChangeAspect="1"/>
+          </p:cNvPicPr>
+          <p:nvPr/>
+        </p:nvPicPr>
+        <p:blipFill>
+          <a:blip r:embed="rId2"/>
+          <a:stretch>
+            <a:fillRect/>
+          </a:stretch>
+        </p:blipFill>
+        <p:spPr>
+          <a:xfrm>
+            <a:off x="9784080" y="201168"/>
+            <a:ext cx="1691640" cy="422910"/>
+          </a:xfrm>
+          <a:prstGeom prst="rect">
+            <a:avLst/>
+          </a:prstGeom>
+        </p:spPr>
+      </p:pic>
+      <p:sp>
+        <p:nvSpPr>
+          <p:cNvPr id="8" name="Rectangle 7">
+            <a:extLst>
+              <a:ext uri="{FF2B5EF4-FFF2-40B4-BE49-F238E27FC236}">
+                <a16:creationId xmlns:a16="http://schemas.microsoft.com/office/drawing/2014/main" id="{A9CE5EEA-69C0-1C17-3DC3-230A71C367A2}"/>
+              </a:ext>
+            </a:extLst>
+          </p:cNvPr>
+          <p:cNvSpPr/>
+          <p:nvPr/>
+        </p:nvSpPr>
+        <p:spPr>
+          <a:xfrm>
+            <a:off x="731520" y="6419088"/>
+            <a:ext cx="10728655" cy="13716"/>
+          </a:xfrm>
+          <a:prstGeom prst="rect">
+            <a:avLst/>
+          </a:prstGeom>
+          <a:solidFill>
+            <a:srgbClr val="E2E8F0"/>
+          </a:solidFill>
+          <a:ln>
+            <a:noFill/>
+          </a:ln>
+        </p:spPr>
+        <p:style>
+          <a:lnRef idx="1">
+            <a:schemeClr val="accent1"/>
+          </a:lnRef>
+          <a:fillRef idx="3">
+            <a:schemeClr val="accent1"/>
+          </a:fillRef>
+          <a:effectRef idx="2">
+            <a:schemeClr val="accent1"/>
+          </a:effectRef>
+          <a:fontRef idx="minor">
+            <a:schemeClr val="lt1"/>
+          </a:fontRef>
+        </p:style>
+        <p:txBody>
+          <a:bodyPr rtlCol="0" anchor="ctr"/>
+          <a:lstStyle/>
+          <a:p>
+            <a:pPr algn="ctr"/>
+            <a:endParaRPr/>
+          </a:p>
+        </p:txBody>
+      </p:sp>
+      <p:sp>
+        <p:nvSpPr>
+          <p:cNvPr id="9" name="TextBox 8">
+            <a:extLst>
+              <a:ext uri="{FF2B5EF4-FFF2-40B4-BE49-F238E27FC236}">
+                <a16:creationId xmlns:a16="http://schemas.microsoft.com/office/drawing/2014/main" id="{A3175763-DA5F-9B86-06AC-89E4A59F32B3}"/>
+              </a:ext>
+            </a:extLst>
+          </p:cNvPr>
+          <p:cNvSpPr txBox="1"/>
+          <p:nvPr/>
+        </p:nvSpPr>
+        <p:spPr>
+          <a:xfrm>
+            <a:off x="731520" y="6473952"/>
+            <a:ext cx="7772400" cy="274320"/>
+          </a:xfrm>
+          <a:prstGeom prst="rect">
+            <a:avLst/>
+          </a:prstGeom>
+          <a:noFill/>
+        </p:spPr>
+        <p:txBody>
+          <a:bodyPr wrap="none">
+            <a:spAutoFit/>
+          </a:bodyPr>
+          <a:lstStyle/>
+          <a:p>
+            <a:pPr>
+              <a:defRPr sz="850">
+                <a:solidFill>
+                  <a:srgbClr val="64748B"/>
+                </a:solidFill>
+                <a:latin typeface="Segoe UI"/>
+              </a:defRPr>
+            </a:pPr>
+            <a:r>
+              <a:t>FPT Software | Hệ thống Quản trị Quy trình Nghiệp vụ (BPM) - Đồ án Môn học - Nhóm 8</a:t>
+            </a:r>
+          </a:p>
+        </p:txBody>
+      </p:sp>
+      <p:sp>
+        <p:nvSpPr>
+          <p:cNvPr id="10" name="TextBox 9">
+            <a:extLst>
+              <a:ext uri="{FF2B5EF4-FFF2-40B4-BE49-F238E27FC236}">
+                <a16:creationId xmlns:a16="http://schemas.microsoft.com/office/drawing/2014/main" id="{49FB1E46-ADEA-F55D-BA16-843C80809752}"/>
+              </a:ext>
+            </a:extLst>
+          </p:cNvPr>
+          <p:cNvSpPr txBox="1"/>
+          <p:nvPr/>
+        </p:nvSpPr>
+        <p:spPr>
+          <a:xfrm>
+            <a:off x="10058400" y="6473952"/>
+            <a:ext cx="1371600" cy="274320"/>
+          </a:xfrm>
+          <a:prstGeom prst="rect">
+            <a:avLst/>
+          </a:prstGeom>
+          <a:noFill/>
+        </p:spPr>
+        <p:txBody>
+          <a:bodyPr wrap="none">
+            <a:spAutoFit/>
+          </a:bodyPr>
+          <a:lstStyle/>
+          <a:p>
+            <a:pPr algn="r">
+              <a:defRPr sz="850" b="1">
+                <a:solidFill>
+                  <a:srgbClr val="005BAA"/>
+                </a:solidFill>
+                <a:latin typeface="Segoe UI"/>
+              </a:defRPr>
+            </a:pPr>
+            <a:r>
+              <a:t>9 / 27</a:t>
+            </a:r>
+          </a:p>
+        </p:txBody>
+      </p:sp>
+      <p:pic>
+        <p:nvPicPr>
+          <p:cNvPr id="15" name="Graphic 14">
+            <a:extLst>
+              <a:ext uri="{FF2B5EF4-FFF2-40B4-BE49-F238E27FC236}">
+                <a16:creationId xmlns:a16="http://schemas.microsoft.com/office/drawing/2014/main" id="{3BCB8687-94E4-6D5E-F3C8-49DA0B871760}"/>
+              </a:ext>
+            </a:extLst>
+          </p:cNvPr>
+          <p:cNvPicPr>
+            <a:picLocks noChangeAspect="1"/>
+          </p:cNvPicPr>
+          <p:nvPr/>
+        </p:nvPicPr>
+        <p:blipFill>
+          <a:blip>
+            <a:extLst>
+              <a:ext uri="{96DAC541-7B7A-43D3-8B79-37D633B846F1}">
+                <asvg:svgBlip xmlns:asvg="http://schemas.microsoft.com/office/drawing/2016/SVG/main" r:embed="rId3"/>
+              </a:ext>
+            </a:extLst>
+          </a:blip>
+          <a:stretch>
+            <a:fillRect/>
+          </a:stretch>
+        </p:blipFill>
+        <p:spPr>
+          <a:xfrm>
+            <a:off x="0" y="1987301"/>
+            <a:ext cx="12192000" cy="2883397"/>
+          </a:xfrm>
+          <a:prstGeom prst="rect">
+            <a:avLst/>
+          </a:prstGeom>
+        </p:spPr>
+      </p:pic>
+    </p:spTree>
+    <p:extLst>
+      <p:ext uri="{BB962C8B-B14F-4D97-AF65-F5344CB8AC3E}">
+        <p14:creationId xmlns:p14="http://schemas.microsoft.com/office/powerpoint/2010/main" val="1086398473"/>
+      </p:ext>
+    </p:extLst>
+  </p:cSld>
+  <p:clrMapOvr>
+    <a:masterClrMapping/>
+  </p:clrMapOvr>
+</p:sld>
+</file>
+
+<file path=ppt/slides/slide11.xml><?xml version="1.0" encoding="utf-8"?>
+<p:sld xmlns:a="http://schemas.openxmlformats.org/drawingml/2006/main" xmlns:r="http://schemas.openxmlformats.org/officeDocument/2006/relationships" xmlns:p="http://schemas.openxmlformats.org/presentationml/2006/main">
+  <p:cSld>
+    <p:spTree>
+      <p:nvGrpSpPr>
+        <p:cNvPr id="1" name="">
+          <a:extLst>
+            <a:ext uri="{FF2B5EF4-FFF2-40B4-BE49-F238E27FC236}">
+              <a16:creationId xmlns:a16="http://schemas.microsoft.com/office/drawing/2014/main" id="{F6BB9CB1-DE63-4E2B-086C-AC2EF4F29F0B}"/>
+            </a:ext>
+          </a:extLst>
+        </p:cNvPr>
+        <p:cNvGrpSpPr/>
+        <p:nvPr/>
+      </p:nvGrpSpPr>
+      <p:grpSpPr>
+        <a:xfrm>
+          <a:off x="0" y="0"/>
+          <a:ext cx="0" cy="0"/>
+          <a:chOff x="0" y="0"/>
+          <a:chExt cx="0" cy="0"/>
+        </a:xfrm>
+      </p:grpSpPr>
+      <p:sp>
+        <p:nvSpPr>
+          <p:cNvPr id="2" name="Rectangle 1">
+            <a:extLst>
+              <a:ext uri="{FF2B5EF4-FFF2-40B4-BE49-F238E27FC236}">
+                <a16:creationId xmlns:a16="http://schemas.microsoft.com/office/drawing/2014/main" id="{AFF07798-152E-98A0-F525-A9CF955B0B1F}"/>
+              </a:ext>
+            </a:extLst>
+          </p:cNvPr>
+          <p:cNvSpPr/>
+          <p:nvPr/>
+        </p:nvSpPr>
+        <p:spPr>
+          <a:xfrm>
+            <a:off x="0" y="0"/>
+            <a:ext cx="12191695" cy="1078992"/>
+          </a:xfrm>
+          <a:prstGeom prst="rect">
+            <a:avLst/>
+          </a:prstGeom>
+          <a:solidFill>
+            <a:srgbClr val="FFFFFF"/>
+          </a:solidFill>
+          <a:ln>
+            <a:noFill/>
+          </a:ln>
+        </p:spPr>
+        <p:style>
+          <a:lnRef idx="1">
+            <a:schemeClr val="accent1"/>
+          </a:lnRef>
+          <a:fillRef idx="3">
+            <a:schemeClr val="accent1"/>
+          </a:fillRef>
+          <a:effectRef idx="2">
+            <a:schemeClr val="accent1"/>
+          </a:effectRef>
+          <a:fontRef idx="minor">
+            <a:schemeClr val="lt1"/>
+          </a:fontRef>
+        </p:style>
+        <p:txBody>
+          <a:bodyPr rtlCol="0" anchor="ctr"/>
+          <a:lstStyle/>
+          <a:p>
+            <a:pPr algn="ctr"/>
+            <a:endParaRPr/>
+          </a:p>
+        </p:txBody>
+      </p:sp>
+      <p:sp>
+        <p:nvSpPr>
+          <p:cNvPr id="3" name="Rectangle 2">
+            <a:extLst>
+              <a:ext uri="{FF2B5EF4-FFF2-40B4-BE49-F238E27FC236}">
+                <a16:creationId xmlns:a16="http://schemas.microsoft.com/office/drawing/2014/main" id="{A5D41831-3A55-BE92-9A7B-EA66154C70A5}"/>
+              </a:ext>
+            </a:extLst>
+          </p:cNvPr>
+          <p:cNvSpPr/>
+          <p:nvPr/>
+        </p:nvSpPr>
+        <p:spPr>
+          <a:xfrm>
+            <a:off x="731520" y="1051560"/>
+            <a:ext cx="7772400" cy="36576"/>
+          </a:xfrm>
+          <a:prstGeom prst="rect">
+            <a:avLst/>
+          </a:prstGeom>
+          <a:solidFill>
+            <a:srgbClr val="005BAA"/>
+          </a:solidFill>
+          <a:ln>
+            <a:noFill/>
+          </a:ln>
+        </p:spPr>
+        <p:style>
+          <a:lnRef idx="1">
+            <a:schemeClr val="accent1"/>
+          </a:lnRef>
+          <a:fillRef idx="3">
+            <a:schemeClr val="accent1"/>
+          </a:fillRef>
+          <a:effectRef idx="2">
+            <a:schemeClr val="accent1"/>
+          </a:effectRef>
+          <a:fontRef idx="minor">
+            <a:schemeClr val="lt1"/>
+          </a:fontRef>
+        </p:style>
+        <p:txBody>
+          <a:bodyPr rtlCol="0" anchor="ctr"/>
+          <a:lstStyle/>
+          <a:p>
+            <a:pPr algn="ctr"/>
+            <a:endParaRPr/>
+          </a:p>
+        </p:txBody>
+      </p:sp>
+      <p:sp>
+        <p:nvSpPr>
+          <p:cNvPr id="4" name="Rectangle 3">
+            <a:extLst>
+              <a:ext uri="{FF2B5EF4-FFF2-40B4-BE49-F238E27FC236}">
+                <a16:creationId xmlns:a16="http://schemas.microsoft.com/office/drawing/2014/main" id="{C0732185-51B8-5306-9102-C5814395CDF4}"/>
+              </a:ext>
+            </a:extLst>
+          </p:cNvPr>
+          <p:cNvSpPr/>
+          <p:nvPr/>
+        </p:nvSpPr>
+        <p:spPr>
+          <a:xfrm>
+            <a:off x="8503920" y="1051560"/>
+            <a:ext cx="2926080" cy="36576"/>
+          </a:xfrm>
+          <a:prstGeom prst="rect">
+            <a:avLst/>
+          </a:prstGeom>
+          <a:solidFill>
+            <a:srgbClr val="F37021"/>
+          </a:solidFill>
+          <a:ln>
+            <a:noFill/>
+          </a:ln>
+        </p:spPr>
+        <p:style>
+          <a:lnRef idx="1">
+            <a:schemeClr val="accent1"/>
+          </a:lnRef>
+          <a:fillRef idx="3">
+            <a:schemeClr val="accent1"/>
+          </a:fillRef>
+          <a:effectRef idx="2">
+            <a:schemeClr val="accent1"/>
+          </a:effectRef>
+          <a:fontRef idx="minor">
+            <a:schemeClr val="lt1"/>
+          </a:fontRef>
+        </p:style>
+        <p:txBody>
+          <a:bodyPr rtlCol="0" anchor="ctr"/>
+          <a:lstStyle/>
+          <a:p>
+            <a:pPr algn="ctr"/>
+            <a:endParaRPr/>
+          </a:p>
+        </p:txBody>
+      </p:sp>
+      <p:sp>
+        <p:nvSpPr>
+          <p:cNvPr id="5" name="Rounded Rectangle 4">
+            <a:extLst>
+              <a:ext uri="{FF2B5EF4-FFF2-40B4-BE49-F238E27FC236}">
+                <a16:creationId xmlns:a16="http://schemas.microsoft.com/office/drawing/2014/main" id="{00860CA3-B666-0DC3-F801-68DBB4153969}"/>
+              </a:ext>
+            </a:extLst>
+          </p:cNvPr>
+          <p:cNvSpPr/>
+          <p:nvPr/>
+        </p:nvSpPr>
+        <p:spPr>
+          <a:xfrm>
+            <a:off x="731520" y="146304"/>
+            <a:ext cx="3840480" cy="256032"/>
+          </a:xfrm>
+          <a:prstGeom prst="roundRect">
+            <a:avLst/>
+          </a:prstGeom>
+          <a:solidFill>
+            <a:srgbClr val="FFF7ED"/>
+          </a:solidFill>
+          <a:ln w="9525">
+            <a:solidFill>
+              <a:srgbClr val="F37021"/>
+            </a:solidFill>
+          </a:ln>
+        </p:spPr>
+        <p:style>
+          <a:lnRef idx="1">
+            <a:schemeClr val="accent1"/>
+          </a:lnRef>
+          <a:fillRef idx="3">
+            <a:schemeClr val="accent1"/>
+          </a:fillRef>
+          <a:effectRef idx="2">
+            <a:schemeClr val="accent1"/>
+          </a:effectRef>
+          <a:fontRef idx="minor">
+            <a:schemeClr val="lt1"/>
+          </a:fontRef>
+        </p:style>
+        <p:txBody>
+          <a:bodyPr wrap="square" lIns="109728" tIns="18288" rtlCol="0" anchor="ctr"/>
+          <a:lstStyle/>
+          <a:p>
+            <a:pPr algn="ctr">
+              <a:defRPr sz="950" b="1">
+                <a:solidFill>
+                  <a:srgbClr val="F37021"/>
+                </a:solidFill>
+                <a:latin typeface="Segoe UI"/>
+              </a:defRPr>
+            </a:pPr>
+            <a:r>
+              <a:t>PHẦN 3: QUY TRÌNH QUẢN LÝ</a:t>
+            </a:r>
+          </a:p>
+        </p:txBody>
+      </p:sp>
+      <p:sp>
+        <p:nvSpPr>
+          <p:cNvPr id="6" name="TextBox 5">
+            <a:extLst>
+              <a:ext uri="{FF2B5EF4-FFF2-40B4-BE49-F238E27FC236}">
+                <a16:creationId xmlns:a16="http://schemas.microsoft.com/office/drawing/2014/main" id="{11ED183C-C62E-02D0-B09B-B00E41709F68}"/>
+              </a:ext>
+            </a:extLst>
+          </p:cNvPr>
+          <p:cNvSpPr txBox="1"/>
+          <p:nvPr/>
+        </p:nvSpPr>
+        <p:spPr>
+          <a:xfrm>
+            <a:off x="731520" y="438912"/>
+            <a:ext cx="8686800" cy="338554"/>
+          </a:xfrm>
+          <a:prstGeom prst="rect">
+            <a:avLst/>
+          </a:prstGeom>
+          <a:noFill/>
+        </p:spPr>
+        <p:txBody>
+          <a:bodyPr wrap="square" lIns="0" tIns="0">
+            <a:spAutoFit/>
+          </a:bodyPr>
+          <a:lstStyle/>
+          <a:p>
+            <a:pPr>
+              <a:defRPr sz="1900" b="1">
+                <a:solidFill>
+                  <a:srgbClr val="0A2540"/>
+                </a:solidFill>
+                <a:latin typeface="Segoe UI"/>
+              </a:defRPr>
+            </a:pPr>
+            <a:r>
+              <a:rPr lang="vi-VN" dirty="0"/>
+              <a:t>Phân Tích Quy Trình – Phân Tích Sự Lãng Phí</a:t>
+            </a:r>
+            <a:endParaRPr dirty="0"/>
+          </a:p>
+        </p:txBody>
+      </p:sp>
+      <p:pic>
+        <p:nvPicPr>
+          <p:cNvPr id="7" name="Picture 6" descr="fpt_software_logo.png">
+            <a:extLst>
+              <a:ext uri="{FF2B5EF4-FFF2-40B4-BE49-F238E27FC236}">
+                <a16:creationId xmlns:a16="http://schemas.microsoft.com/office/drawing/2014/main" id="{F14F3063-619B-A65D-C298-8397098046A7}"/>
+              </a:ext>
+            </a:extLst>
+          </p:cNvPr>
+          <p:cNvPicPr>
+            <a:picLocks noChangeAspect="1"/>
+          </p:cNvPicPr>
+          <p:nvPr/>
+        </p:nvPicPr>
+        <p:blipFill>
+          <a:blip r:embed="rId2"/>
+          <a:stretch>
+            <a:fillRect/>
+          </a:stretch>
+        </p:blipFill>
+        <p:spPr>
+          <a:xfrm>
+            <a:off x="9784080" y="201168"/>
+            <a:ext cx="1691640" cy="422910"/>
+          </a:xfrm>
+          <a:prstGeom prst="rect">
+            <a:avLst/>
+          </a:prstGeom>
+        </p:spPr>
+      </p:pic>
+      <p:sp>
+        <p:nvSpPr>
+          <p:cNvPr id="8" name="Rectangle 7">
+            <a:extLst>
+              <a:ext uri="{FF2B5EF4-FFF2-40B4-BE49-F238E27FC236}">
+                <a16:creationId xmlns:a16="http://schemas.microsoft.com/office/drawing/2014/main" id="{64C5764F-337D-B7F2-9A36-B52DE2339F97}"/>
+              </a:ext>
+            </a:extLst>
+          </p:cNvPr>
+          <p:cNvSpPr/>
+          <p:nvPr/>
+        </p:nvSpPr>
+        <p:spPr>
+          <a:xfrm>
+            <a:off x="731520" y="6419088"/>
+            <a:ext cx="10728655" cy="13716"/>
+          </a:xfrm>
+          <a:prstGeom prst="rect">
+            <a:avLst/>
+          </a:prstGeom>
+          <a:solidFill>
+            <a:srgbClr val="E2E8F0"/>
+          </a:solidFill>
+          <a:ln>
+            <a:noFill/>
+          </a:ln>
+        </p:spPr>
+        <p:style>
+          <a:lnRef idx="1">
+            <a:schemeClr val="accent1"/>
+          </a:lnRef>
+          <a:fillRef idx="3">
+            <a:schemeClr val="accent1"/>
+          </a:fillRef>
+          <a:effectRef idx="2">
+            <a:schemeClr val="accent1"/>
+          </a:effectRef>
+          <a:fontRef idx="minor">
+            <a:schemeClr val="lt1"/>
+          </a:fontRef>
+        </p:style>
+        <p:txBody>
+          <a:bodyPr rtlCol="0" anchor="ctr"/>
+          <a:lstStyle/>
+          <a:p>
+            <a:pPr algn="ctr"/>
+            <a:endParaRPr/>
+          </a:p>
+        </p:txBody>
+      </p:sp>
+      <p:sp>
+        <p:nvSpPr>
+          <p:cNvPr id="9" name="TextBox 8">
+            <a:extLst>
+              <a:ext uri="{FF2B5EF4-FFF2-40B4-BE49-F238E27FC236}">
+                <a16:creationId xmlns:a16="http://schemas.microsoft.com/office/drawing/2014/main" id="{1C4D755D-71BE-662A-EFC9-444EA126515B}"/>
+              </a:ext>
+            </a:extLst>
+          </p:cNvPr>
+          <p:cNvSpPr txBox="1"/>
+          <p:nvPr/>
+        </p:nvSpPr>
+        <p:spPr>
+          <a:xfrm>
+            <a:off x="731520" y="6473952"/>
+            <a:ext cx="7772400" cy="274320"/>
+          </a:xfrm>
+          <a:prstGeom prst="rect">
+            <a:avLst/>
+          </a:prstGeom>
+          <a:noFill/>
+        </p:spPr>
+        <p:txBody>
+          <a:bodyPr wrap="none">
+            <a:spAutoFit/>
+          </a:bodyPr>
+          <a:lstStyle/>
+          <a:p>
+            <a:pPr>
+              <a:defRPr sz="850">
+                <a:solidFill>
+                  <a:srgbClr val="64748B"/>
+                </a:solidFill>
+                <a:latin typeface="Segoe UI"/>
+              </a:defRPr>
+            </a:pPr>
+            <a:r>
+              <a:t>FPT Software | Hệ thống Quản trị Quy trình Nghiệp vụ (BPM) - Đồ án Môn học - Nhóm 8</a:t>
+            </a:r>
+          </a:p>
+        </p:txBody>
+      </p:sp>
+      <p:sp>
+        <p:nvSpPr>
+          <p:cNvPr id="10" name="TextBox 9">
+            <a:extLst>
+              <a:ext uri="{FF2B5EF4-FFF2-40B4-BE49-F238E27FC236}">
+                <a16:creationId xmlns:a16="http://schemas.microsoft.com/office/drawing/2014/main" id="{DD35655E-306F-D54F-83B3-AF20F7E2FB04}"/>
+              </a:ext>
+            </a:extLst>
+          </p:cNvPr>
+          <p:cNvSpPr txBox="1"/>
+          <p:nvPr/>
+        </p:nvSpPr>
+        <p:spPr>
+          <a:xfrm>
+            <a:off x="10058400" y="6473952"/>
+            <a:ext cx="1371600" cy="274320"/>
+          </a:xfrm>
+          <a:prstGeom prst="rect">
+            <a:avLst/>
+          </a:prstGeom>
+          <a:noFill/>
+        </p:spPr>
+        <p:txBody>
+          <a:bodyPr wrap="none">
+            <a:spAutoFit/>
+          </a:bodyPr>
+          <a:lstStyle/>
+          <a:p>
+            <a:pPr algn="r">
+              <a:defRPr sz="850" b="1">
+                <a:solidFill>
+                  <a:srgbClr val="005BAA"/>
+                </a:solidFill>
+                <a:latin typeface="Segoe UI"/>
+              </a:defRPr>
+            </a:pPr>
+            <a:r>
+              <a:t>9 / 27</a:t>
+            </a:r>
+          </a:p>
+        </p:txBody>
+      </p:sp>
+      <p:sp>
+        <p:nvSpPr>
+          <p:cNvPr id="11" name="Rounded Rectangle 10">
+            <a:extLst>
+              <a:ext uri="{FF2B5EF4-FFF2-40B4-BE49-F238E27FC236}">
+                <a16:creationId xmlns:a16="http://schemas.microsoft.com/office/drawing/2014/main" id="{A021F190-E785-0BBE-2F9F-436A06DBA5ED}"/>
+              </a:ext>
+            </a:extLst>
+          </p:cNvPr>
+          <p:cNvSpPr/>
+          <p:nvPr/>
+        </p:nvSpPr>
+        <p:spPr>
+          <a:xfrm>
+            <a:off x="610140" y="1371600"/>
+            <a:ext cx="3429000" cy="4846320"/>
+          </a:xfrm>
+          <a:prstGeom prst="roundRect">
+            <a:avLst/>
+          </a:prstGeom>
+          <a:solidFill>
+            <a:srgbClr val="F8FAFC"/>
+          </a:solidFill>
+          <a:ln w="12700">
+            <a:solidFill>
+              <a:srgbClr val="E2E8F0"/>
+            </a:solidFill>
+          </a:ln>
+        </p:spPr>
+        <p:style>
+          <a:lnRef idx="1">
+            <a:schemeClr val="accent1"/>
+          </a:lnRef>
+          <a:fillRef idx="3">
+            <a:schemeClr val="accent1"/>
+          </a:fillRef>
+          <a:effectRef idx="2">
+            <a:schemeClr val="accent1"/>
+          </a:effectRef>
+          <a:fontRef idx="minor">
+            <a:schemeClr val="lt1"/>
+          </a:fontRef>
+        </p:style>
+        <p:txBody>
+          <a:bodyPr wrap="square" lIns="182880" tIns="164592" rIns="182880" bIns="164592" rtlCol="0" anchor="ctr"/>
+          <a:lstStyle/>
+          <a:p>
+            <a:pPr algn="ctr">
+              <a:spcAft>
+                <a:spcPts val="600"/>
+              </a:spcAft>
+              <a:defRPr sz="1300" b="1">
+                <a:solidFill>
+                  <a:srgbClr val="0A2540"/>
+                </a:solidFill>
+                <a:latin typeface="Segoe UI"/>
+              </a:defRPr>
+            </a:pPr>
+            <a:r>
+              <a:rPr lang="vi-VN" sz="1300" b="1" dirty="0">
+                <a:solidFill>
+                  <a:srgbClr val="005BAA"/>
+                </a:solidFill>
+                <a:latin typeface="Segoe UI"/>
+              </a:rPr>
+              <a:t>MOVE</a:t>
+            </a:r>
+          </a:p>
+          <a:p>
+            <a:pPr algn="ctr">
+              <a:spcAft>
+                <a:spcPts val="600"/>
+              </a:spcAft>
+              <a:defRPr sz="1300" b="1">
+                <a:solidFill>
+                  <a:srgbClr val="0A2540"/>
+                </a:solidFill>
+                <a:latin typeface="Segoe UI"/>
+              </a:defRPr>
+            </a:pPr>
+            <a:r>
+              <a:rPr lang="vi-VN" sz="1000" b="1" dirty="0">
+                <a:solidFill>
+                  <a:srgbClr val="005BAA"/>
+                </a:solidFill>
+                <a:latin typeface="Segoe UI"/>
+              </a:rPr>
+              <a:t>Chuyển giao thông tin.</a:t>
+            </a:r>
+          </a:p>
+          <a:p>
+            <a:pPr marL="171450" indent="-171450">
+              <a:spcAft>
+                <a:spcPts val="300"/>
+              </a:spcAft>
+              <a:buFont typeface="Wingdings" panose="05000000000000000000" pitchFamily="2" charset="2"/>
+              <a:buChar char="ü"/>
+              <a:defRPr sz="1050">
+                <a:solidFill>
+                  <a:srgbClr val="1E293B"/>
+                </a:solidFill>
+                <a:latin typeface="Segoe UI"/>
+              </a:defRPr>
+            </a:pPr>
+            <a:r>
+              <a:rPr lang="vi-VN" dirty="0"/>
+              <a:t>Luồng tin nhắn, yêu cầu chỉnh sửa và gửi lại tài liệu.</a:t>
+            </a:r>
+          </a:p>
+          <a:p>
+            <a:pPr marL="171450" indent="-171450">
+              <a:spcAft>
+                <a:spcPts val="300"/>
+              </a:spcAft>
+              <a:buFont typeface="Wingdings" panose="05000000000000000000" pitchFamily="2" charset="2"/>
+              <a:buChar char="ü"/>
+              <a:defRPr sz="1050">
+                <a:solidFill>
+                  <a:srgbClr val="1E293B"/>
+                </a:solidFill>
+                <a:latin typeface="Segoe UI"/>
+              </a:defRPr>
+            </a:pPr>
+            <a:r>
+              <a:rPr lang="vi-VN" dirty="0"/>
+              <a:t>Báo bug từ QA sang Dev thiếu thông tin, dẫn đến phải trao đổi lại nhiều lần.</a:t>
+            </a:r>
+          </a:p>
+          <a:p>
+            <a:pPr marL="171450" indent="-171450">
+              <a:spcAft>
+                <a:spcPts val="300"/>
+              </a:spcAft>
+              <a:buFont typeface="Wingdings" panose="05000000000000000000" pitchFamily="2" charset="2"/>
+              <a:buChar char="ü"/>
+              <a:defRPr sz="1050">
+                <a:solidFill>
+                  <a:srgbClr val="1E293B"/>
+                </a:solidFill>
+                <a:latin typeface="Segoe UI"/>
+              </a:defRPr>
+            </a:pPr>
+            <a:r>
+              <a:rPr lang="vi-VN" dirty="0"/>
+              <a:t>Nguyên nhân: giao tiếp qua file rời/emails khiến thông tin bị phân mảnh, dễ hiểu sai ý nhau.</a:t>
+            </a:r>
+          </a:p>
+          <a:p>
+            <a:pPr marL="171450" indent="-171450">
+              <a:spcAft>
+                <a:spcPts val="300"/>
+              </a:spcAft>
+              <a:buFont typeface="Wingdings" panose="05000000000000000000" pitchFamily="2" charset="2"/>
+              <a:buChar char="ü"/>
+              <a:defRPr sz="1050">
+                <a:solidFill>
+                  <a:srgbClr val="1E293B"/>
+                </a:solidFill>
+                <a:latin typeface="Segoe UI"/>
+              </a:defRPr>
+            </a:pPr>
+            <a:r>
+              <a:rPr lang="vi-VN" dirty="0"/>
+              <a:t>Giải pháp: dùng công cụ cộng tác trực tuyến như Figma, Google Docs và chuẩn hóa ticket lỗi.</a:t>
+            </a:r>
+            <a:endParaRPr dirty="0"/>
+          </a:p>
+        </p:txBody>
+      </p:sp>
+      <p:sp>
+        <p:nvSpPr>
+          <p:cNvPr id="12" name="Rounded Rectangle 11">
+            <a:extLst>
+              <a:ext uri="{FF2B5EF4-FFF2-40B4-BE49-F238E27FC236}">
+                <a16:creationId xmlns:a16="http://schemas.microsoft.com/office/drawing/2014/main" id="{76433645-147A-7F78-EBB0-33456C18EB9D}"/>
+              </a:ext>
+            </a:extLst>
+          </p:cNvPr>
+          <p:cNvSpPr/>
+          <p:nvPr/>
+        </p:nvSpPr>
+        <p:spPr>
+          <a:xfrm>
+            <a:off x="4389120" y="1371600"/>
+            <a:ext cx="3429000" cy="4846320"/>
+          </a:xfrm>
+          <a:prstGeom prst="roundRect">
+            <a:avLst/>
+          </a:prstGeom>
+          <a:solidFill>
+            <a:srgbClr val="F8FAFC"/>
+          </a:solidFill>
+          <a:ln w="12700">
+            <a:solidFill>
+              <a:srgbClr val="E2E8F0"/>
+            </a:solidFill>
+          </a:ln>
+        </p:spPr>
+        <p:style>
+          <a:lnRef idx="1">
+            <a:schemeClr val="accent1"/>
+          </a:lnRef>
+          <a:fillRef idx="3">
+            <a:schemeClr val="accent1"/>
+          </a:fillRef>
+          <a:effectRef idx="2">
+            <a:schemeClr val="accent1"/>
+          </a:effectRef>
+          <a:fontRef idx="minor">
+            <a:schemeClr val="lt1"/>
+          </a:fontRef>
+        </p:style>
+        <p:txBody>
+          <a:bodyPr wrap="square" lIns="182880" tIns="164592" rIns="182880" bIns="164592" rtlCol="0" anchor="ctr"/>
+          <a:lstStyle/>
+          <a:p>
+            <a:pPr algn="ctr">
+              <a:spcAft>
+                <a:spcPts val="600"/>
+              </a:spcAft>
+              <a:defRPr sz="1300" b="1">
+                <a:solidFill>
+                  <a:srgbClr val="F37021"/>
+                </a:solidFill>
+                <a:latin typeface="Segoe UI"/>
+              </a:defRPr>
+            </a:pPr>
+            <a:r>
+              <a:rPr lang="vi-VN" dirty="0"/>
+              <a:t>HOLD</a:t>
+            </a:r>
+          </a:p>
+          <a:p>
+            <a:pPr algn="ctr">
+              <a:spcAft>
+                <a:spcPts val="600"/>
+              </a:spcAft>
+              <a:defRPr sz="1300" b="1">
+                <a:solidFill>
+                  <a:srgbClr val="F37021"/>
+                </a:solidFill>
+                <a:latin typeface="Segoe UI"/>
+              </a:defRPr>
+            </a:pPr>
+            <a:r>
+              <a:rPr lang="vi-VN" sz="1000" dirty="0">
+                <a:solidFill>
+                  <a:schemeClr val="accent6"/>
+                </a:solidFill>
+                <a:latin typeface="Segoe UI"/>
+              </a:rPr>
+              <a:t>Chờ đợi.</a:t>
+            </a:r>
+          </a:p>
+          <a:p>
+            <a:pPr marL="171450" indent="-171450">
+              <a:spcAft>
+                <a:spcPts val="300"/>
+              </a:spcAft>
+              <a:buFont typeface="Wingdings" panose="05000000000000000000" pitchFamily="2" charset="2"/>
+              <a:buChar char="ü"/>
+              <a:defRPr sz="1050">
+                <a:solidFill>
+                  <a:srgbClr val="1E293B"/>
+                </a:solidFill>
+                <a:latin typeface="Segoe UI"/>
+              </a:defRPr>
+            </a:pPr>
+            <a:r>
+              <a:rPr lang="vi-VN" sz="1050" dirty="0">
+                <a:solidFill>
+                  <a:srgbClr val="1E293B"/>
+                </a:solidFill>
+                <a:latin typeface="Segoe UI"/>
+              </a:rPr>
+              <a:t>Event chờ phản hồi UAT.</a:t>
+            </a:r>
+          </a:p>
+          <a:p>
+            <a:pPr marL="171450" indent="-171450">
+              <a:spcAft>
+                <a:spcPts val="300"/>
+              </a:spcAft>
+              <a:buFont typeface="Wingdings" panose="05000000000000000000" pitchFamily="2" charset="2"/>
+              <a:buChar char="ü"/>
+              <a:defRPr sz="1050">
+                <a:solidFill>
+                  <a:srgbClr val="1E293B"/>
+                </a:solidFill>
+                <a:latin typeface="Segoe UI"/>
+              </a:defRPr>
+            </a:pPr>
+            <a:r>
+              <a:rPr lang="vi-VN" sz="1050" dirty="0">
+                <a:solidFill>
+                  <a:srgbClr val="1E293B"/>
+                </a:solidFill>
+                <a:latin typeface="Segoe UI"/>
+              </a:rPr>
+              <a:t>Event chờ xác nhận thanh toán.</a:t>
+            </a:r>
+          </a:p>
+          <a:p>
+            <a:pPr marL="171450" indent="-171450">
+              <a:spcAft>
+                <a:spcPts val="300"/>
+              </a:spcAft>
+              <a:buFont typeface="Wingdings" panose="05000000000000000000" pitchFamily="2" charset="2"/>
+              <a:buChar char="ü"/>
+              <a:defRPr sz="1050">
+                <a:solidFill>
+                  <a:srgbClr val="1E293B"/>
+                </a:solidFill>
+                <a:latin typeface="Segoe UI"/>
+              </a:defRPr>
+            </a:pPr>
+            <a:r>
+              <a:rPr lang="vi-VN" sz="1050" dirty="0">
+                <a:solidFill>
+                  <a:srgbClr val="1E293B"/>
+                </a:solidFill>
+                <a:latin typeface="Segoe UI"/>
+              </a:rPr>
+              <a:t>Nguyên nhân: khách hàng bận công việc, quy trình kế toán và hồ sơ bàn giao rườm rà.</a:t>
+            </a:r>
+          </a:p>
+          <a:p>
+            <a:pPr marL="171450" indent="-171450">
+              <a:spcAft>
+                <a:spcPts val="300"/>
+              </a:spcAft>
+              <a:buFont typeface="Wingdings" panose="05000000000000000000" pitchFamily="2" charset="2"/>
+              <a:buChar char="ü"/>
+              <a:defRPr sz="1050">
+                <a:solidFill>
+                  <a:srgbClr val="1E293B"/>
+                </a:solidFill>
+                <a:latin typeface="Segoe UI"/>
+              </a:defRPr>
+            </a:pPr>
+            <a:r>
+              <a:rPr lang="vi-VN" sz="1050" dirty="0">
+                <a:solidFill>
+                  <a:srgbClr val="1E293B"/>
+                </a:solidFill>
+                <a:latin typeface="Segoe UI"/>
+              </a:rPr>
+              <a:t>Giải pháp: thỏa thuận SLA UAT và chuẩn bị sẵn hồ sơ nghiệm thu từ trước.</a:t>
+            </a:r>
+            <a:endParaRPr lang="en-US" sz="1050" dirty="0">
+              <a:solidFill>
+                <a:srgbClr val="1E293B"/>
+              </a:solidFill>
+              <a:latin typeface="Segoe UI"/>
+            </a:endParaRPr>
+          </a:p>
+          <a:p>
+            <a:pPr>
+              <a:spcAft>
+                <a:spcPts val="300"/>
+              </a:spcAft>
+              <a:defRPr sz="1050">
+                <a:solidFill>
+                  <a:srgbClr val="1E293B"/>
+                </a:solidFill>
+                <a:latin typeface="Segoe UI"/>
+              </a:defRPr>
+            </a:pPr>
+            <a:endParaRPr dirty="0"/>
+          </a:p>
+        </p:txBody>
+      </p:sp>
+      <p:sp>
+        <p:nvSpPr>
+          <p:cNvPr id="13" name="Rounded Rectangle 12">
+            <a:extLst>
+              <a:ext uri="{FF2B5EF4-FFF2-40B4-BE49-F238E27FC236}">
+                <a16:creationId xmlns:a16="http://schemas.microsoft.com/office/drawing/2014/main" id="{DF4DFB28-D816-A4D4-C6C7-01E978BB1070}"/>
+              </a:ext>
+            </a:extLst>
+          </p:cNvPr>
+          <p:cNvSpPr/>
+          <p:nvPr/>
+        </p:nvSpPr>
+        <p:spPr>
+          <a:xfrm>
+            <a:off x="8046720" y="1371600"/>
+            <a:ext cx="3413455" cy="4846320"/>
+          </a:xfrm>
+          <a:prstGeom prst="roundRect">
+            <a:avLst/>
+          </a:prstGeom>
+          <a:solidFill>
+            <a:srgbClr val="F8FAFC"/>
+          </a:solidFill>
+          <a:ln w="12700">
+            <a:solidFill>
+              <a:srgbClr val="E2E8F0"/>
+            </a:solidFill>
+          </a:ln>
+        </p:spPr>
+        <p:style>
+          <a:lnRef idx="1">
+            <a:schemeClr val="accent1"/>
+          </a:lnRef>
+          <a:fillRef idx="3">
+            <a:schemeClr val="accent1"/>
+          </a:fillRef>
+          <a:effectRef idx="2">
+            <a:schemeClr val="accent1"/>
+          </a:effectRef>
+          <a:fontRef idx="minor">
+            <a:schemeClr val="lt1"/>
+          </a:fontRef>
+        </p:style>
+        <p:txBody>
+          <a:bodyPr wrap="square" lIns="182880" tIns="164592" rIns="182880" bIns="164592" rtlCol="0" anchor="ctr"/>
+          <a:lstStyle/>
+          <a:p>
+            <a:pPr algn="ctr">
+              <a:spcAft>
+                <a:spcPts val="600"/>
+              </a:spcAft>
+              <a:defRPr sz="1300" b="1">
+                <a:solidFill>
+                  <a:srgbClr val="005BAA"/>
+                </a:solidFill>
+                <a:latin typeface="Segoe UI"/>
+              </a:defRPr>
+            </a:pPr>
+            <a:r>
+              <a:rPr lang="vi-VN" sz="1300" b="1" dirty="0">
+                <a:solidFill>
+                  <a:srgbClr val="0DB14B"/>
+                </a:solidFill>
+                <a:latin typeface="Segoe UI"/>
+              </a:rPr>
+              <a:t>OVERDO</a:t>
+            </a:r>
+          </a:p>
+          <a:p>
+            <a:pPr algn="ctr">
+              <a:spcAft>
+                <a:spcPts val="600"/>
+              </a:spcAft>
+              <a:defRPr sz="1300" b="1">
+                <a:solidFill>
+                  <a:srgbClr val="005BAA"/>
+                </a:solidFill>
+                <a:latin typeface="Segoe UI"/>
+              </a:defRPr>
+            </a:pPr>
+            <a:r>
+              <a:rPr lang="vi-VN" sz="1000" b="1" dirty="0">
+                <a:solidFill>
+                  <a:srgbClr val="0DB14B"/>
+                </a:solidFill>
+                <a:latin typeface="Segoe UI"/>
+              </a:rPr>
+              <a:t>Làm quá mức.</a:t>
+            </a:r>
+          </a:p>
+          <a:p>
+            <a:pPr marL="171450" indent="-171450">
+              <a:spcAft>
+                <a:spcPts val="300"/>
+              </a:spcAft>
+              <a:buFont typeface="Wingdings" panose="05000000000000000000" pitchFamily="2" charset="2"/>
+              <a:buChar char="ü"/>
+              <a:defRPr sz="1050">
+                <a:solidFill>
+                  <a:srgbClr val="1E293B"/>
+                </a:solidFill>
+                <a:latin typeface="Segoe UI"/>
+              </a:defRPr>
+            </a:pPr>
+            <a:r>
+              <a:rPr lang="vi-VN" dirty="0"/>
+              <a:t>Làm báo giá Change Request cho các sửa đổi quá nhỏ như đổi màu nút bấm, sửa vài chữ.</a:t>
+            </a:r>
+          </a:p>
+          <a:p>
+            <a:pPr marL="171450" indent="-171450">
+              <a:spcAft>
+                <a:spcPts val="300"/>
+              </a:spcAft>
+              <a:buFont typeface="Wingdings" panose="05000000000000000000" pitchFamily="2" charset="2"/>
+              <a:buChar char="ü"/>
+              <a:defRPr sz="1050">
+                <a:solidFill>
+                  <a:srgbClr val="1E293B"/>
+                </a:solidFill>
+                <a:latin typeface="Segoe UI"/>
+              </a:defRPr>
+            </a:pPr>
+            <a:r>
+              <a:rPr lang="vi-VN" dirty="0"/>
+              <a:t>Viết test case ở mức độ chi tiết thái quá khi yêu cầu chưa được chốt cứng.</a:t>
+            </a:r>
+          </a:p>
+          <a:p>
+            <a:pPr marL="171450" indent="-171450">
+              <a:spcAft>
+                <a:spcPts val="300"/>
+              </a:spcAft>
+              <a:buFont typeface="Wingdings" panose="05000000000000000000" pitchFamily="2" charset="2"/>
+              <a:buChar char="ü"/>
+              <a:defRPr sz="1050">
+                <a:solidFill>
+                  <a:srgbClr val="1E293B"/>
+                </a:solidFill>
+                <a:latin typeface="Segoe UI"/>
+              </a:defRPr>
+            </a:pPr>
+            <a:r>
+              <a:rPr lang="vi-VN" dirty="0"/>
+              <a:t>Nguyên nhân: quy trình quá cứng nhắc, yêu cầu chưa đúng scope.</a:t>
+            </a:r>
+          </a:p>
+          <a:p>
+            <a:pPr marL="171450" indent="-171450">
+              <a:spcAft>
+                <a:spcPts val="300"/>
+              </a:spcAft>
+              <a:buFont typeface="Wingdings" panose="05000000000000000000" pitchFamily="2" charset="2"/>
+              <a:buChar char="ü"/>
+              <a:defRPr sz="1050">
+                <a:solidFill>
+                  <a:srgbClr val="1E293B"/>
+                </a:solidFill>
+                <a:latin typeface="Segoe UI"/>
+              </a:defRPr>
+            </a:pPr>
+            <a:r>
+              <a:rPr lang="vi-VN" dirty="0"/>
+              <a:t>Giải pháp: dành buffer time 10% dự án và áp dụng checklist thay vì viết test case quá sâu ngay từ đầu.</a:t>
+            </a:r>
+            <a:endParaRPr dirty="0"/>
+          </a:p>
+        </p:txBody>
+      </p:sp>
+    </p:spTree>
+    <p:extLst>
+      <p:ext uri="{BB962C8B-B14F-4D97-AF65-F5344CB8AC3E}">
+        <p14:creationId xmlns:p14="http://schemas.microsoft.com/office/powerpoint/2010/main" val="2021832817"/>
+      </p:ext>
+    </p:extLst>
+  </p:cSld>
+  <p:clrMapOvr>
+    <a:masterClrMapping/>
+  </p:clrMapOvr>
+</p:sld>
+</file>
+
+<file path=ppt/slides/slide12.xml><?xml version="1.0" encoding="utf-8"?>
+<p:sld xmlns:a="http://schemas.openxmlformats.org/drawingml/2006/main" xmlns:r="http://schemas.openxmlformats.org/officeDocument/2006/relationships" xmlns:p="http://schemas.openxmlformats.org/presentationml/2006/main">
+  <p:cSld>
+    <p:spTree>
+      <p:nvGrpSpPr>
+        <p:cNvPr id="1" name="">
+          <a:extLst>
+            <a:ext uri="{FF2B5EF4-FFF2-40B4-BE49-F238E27FC236}">
+              <a16:creationId xmlns:a16="http://schemas.microsoft.com/office/drawing/2014/main" id="{757DF38A-5E8A-0F10-240C-76634376F9C3}"/>
+            </a:ext>
+          </a:extLst>
+        </p:cNvPr>
+        <p:cNvGrpSpPr/>
+        <p:nvPr/>
+      </p:nvGrpSpPr>
+      <p:grpSpPr>
+        <a:xfrm>
+          <a:off x="0" y="0"/>
+          <a:ext cx="0" cy="0"/>
+          <a:chOff x="0" y="0"/>
+          <a:chExt cx="0" cy="0"/>
+        </a:xfrm>
+      </p:grpSpPr>
+      <p:sp>
+        <p:nvSpPr>
+          <p:cNvPr id="2" name="Rectangle 1">
+            <a:extLst>
+              <a:ext uri="{FF2B5EF4-FFF2-40B4-BE49-F238E27FC236}">
+                <a16:creationId xmlns:a16="http://schemas.microsoft.com/office/drawing/2014/main" id="{A8C4108E-80A8-09B6-A237-B871C1180618}"/>
+              </a:ext>
+            </a:extLst>
+          </p:cNvPr>
+          <p:cNvSpPr/>
+          <p:nvPr/>
+        </p:nvSpPr>
+        <p:spPr>
+          <a:xfrm>
+            <a:off x="0" y="0"/>
+            <a:ext cx="12191695" cy="1078992"/>
+          </a:xfrm>
+          <a:prstGeom prst="rect">
+            <a:avLst/>
+          </a:prstGeom>
+          <a:solidFill>
+            <a:srgbClr val="FFFFFF"/>
+          </a:solidFill>
+          <a:ln>
+            <a:noFill/>
+          </a:ln>
+        </p:spPr>
+        <p:style>
+          <a:lnRef idx="1">
+            <a:schemeClr val="accent1"/>
+          </a:lnRef>
+          <a:fillRef idx="3">
+            <a:schemeClr val="accent1"/>
+          </a:fillRef>
+          <a:effectRef idx="2">
+            <a:schemeClr val="accent1"/>
+          </a:effectRef>
+          <a:fontRef idx="minor">
+            <a:schemeClr val="lt1"/>
+          </a:fontRef>
+        </p:style>
+        <p:txBody>
+          <a:bodyPr rtlCol="0" anchor="ctr"/>
+          <a:lstStyle/>
+          <a:p>
+            <a:pPr algn="ctr"/>
+            <a:endParaRPr/>
+          </a:p>
+        </p:txBody>
+      </p:sp>
+      <p:sp>
+        <p:nvSpPr>
+          <p:cNvPr id="3" name="Rectangle 2">
+            <a:extLst>
+              <a:ext uri="{FF2B5EF4-FFF2-40B4-BE49-F238E27FC236}">
+                <a16:creationId xmlns:a16="http://schemas.microsoft.com/office/drawing/2014/main" id="{8A260EE2-B3C2-5BEB-ED61-8F340E4FBEDD}"/>
+              </a:ext>
+            </a:extLst>
+          </p:cNvPr>
+          <p:cNvSpPr/>
+          <p:nvPr/>
+        </p:nvSpPr>
+        <p:spPr>
+          <a:xfrm>
+            <a:off x="731520" y="1051560"/>
+            <a:ext cx="7772400" cy="36576"/>
+          </a:xfrm>
+          <a:prstGeom prst="rect">
+            <a:avLst/>
+          </a:prstGeom>
+          <a:solidFill>
+            <a:srgbClr val="005BAA"/>
+          </a:solidFill>
+          <a:ln>
+            <a:noFill/>
+          </a:ln>
+        </p:spPr>
+        <p:style>
+          <a:lnRef idx="1">
+            <a:schemeClr val="accent1"/>
+          </a:lnRef>
+          <a:fillRef idx="3">
+            <a:schemeClr val="accent1"/>
+          </a:fillRef>
+          <a:effectRef idx="2">
+            <a:schemeClr val="accent1"/>
+          </a:effectRef>
+          <a:fontRef idx="minor">
+            <a:schemeClr val="lt1"/>
+          </a:fontRef>
+        </p:style>
+        <p:txBody>
+          <a:bodyPr rtlCol="0" anchor="ctr"/>
+          <a:lstStyle/>
+          <a:p>
+            <a:pPr algn="ctr"/>
+            <a:endParaRPr/>
+          </a:p>
+        </p:txBody>
+      </p:sp>
+      <p:sp>
+        <p:nvSpPr>
+          <p:cNvPr id="4" name="Rectangle 3">
+            <a:extLst>
+              <a:ext uri="{FF2B5EF4-FFF2-40B4-BE49-F238E27FC236}">
+                <a16:creationId xmlns:a16="http://schemas.microsoft.com/office/drawing/2014/main" id="{069BB8C1-84B9-8777-086C-B32427ABA798}"/>
+              </a:ext>
+            </a:extLst>
+          </p:cNvPr>
+          <p:cNvSpPr/>
+          <p:nvPr/>
+        </p:nvSpPr>
+        <p:spPr>
+          <a:xfrm>
+            <a:off x="8503920" y="1051560"/>
+            <a:ext cx="2926080" cy="36576"/>
+          </a:xfrm>
+          <a:prstGeom prst="rect">
+            <a:avLst/>
+          </a:prstGeom>
+          <a:solidFill>
+            <a:srgbClr val="F37021"/>
+          </a:solidFill>
+          <a:ln>
+            <a:noFill/>
+          </a:ln>
+        </p:spPr>
+        <p:style>
+          <a:lnRef idx="1">
+            <a:schemeClr val="accent1"/>
+          </a:lnRef>
+          <a:fillRef idx="3">
+            <a:schemeClr val="accent1"/>
+          </a:fillRef>
+          <a:effectRef idx="2">
+            <a:schemeClr val="accent1"/>
+          </a:effectRef>
+          <a:fontRef idx="minor">
+            <a:schemeClr val="lt1"/>
+          </a:fontRef>
+        </p:style>
+        <p:txBody>
+          <a:bodyPr rtlCol="0" anchor="ctr"/>
+          <a:lstStyle/>
+          <a:p>
+            <a:pPr algn="ctr"/>
+            <a:endParaRPr/>
+          </a:p>
+        </p:txBody>
+      </p:sp>
+      <p:sp>
+        <p:nvSpPr>
+          <p:cNvPr id="5" name="Rounded Rectangle 4">
+            <a:extLst>
+              <a:ext uri="{FF2B5EF4-FFF2-40B4-BE49-F238E27FC236}">
+                <a16:creationId xmlns:a16="http://schemas.microsoft.com/office/drawing/2014/main" id="{3BCEE898-6120-6ABC-D7FC-7F459F16230D}"/>
+              </a:ext>
+            </a:extLst>
+          </p:cNvPr>
+          <p:cNvSpPr/>
+          <p:nvPr/>
+        </p:nvSpPr>
+        <p:spPr>
+          <a:xfrm>
+            <a:off x="731520" y="146304"/>
+            <a:ext cx="3840480" cy="256032"/>
+          </a:xfrm>
+          <a:prstGeom prst="roundRect">
+            <a:avLst/>
+          </a:prstGeom>
+          <a:solidFill>
+            <a:srgbClr val="FFF7ED"/>
+          </a:solidFill>
+          <a:ln w="9525">
+            <a:solidFill>
+              <a:srgbClr val="F37021"/>
+            </a:solidFill>
+          </a:ln>
+        </p:spPr>
+        <p:style>
+          <a:lnRef idx="1">
+            <a:schemeClr val="accent1"/>
+          </a:lnRef>
+          <a:fillRef idx="3">
+            <a:schemeClr val="accent1"/>
+          </a:fillRef>
+          <a:effectRef idx="2">
+            <a:schemeClr val="accent1"/>
+          </a:effectRef>
+          <a:fontRef idx="minor">
+            <a:schemeClr val="lt1"/>
+          </a:fontRef>
+        </p:style>
+        <p:txBody>
+          <a:bodyPr wrap="square" lIns="109728" tIns="18288" rtlCol="0" anchor="ctr"/>
+          <a:lstStyle/>
+          <a:p>
+            <a:pPr algn="ctr">
+              <a:defRPr sz="950" b="1">
+                <a:solidFill>
+                  <a:srgbClr val="F37021"/>
+                </a:solidFill>
+                <a:latin typeface="Segoe UI"/>
+              </a:defRPr>
+            </a:pPr>
+            <a:r>
+              <a:t>PHẦN 3: QUY TRÌNH QUẢN LÝ</a:t>
+            </a:r>
+          </a:p>
+        </p:txBody>
+      </p:sp>
+      <p:sp>
+        <p:nvSpPr>
+          <p:cNvPr id="6" name="TextBox 5">
+            <a:extLst>
+              <a:ext uri="{FF2B5EF4-FFF2-40B4-BE49-F238E27FC236}">
+                <a16:creationId xmlns:a16="http://schemas.microsoft.com/office/drawing/2014/main" id="{6DF48E84-6BDE-49AB-5E8A-B6234F668599}"/>
+              </a:ext>
+            </a:extLst>
+          </p:cNvPr>
+          <p:cNvSpPr txBox="1"/>
+          <p:nvPr/>
+        </p:nvSpPr>
+        <p:spPr>
+          <a:xfrm>
+            <a:off x="731520" y="438912"/>
+            <a:ext cx="8686800" cy="338554"/>
+          </a:xfrm>
+          <a:prstGeom prst="rect">
+            <a:avLst/>
+          </a:prstGeom>
+          <a:noFill/>
+        </p:spPr>
+        <p:txBody>
+          <a:bodyPr wrap="square" lIns="0" tIns="0">
+            <a:spAutoFit/>
+          </a:bodyPr>
+          <a:lstStyle/>
+          <a:p>
+            <a:pPr>
+              <a:defRPr sz="1900" b="1">
+                <a:solidFill>
+                  <a:srgbClr val="0A2540"/>
+                </a:solidFill>
+                <a:latin typeface="Segoe UI"/>
+              </a:defRPr>
+            </a:pPr>
+            <a:r>
+              <a:rPr lang="vi-VN" dirty="0"/>
+              <a:t>Phân Tích Quy Trình – Phân Tích Các Bên Liên Quan</a:t>
+            </a:r>
+            <a:endParaRPr dirty="0"/>
+          </a:p>
+        </p:txBody>
+      </p:sp>
+      <p:pic>
+        <p:nvPicPr>
+          <p:cNvPr id="7" name="Picture 6" descr="fpt_software_logo.png">
+            <a:extLst>
+              <a:ext uri="{FF2B5EF4-FFF2-40B4-BE49-F238E27FC236}">
+                <a16:creationId xmlns:a16="http://schemas.microsoft.com/office/drawing/2014/main" id="{05F3184E-6F51-8C2A-07F3-62F04B940896}"/>
+              </a:ext>
+            </a:extLst>
+          </p:cNvPr>
+          <p:cNvPicPr>
+            <a:picLocks noChangeAspect="1"/>
+          </p:cNvPicPr>
+          <p:nvPr/>
+        </p:nvPicPr>
+        <p:blipFill>
+          <a:blip r:embed="rId2"/>
+          <a:stretch>
+            <a:fillRect/>
+          </a:stretch>
+        </p:blipFill>
+        <p:spPr>
+          <a:xfrm>
+            <a:off x="9784080" y="201168"/>
+            <a:ext cx="1691640" cy="422910"/>
+          </a:xfrm>
+          <a:prstGeom prst="rect">
+            <a:avLst/>
+          </a:prstGeom>
+        </p:spPr>
+      </p:pic>
+      <p:sp>
+        <p:nvSpPr>
+          <p:cNvPr id="8" name="Rectangle 7">
+            <a:extLst>
+              <a:ext uri="{FF2B5EF4-FFF2-40B4-BE49-F238E27FC236}">
+                <a16:creationId xmlns:a16="http://schemas.microsoft.com/office/drawing/2014/main" id="{DFBD875A-5F73-402E-77B8-41C65E3E5EB2}"/>
+              </a:ext>
+            </a:extLst>
+          </p:cNvPr>
+          <p:cNvSpPr/>
+          <p:nvPr/>
+        </p:nvSpPr>
+        <p:spPr>
+          <a:xfrm>
+            <a:off x="731520" y="6419088"/>
+            <a:ext cx="10728655" cy="13716"/>
+          </a:xfrm>
+          <a:prstGeom prst="rect">
+            <a:avLst/>
+          </a:prstGeom>
+          <a:solidFill>
+            <a:srgbClr val="E2E8F0"/>
+          </a:solidFill>
+          <a:ln>
+            <a:noFill/>
+          </a:ln>
+        </p:spPr>
+        <p:style>
+          <a:lnRef idx="1">
+            <a:schemeClr val="accent1"/>
+          </a:lnRef>
+          <a:fillRef idx="3">
+            <a:schemeClr val="accent1"/>
+          </a:fillRef>
+          <a:effectRef idx="2">
+            <a:schemeClr val="accent1"/>
+          </a:effectRef>
+          <a:fontRef idx="minor">
+            <a:schemeClr val="lt1"/>
+          </a:fontRef>
+        </p:style>
+        <p:txBody>
+          <a:bodyPr rtlCol="0" anchor="ctr"/>
+          <a:lstStyle/>
+          <a:p>
+            <a:pPr algn="ctr"/>
+            <a:endParaRPr/>
+          </a:p>
+        </p:txBody>
+      </p:sp>
+      <p:sp>
+        <p:nvSpPr>
+          <p:cNvPr id="9" name="TextBox 8">
+            <a:extLst>
+              <a:ext uri="{FF2B5EF4-FFF2-40B4-BE49-F238E27FC236}">
+                <a16:creationId xmlns:a16="http://schemas.microsoft.com/office/drawing/2014/main" id="{DDBD5769-6AD6-177B-E44F-4A0625048B10}"/>
+              </a:ext>
+            </a:extLst>
+          </p:cNvPr>
+          <p:cNvSpPr txBox="1"/>
+          <p:nvPr/>
+        </p:nvSpPr>
+        <p:spPr>
+          <a:xfrm>
+            <a:off x="731520" y="6473952"/>
+            <a:ext cx="7772400" cy="274320"/>
+          </a:xfrm>
+          <a:prstGeom prst="rect">
+            <a:avLst/>
+          </a:prstGeom>
+          <a:noFill/>
+        </p:spPr>
+        <p:txBody>
+          <a:bodyPr wrap="none">
+            <a:spAutoFit/>
+          </a:bodyPr>
+          <a:lstStyle/>
+          <a:p>
+            <a:pPr>
+              <a:defRPr sz="850">
+                <a:solidFill>
+                  <a:srgbClr val="64748B"/>
+                </a:solidFill>
+                <a:latin typeface="Segoe UI"/>
+              </a:defRPr>
+            </a:pPr>
+            <a:r>
+              <a:t>FPT Software | Hệ thống Quản trị Quy trình Nghiệp vụ (BPM) - Đồ án Môn học - Nhóm 8</a:t>
+            </a:r>
+          </a:p>
+        </p:txBody>
+      </p:sp>
+      <p:sp>
+        <p:nvSpPr>
+          <p:cNvPr id="10" name="TextBox 9">
+            <a:extLst>
+              <a:ext uri="{FF2B5EF4-FFF2-40B4-BE49-F238E27FC236}">
+                <a16:creationId xmlns:a16="http://schemas.microsoft.com/office/drawing/2014/main" id="{5F03FB04-A3F9-7C26-18CA-6F7114C8AD31}"/>
+              </a:ext>
+            </a:extLst>
+          </p:cNvPr>
+          <p:cNvSpPr txBox="1"/>
+          <p:nvPr/>
+        </p:nvSpPr>
+        <p:spPr>
+          <a:xfrm>
+            <a:off x="10058400" y="6473952"/>
+            <a:ext cx="1371600" cy="274320"/>
+          </a:xfrm>
+          <a:prstGeom prst="rect">
+            <a:avLst/>
+          </a:prstGeom>
+          <a:noFill/>
+        </p:spPr>
+        <p:txBody>
+          <a:bodyPr wrap="none">
+            <a:spAutoFit/>
+          </a:bodyPr>
+          <a:lstStyle/>
+          <a:p>
+            <a:pPr algn="r">
+              <a:defRPr sz="850" b="1">
+                <a:solidFill>
+                  <a:srgbClr val="005BAA"/>
+                </a:solidFill>
+                <a:latin typeface="Segoe UI"/>
+              </a:defRPr>
+            </a:pPr>
+            <a:r>
+              <a:t>9 / 27</a:t>
+            </a:r>
+          </a:p>
+        </p:txBody>
+      </p:sp>
+      <p:pic>
+        <p:nvPicPr>
+          <p:cNvPr id="18" name="Picture 17">
+            <a:extLst>
+              <a:ext uri="{FF2B5EF4-FFF2-40B4-BE49-F238E27FC236}">
+                <a16:creationId xmlns:a16="http://schemas.microsoft.com/office/drawing/2014/main" id="{F98BE5CD-C3FE-5F45-E7AE-50543C31C015}"/>
+              </a:ext>
+            </a:extLst>
+          </p:cNvPr>
+          <p:cNvPicPr>
+            <a:picLocks noChangeAspect="1"/>
+          </p:cNvPicPr>
+          <p:nvPr/>
+        </p:nvPicPr>
+        <p:blipFill>
+          <a:blip r:embed="rId3"/>
+          <a:srcRect t="7837"/>
+          <a:stretch>
+            <a:fillRect/>
+          </a:stretch>
+        </p:blipFill>
+        <p:spPr>
+          <a:xfrm>
+            <a:off x="2086016" y="1453896"/>
+            <a:ext cx="7880944" cy="4844590"/>
+          </a:xfrm>
+          <a:prstGeom prst="rect">
+            <a:avLst/>
+          </a:prstGeom>
+        </p:spPr>
+      </p:pic>
+    </p:spTree>
+    <p:extLst>
+      <p:ext uri="{BB962C8B-B14F-4D97-AF65-F5344CB8AC3E}">
+        <p14:creationId xmlns:p14="http://schemas.microsoft.com/office/powerpoint/2010/main" val="3264731614"/>
+      </p:ext>
+    </p:extLst>
+  </p:cSld>
+  <p:clrMapOvr>
+    <a:masterClrMapping/>
+  </p:clrMapOvr>
+</p:sld>
+</file>
+
+<file path=ppt/slides/slide13.xml><?xml version="1.0" encoding="utf-8"?>
+<p:sld xmlns:a="http://schemas.openxmlformats.org/drawingml/2006/main" xmlns:r="http://schemas.openxmlformats.org/officeDocument/2006/relationships" xmlns:p="http://schemas.openxmlformats.org/presentationml/2006/main">
+  <p:cSld>
+    <p:spTree>
+      <p:nvGrpSpPr>
+        <p:cNvPr id="1" name="">
+          <a:extLst>
+            <a:ext uri="{FF2B5EF4-FFF2-40B4-BE49-F238E27FC236}">
               <a16:creationId xmlns:a16="http://schemas.microsoft.com/office/drawing/2014/main" id="{70485C5B-D5B0-723B-854F-9826C61BDB78}"/>
             </a:ext>
           </a:extLst>
@@ -7695,1481 +9670,6 @@
         <p14:creationId xmlns:p14="http://schemas.microsoft.com/office/powerpoint/2010/main" val="3328707379"/>
       </p:ext>
     </p:extLst>
-  </p:cSld>
-  <p:clrMapOvr>
-    <a:masterClrMapping/>
-  </p:clrMapOvr>
-</p:sld>
-</file>
-
-<file path=ppt/slides/slide11.xml><?xml version="1.0" encoding="utf-8"?>
-<p:sld xmlns:a="http://schemas.openxmlformats.org/drawingml/2006/main" xmlns:r="http://schemas.openxmlformats.org/officeDocument/2006/relationships" xmlns:p="http://schemas.openxmlformats.org/presentationml/2006/main">
-  <p:cSld>
-    <p:spTree>
-      <p:nvGrpSpPr>
-        <p:cNvPr id="1" name=""/>
-        <p:cNvGrpSpPr/>
-        <p:nvPr/>
-      </p:nvGrpSpPr>
-      <p:grpSpPr>
-        <a:xfrm>
-          <a:off x="0" y="0"/>
-          <a:ext cx="0" cy="0"/>
-          <a:chOff x="0" y="0"/>
-          <a:chExt cx="0" cy="0"/>
-        </a:xfrm>
-      </p:grpSpPr>
-      <p:sp>
-        <p:nvSpPr>
-          <p:cNvPr id="2" name="Rectangle 1"/>
-          <p:cNvSpPr/>
-          <p:nvPr/>
-        </p:nvSpPr>
-        <p:spPr>
-          <a:xfrm>
-            <a:off x="0" y="0"/>
-            <a:ext cx="12191695" cy="1078992"/>
-          </a:xfrm>
-          <a:prstGeom prst="rect">
-            <a:avLst/>
-          </a:prstGeom>
-          <a:solidFill>
-            <a:srgbClr val="FFFFFF"/>
-          </a:solidFill>
-          <a:ln>
-            <a:noFill/>
-          </a:ln>
-        </p:spPr>
-        <p:style>
-          <a:lnRef idx="1">
-            <a:schemeClr val="accent1"/>
-          </a:lnRef>
-          <a:fillRef idx="3">
-            <a:schemeClr val="accent1"/>
-          </a:fillRef>
-          <a:effectRef idx="2">
-            <a:schemeClr val="accent1"/>
-          </a:effectRef>
-          <a:fontRef idx="minor">
-            <a:schemeClr val="lt1"/>
-          </a:fontRef>
-        </p:style>
-        <p:txBody>
-          <a:bodyPr rtlCol="0" anchor="ctr"/>
-          <a:lstStyle/>
-          <a:p>
-            <a:pPr algn="ctr"/>
-            <a:endParaRPr/>
-          </a:p>
-        </p:txBody>
-      </p:sp>
-      <p:sp>
-        <p:nvSpPr>
-          <p:cNvPr id="3" name="Rectangle 2"/>
-          <p:cNvSpPr/>
-          <p:nvPr/>
-        </p:nvSpPr>
-        <p:spPr>
-          <a:xfrm>
-            <a:off x="731520" y="1051560"/>
-            <a:ext cx="7772400" cy="36576"/>
-          </a:xfrm>
-          <a:prstGeom prst="rect">
-            <a:avLst/>
-          </a:prstGeom>
-          <a:solidFill>
-            <a:srgbClr val="005BAA"/>
-          </a:solidFill>
-          <a:ln>
-            <a:noFill/>
-          </a:ln>
-        </p:spPr>
-        <p:style>
-          <a:lnRef idx="1">
-            <a:schemeClr val="accent1"/>
-          </a:lnRef>
-          <a:fillRef idx="3">
-            <a:schemeClr val="accent1"/>
-          </a:fillRef>
-          <a:effectRef idx="2">
-            <a:schemeClr val="accent1"/>
-          </a:effectRef>
-          <a:fontRef idx="minor">
-            <a:schemeClr val="lt1"/>
-          </a:fontRef>
-        </p:style>
-        <p:txBody>
-          <a:bodyPr rtlCol="0" anchor="ctr"/>
-          <a:lstStyle/>
-          <a:p>
-            <a:pPr algn="ctr"/>
-            <a:endParaRPr/>
-          </a:p>
-        </p:txBody>
-      </p:sp>
-      <p:sp>
-        <p:nvSpPr>
-          <p:cNvPr id="4" name="Rectangle 3"/>
-          <p:cNvSpPr/>
-          <p:nvPr/>
-        </p:nvSpPr>
-        <p:spPr>
-          <a:xfrm>
-            <a:off x="8503920" y="1051560"/>
-            <a:ext cx="2926080" cy="36576"/>
-          </a:xfrm>
-          <a:prstGeom prst="rect">
-            <a:avLst/>
-          </a:prstGeom>
-          <a:solidFill>
-            <a:srgbClr val="F37021"/>
-          </a:solidFill>
-          <a:ln>
-            <a:noFill/>
-          </a:ln>
-        </p:spPr>
-        <p:style>
-          <a:lnRef idx="1">
-            <a:schemeClr val="accent1"/>
-          </a:lnRef>
-          <a:fillRef idx="3">
-            <a:schemeClr val="accent1"/>
-          </a:fillRef>
-          <a:effectRef idx="2">
-            <a:schemeClr val="accent1"/>
-          </a:effectRef>
-          <a:fontRef idx="minor">
-            <a:schemeClr val="lt1"/>
-          </a:fontRef>
-        </p:style>
-        <p:txBody>
-          <a:bodyPr rtlCol="0" anchor="ctr"/>
-          <a:lstStyle/>
-          <a:p>
-            <a:pPr algn="ctr"/>
-            <a:endParaRPr/>
-          </a:p>
-        </p:txBody>
-      </p:sp>
-      <p:sp>
-        <p:nvSpPr>
-          <p:cNvPr id="5" name="Rounded Rectangle 4"/>
-          <p:cNvSpPr/>
-          <p:nvPr/>
-        </p:nvSpPr>
-        <p:spPr>
-          <a:xfrm>
-            <a:off x="731520" y="146304"/>
-            <a:ext cx="3840480" cy="256032"/>
-          </a:xfrm>
-          <a:prstGeom prst="roundRect">
-            <a:avLst/>
-          </a:prstGeom>
-          <a:solidFill>
-            <a:srgbClr val="FFF7ED"/>
-          </a:solidFill>
-          <a:ln w="9525">
-            <a:solidFill>
-              <a:srgbClr val="F37021"/>
-            </a:solidFill>
-          </a:ln>
-        </p:spPr>
-        <p:style>
-          <a:lnRef idx="1">
-            <a:schemeClr val="accent1"/>
-          </a:lnRef>
-          <a:fillRef idx="3">
-            <a:schemeClr val="accent1"/>
-          </a:fillRef>
-          <a:effectRef idx="2">
-            <a:schemeClr val="accent1"/>
-          </a:effectRef>
-          <a:fontRef idx="minor">
-            <a:schemeClr val="lt1"/>
-          </a:fontRef>
-        </p:style>
-        <p:txBody>
-          <a:bodyPr wrap="square" lIns="109728" tIns="18288" rtlCol="0" anchor="ctr"/>
-          <a:lstStyle/>
-          <a:p>
-            <a:pPr algn="ctr">
-              <a:defRPr sz="950" b="1">
-                <a:solidFill>
-                  <a:srgbClr val="F37021"/>
-                </a:solidFill>
-                <a:latin typeface="Segoe UI"/>
-              </a:defRPr>
-            </a:pPr>
-            <a:r>
-              <a:t>PHẦN 4: QUY TRÌNH CỐT LÕI</a:t>
-            </a:r>
-          </a:p>
-        </p:txBody>
-      </p:sp>
-      <p:sp>
-        <p:nvSpPr>
-          <p:cNvPr id="6" name="TextBox 5"/>
-          <p:cNvSpPr txBox="1"/>
-          <p:nvPr/>
-        </p:nvSpPr>
-        <p:spPr>
-          <a:xfrm>
-            <a:off x="731520" y="438912"/>
-            <a:ext cx="8686800" cy="566928"/>
-          </a:xfrm>
-          <a:prstGeom prst="rect">
-            <a:avLst/>
-          </a:prstGeom>
-          <a:noFill/>
-        </p:spPr>
-        <p:txBody>
-          <a:bodyPr wrap="square" lIns="0" tIns="0">
-            <a:spAutoFit/>
-          </a:bodyPr>
-          <a:lstStyle/>
-          <a:p>
-            <a:pPr>
-              <a:defRPr sz="1900" b="1">
-                <a:solidFill>
-                  <a:srgbClr val="0A2540"/>
-                </a:solidFill>
-                <a:latin typeface="Segoe UI"/>
-              </a:defRPr>
-            </a:pPr>
-            <a:r>
-              <a:t>Mô tả Chi tiết 5 Giai đoạn Phân tích và Phát triển Phần mềm</a:t>
-            </a:r>
-          </a:p>
-        </p:txBody>
-      </p:sp>
-      <p:pic>
-        <p:nvPicPr>
-          <p:cNvPr id="7" name="Picture 6" descr="fpt_software_logo.png"/>
-          <p:cNvPicPr>
-            <a:picLocks noChangeAspect="1"/>
-          </p:cNvPicPr>
-          <p:nvPr/>
-        </p:nvPicPr>
-        <p:blipFill>
-          <a:blip r:embed="rId2"/>
-          <a:stretch>
-            <a:fillRect/>
-          </a:stretch>
-        </p:blipFill>
-        <p:spPr>
-          <a:xfrm>
-            <a:off x="9784080" y="201168"/>
-            <a:ext cx="1691640" cy="422910"/>
-          </a:xfrm>
-          <a:prstGeom prst="rect">
-            <a:avLst/>
-          </a:prstGeom>
-        </p:spPr>
-      </p:pic>
-      <p:sp>
-        <p:nvSpPr>
-          <p:cNvPr id="8" name="Rectangle 7"/>
-          <p:cNvSpPr/>
-          <p:nvPr/>
-        </p:nvSpPr>
-        <p:spPr>
-          <a:xfrm>
-            <a:off x="731520" y="6419088"/>
-            <a:ext cx="10728655" cy="13716"/>
-          </a:xfrm>
-          <a:prstGeom prst="rect">
-            <a:avLst/>
-          </a:prstGeom>
-          <a:solidFill>
-            <a:srgbClr val="E2E8F0"/>
-          </a:solidFill>
-          <a:ln>
-            <a:noFill/>
-          </a:ln>
-        </p:spPr>
-        <p:style>
-          <a:lnRef idx="1">
-            <a:schemeClr val="accent1"/>
-          </a:lnRef>
-          <a:fillRef idx="3">
-            <a:schemeClr val="accent1"/>
-          </a:fillRef>
-          <a:effectRef idx="2">
-            <a:schemeClr val="accent1"/>
-          </a:effectRef>
-          <a:fontRef idx="minor">
-            <a:schemeClr val="lt1"/>
-          </a:fontRef>
-        </p:style>
-        <p:txBody>
-          <a:bodyPr rtlCol="0" anchor="ctr"/>
-          <a:lstStyle/>
-          <a:p>
-            <a:pPr algn="ctr"/>
-            <a:endParaRPr/>
-          </a:p>
-        </p:txBody>
-      </p:sp>
-      <p:sp>
-        <p:nvSpPr>
-          <p:cNvPr id="9" name="TextBox 8"/>
-          <p:cNvSpPr txBox="1"/>
-          <p:nvPr/>
-        </p:nvSpPr>
-        <p:spPr>
-          <a:xfrm>
-            <a:off x="731520" y="6473952"/>
-            <a:ext cx="7772400" cy="274320"/>
-          </a:xfrm>
-          <a:prstGeom prst="rect">
-            <a:avLst/>
-          </a:prstGeom>
-          <a:noFill/>
-        </p:spPr>
-        <p:txBody>
-          <a:bodyPr wrap="none">
-            <a:spAutoFit/>
-          </a:bodyPr>
-          <a:lstStyle/>
-          <a:p>
-            <a:pPr>
-              <a:defRPr sz="850">
-                <a:solidFill>
-                  <a:srgbClr val="64748B"/>
-                </a:solidFill>
-                <a:latin typeface="Segoe UI"/>
-              </a:defRPr>
-            </a:pPr>
-            <a:r>
-              <a:t>FPT Software | Hệ thống Quản trị Quy trình Nghiệp vụ (BPM) - Đồ án Môn học - Nhóm 8</a:t>
-            </a:r>
-          </a:p>
-        </p:txBody>
-      </p:sp>
-      <p:sp>
-        <p:nvSpPr>
-          <p:cNvPr id="10" name="TextBox 9"/>
-          <p:cNvSpPr txBox="1"/>
-          <p:nvPr/>
-        </p:nvSpPr>
-        <p:spPr>
-          <a:xfrm>
-            <a:off x="10058400" y="6473952"/>
-            <a:ext cx="1371600" cy="274320"/>
-          </a:xfrm>
-          <a:prstGeom prst="rect">
-            <a:avLst/>
-          </a:prstGeom>
-          <a:noFill/>
-        </p:spPr>
-        <p:txBody>
-          <a:bodyPr wrap="none">
-            <a:spAutoFit/>
-          </a:bodyPr>
-          <a:lstStyle/>
-          <a:p>
-            <a:pPr algn="r">
-              <a:defRPr sz="850" b="1">
-                <a:solidFill>
-                  <a:srgbClr val="005BAA"/>
-                </a:solidFill>
-                <a:latin typeface="Segoe UI"/>
-              </a:defRPr>
-            </a:pPr>
-            <a:r>
-              <a:t>16 / 27</a:t>
-            </a:r>
-          </a:p>
-        </p:txBody>
-      </p:sp>
-      <p:sp>
-        <p:nvSpPr>
-          <p:cNvPr id="11" name="Rounded Rectangle 10"/>
-          <p:cNvSpPr/>
-          <p:nvPr/>
-        </p:nvSpPr>
-        <p:spPr>
-          <a:xfrm>
-            <a:off x="731520" y="1325880"/>
-            <a:ext cx="10728655" cy="896112"/>
-          </a:xfrm>
-          <a:prstGeom prst="roundRect">
-            <a:avLst/>
-          </a:prstGeom>
-          <a:solidFill>
-            <a:srgbClr val="F8FAFC"/>
-          </a:solidFill>
-          <a:ln w="12700">
-            <a:solidFill>
-              <a:srgbClr val="E2E8F0"/>
-            </a:solidFill>
-          </a:ln>
-        </p:spPr>
-        <p:style>
-          <a:lnRef idx="1">
-            <a:schemeClr val="accent1"/>
-          </a:lnRef>
-          <a:fillRef idx="3">
-            <a:schemeClr val="accent1"/>
-          </a:fillRef>
-          <a:effectRef idx="2">
-            <a:schemeClr val="accent1"/>
-          </a:effectRef>
-          <a:fontRef idx="minor">
-            <a:schemeClr val="lt1"/>
-          </a:fontRef>
-        </p:style>
-        <p:txBody>
-          <a:bodyPr rtlCol="0" anchor="ctr"/>
-          <a:lstStyle/>
-          <a:p>
-            <a:pPr algn="ctr"/>
-            <a:endParaRPr/>
-          </a:p>
-        </p:txBody>
-      </p:sp>
-      <p:sp>
-        <p:nvSpPr>
-          <p:cNvPr id="12" name="Rounded Rectangle 11"/>
-          <p:cNvSpPr/>
-          <p:nvPr/>
-        </p:nvSpPr>
-        <p:spPr>
-          <a:xfrm>
-            <a:off x="731520" y="1325880"/>
-            <a:ext cx="109728" cy="896112"/>
-          </a:xfrm>
-          <a:prstGeom prst="roundRect">
-            <a:avLst/>
-          </a:prstGeom>
-          <a:solidFill>
-            <a:srgbClr val="005BAA"/>
-          </a:solidFill>
-          <a:ln>
-            <a:noFill/>
-          </a:ln>
-        </p:spPr>
-        <p:style>
-          <a:lnRef idx="1">
-            <a:schemeClr val="accent1"/>
-          </a:lnRef>
-          <a:fillRef idx="3">
-            <a:schemeClr val="accent1"/>
-          </a:fillRef>
-          <a:effectRef idx="2">
-            <a:schemeClr val="accent1"/>
-          </a:effectRef>
-          <a:fontRef idx="minor">
-            <a:schemeClr val="lt1"/>
-          </a:fontRef>
-        </p:style>
-        <p:txBody>
-          <a:bodyPr rtlCol="0" anchor="ctr"/>
-          <a:lstStyle/>
-          <a:p>
-            <a:pPr algn="ctr"/>
-            <a:endParaRPr/>
-          </a:p>
-        </p:txBody>
-      </p:sp>
-      <p:sp>
-        <p:nvSpPr>
-          <p:cNvPr id="13" name="TextBox 12"/>
-          <p:cNvSpPr txBox="1"/>
-          <p:nvPr/>
-        </p:nvSpPr>
-        <p:spPr>
-          <a:xfrm>
-            <a:off x="1005840" y="1417320"/>
-            <a:ext cx="1645920" cy="274320"/>
-          </a:xfrm>
-          <a:prstGeom prst="rect">
-            <a:avLst/>
-          </a:prstGeom>
-          <a:noFill/>
-        </p:spPr>
-        <p:txBody>
-          <a:bodyPr wrap="none">
-            <a:spAutoFit/>
-          </a:bodyPr>
-          <a:lstStyle/>
-          <a:p>
-            <a:pPr>
-              <a:defRPr sz="1000" b="1">
-                <a:solidFill>
-                  <a:srgbClr val="005BAA"/>
-                </a:solidFill>
-                <a:latin typeface="Segoe UI"/>
-              </a:defRPr>
-            </a:pPr>
-            <a:r>
-              <a:rPr dirty="0"/>
-              <a:t>GIAI ĐOẠN 1</a:t>
-            </a:r>
-          </a:p>
-        </p:txBody>
-      </p:sp>
-      <p:sp>
-        <p:nvSpPr>
-          <p:cNvPr id="14" name="TextBox 13"/>
-          <p:cNvSpPr txBox="1"/>
-          <p:nvPr/>
-        </p:nvSpPr>
-        <p:spPr>
-          <a:xfrm>
-            <a:off x="1005840" y="1645920"/>
-            <a:ext cx="2011680" cy="502920"/>
-          </a:xfrm>
-          <a:prstGeom prst="rect">
-            <a:avLst/>
-          </a:prstGeom>
-          <a:noFill/>
-        </p:spPr>
-        <p:txBody>
-          <a:bodyPr wrap="none">
-            <a:spAutoFit/>
-          </a:bodyPr>
-          <a:lstStyle/>
-          <a:p>
-            <a:pPr>
-              <a:defRPr sz="1100" b="1">
-                <a:solidFill>
-                  <a:srgbClr val="0A2540"/>
-                </a:solidFill>
-                <a:latin typeface="Segoe UI"/>
-              </a:defRPr>
-            </a:pPr>
-            <a:r>
-              <a:t>KHỞI TẠO &amp; BÁO GIÁ SƠ BỘ</a:t>
-            </a:r>
-          </a:p>
-        </p:txBody>
-      </p:sp>
-      <p:sp>
-        <p:nvSpPr>
-          <p:cNvPr id="15" name="TextBox 14"/>
-          <p:cNvSpPr txBox="1"/>
-          <p:nvPr/>
-        </p:nvSpPr>
-        <p:spPr>
-          <a:xfrm>
-            <a:off x="3108960" y="1399032"/>
-            <a:ext cx="8229600" cy="749808"/>
-          </a:xfrm>
-          <a:prstGeom prst="rect">
-            <a:avLst/>
-          </a:prstGeom>
-          <a:noFill/>
-        </p:spPr>
-        <p:txBody>
-          <a:bodyPr wrap="square">
-            <a:spAutoFit/>
-          </a:bodyPr>
-          <a:lstStyle/>
-          <a:p>
-            <a:pPr>
-              <a:spcAft>
-                <a:spcPts val="200"/>
-              </a:spcAft>
-              <a:defRPr sz="950">
-                <a:solidFill>
-                  <a:srgbClr val="1E293B"/>
-                </a:solidFill>
-                <a:latin typeface="Segoe UI"/>
-              </a:defRPr>
-            </a:pPr>
-            <a:r>
-              <a:t>• Khách hàng gửi yêu cầu (RFP). Sales phối hợp cùng BA và Dev Team làm rõ yêu cầu, đánh giá tính khả thi kỹ thuật và ước lượng khối lượng (Effort Estimation).</a:t>
-            </a:r>
-          </a:p>
-          <a:p>
-            <a:pPr>
-              <a:spcAft>
-                <a:spcPts val="200"/>
-              </a:spcAft>
-              <a:defRPr sz="950">
-                <a:solidFill>
-                  <a:srgbClr val="1E293B"/>
-                </a:solidFill>
-                <a:latin typeface="Segoe UI"/>
-              </a:defRPr>
-            </a:pPr>
-            <a:r>
-              <a:t>• Lập và gửi báo giá sơ bộ cho khách hàng. Nếu khách hàng đồng ý, hai bên tiến hành ký kết hợp đồng thương mại.</a:t>
-            </a:r>
-          </a:p>
-        </p:txBody>
-      </p:sp>
-      <p:sp>
-        <p:nvSpPr>
-          <p:cNvPr id="16" name="Rounded Rectangle 15"/>
-          <p:cNvSpPr/>
-          <p:nvPr/>
-        </p:nvSpPr>
-        <p:spPr>
-          <a:xfrm>
-            <a:off x="731520" y="2313432"/>
-            <a:ext cx="10728655" cy="896112"/>
-          </a:xfrm>
-          <a:prstGeom prst="roundRect">
-            <a:avLst/>
-          </a:prstGeom>
-          <a:solidFill>
-            <a:srgbClr val="F8FAFC"/>
-          </a:solidFill>
-          <a:ln w="12700">
-            <a:solidFill>
-              <a:srgbClr val="E2E8F0"/>
-            </a:solidFill>
-          </a:ln>
-        </p:spPr>
-        <p:style>
-          <a:lnRef idx="1">
-            <a:schemeClr val="accent1"/>
-          </a:lnRef>
-          <a:fillRef idx="3">
-            <a:schemeClr val="accent1"/>
-          </a:fillRef>
-          <a:effectRef idx="2">
-            <a:schemeClr val="accent1"/>
-          </a:effectRef>
-          <a:fontRef idx="minor">
-            <a:schemeClr val="lt1"/>
-          </a:fontRef>
-        </p:style>
-        <p:txBody>
-          <a:bodyPr rtlCol="0" anchor="ctr"/>
-          <a:lstStyle/>
-          <a:p>
-            <a:pPr algn="ctr"/>
-            <a:endParaRPr/>
-          </a:p>
-        </p:txBody>
-      </p:sp>
-      <p:sp>
-        <p:nvSpPr>
-          <p:cNvPr id="17" name="Rounded Rectangle 16"/>
-          <p:cNvSpPr/>
-          <p:nvPr/>
-        </p:nvSpPr>
-        <p:spPr>
-          <a:xfrm>
-            <a:off x="731520" y="2313432"/>
-            <a:ext cx="109728" cy="896112"/>
-          </a:xfrm>
-          <a:prstGeom prst="roundRect">
-            <a:avLst/>
-          </a:prstGeom>
-          <a:solidFill>
-            <a:srgbClr val="F37021"/>
-          </a:solidFill>
-          <a:ln>
-            <a:noFill/>
-          </a:ln>
-        </p:spPr>
-        <p:style>
-          <a:lnRef idx="1">
-            <a:schemeClr val="accent1"/>
-          </a:lnRef>
-          <a:fillRef idx="3">
-            <a:schemeClr val="accent1"/>
-          </a:fillRef>
-          <a:effectRef idx="2">
-            <a:schemeClr val="accent1"/>
-          </a:effectRef>
-          <a:fontRef idx="minor">
-            <a:schemeClr val="lt1"/>
-          </a:fontRef>
-        </p:style>
-        <p:txBody>
-          <a:bodyPr rtlCol="0" anchor="ctr"/>
-          <a:lstStyle/>
-          <a:p>
-            <a:pPr algn="ctr"/>
-            <a:endParaRPr/>
-          </a:p>
-        </p:txBody>
-      </p:sp>
-      <p:sp>
-        <p:nvSpPr>
-          <p:cNvPr id="18" name="TextBox 17"/>
-          <p:cNvSpPr txBox="1"/>
-          <p:nvPr/>
-        </p:nvSpPr>
-        <p:spPr>
-          <a:xfrm>
-            <a:off x="1005840" y="2404872"/>
-            <a:ext cx="1645920" cy="274320"/>
-          </a:xfrm>
-          <a:prstGeom prst="rect">
-            <a:avLst/>
-          </a:prstGeom>
-          <a:noFill/>
-        </p:spPr>
-        <p:txBody>
-          <a:bodyPr wrap="none">
-            <a:spAutoFit/>
-          </a:bodyPr>
-          <a:lstStyle/>
-          <a:p>
-            <a:pPr>
-              <a:defRPr sz="1000" b="1">
-                <a:solidFill>
-                  <a:srgbClr val="F37021"/>
-                </a:solidFill>
-                <a:latin typeface="Segoe UI"/>
-              </a:defRPr>
-            </a:pPr>
-            <a:r>
-              <a:t>GIAI ĐOẠN 2</a:t>
-            </a:r>
-          </a:p>
-        </p:txBody>
-      </p:sp>
-      <p:sp>
-        <p:nvSpPr>
-          <p:cNvPr id="19" name="TextBox 18"/>
-          <p:cNvSpPr txBox="1"/>
-          <p:nvPr/>
-        </p:nvSpPr>
-        <p:spPr>
-          <a:xfrm>
-            <a:off x="1005840" y="2633472"/>
-            <a:ext cx="2011680" cy="502920"/>
-          </a:xfrm>
-          <a:prstGeom prst="rect">
-            <a:avLst/>
-          </a:prstGeom>
-          <a:noFill/>
-        </p:spPr>
-        <p:txBody>
-          <a:bodyPr wrap="none">
-            <a:spAutoFit/>
-          </a:bodyPr>
-          <a:lstStyle/>
-          <a:p>
-            <a:pPr>
-              <a:defRPr sz="1100" b="1">
-                <a:solidFill>
-                  <a:srgbClr val="0A2540"/>
-                </a:solidFill>
-                <a:latin typeface="Segoe UI"/>
-              </a:defRPr>
-            </a:pPr>
-            <a:r>
-              <a:t>CHỐT YÊU CẦU CHI TIẾT (SRS)</a:t>
-            </a:r>
-          </a:p>
-        </p:txBody>
-      </p:sp>
-      <p:sp>
-        <p:nvSpPr>
-          <p:cNvPr id="20" name="TextBox 19"/>
-          <p:cNvSpPr txBox="1"/>
-          <p:nvPr/>
-        </p:nvSpPr>
-        <p:spPr>
-          <a:xfrm>
-            <a:off x="3108960" y="2386584"/>
-            <a:ext cx="8229600" cy="749808"/>
-          </a:xfrm>
-          <a:prstGeom prst="rect">
-            <a:avLst/>
-          </a:prstGeom>
-          <a:noFill/>
-        </p:spPr>
-        <p:txBody>
-          <a:bodyPr wrap="square">
-            <a:spAutoFit/>
-          </a:bodyPr>
-          <a:lstStyle/>
-          <a:p>
-            <a:pPr>
-              <a:spcAft>
-                <a:spcPts val="200"/>
-              </a:spcAft>
-              <a:defRPr sz="950">
-                <a:solidFill>
-                  <a:srgbClr val="1E293B"/>
-                </a:solidFill>
-                <a:latin typeface="Segoe UI"/>
-              </a:defRPr>
-            </a:pPr>
-            <a:r>
-              <a:t>• Bộ phận BA xây dựng tài liệu đặc tả yêu cầu hệ thống (SRS/Backlog) từ thông tin khách hàng, cập nhật phản hồi đến khi được phê duyệt chính thức.</a:t>
-            </a:r>
-          </a:p>
-          <a:p>
-            <a:pPr>
-              <a:spcAft>
-                <a:spcPts val="200"/>
-              </a:spcAft>
-              <a:defRPr sz="950">
-                <a:solidFill>
-                  <a:srgbClr val="1E293B"/>
-                </a:solidFill>
-                <a:latin typeface="Segoe UI"/>
-              </a:defRPr>
-            </a:pPr>
-            <a:r>
-              <a:t>• Quản lý dự án (PM) chốt phạm vi công việc (Baseline Scope), lập kế hoạch chi tiết và thống nhất các mốc bàn giao.</a:t>
-            </a:r>
-          </a:p>
-        </p:txBody>
-      </p:sp>
-      <p:sp>
-        <p:nvSpPr>
-          <p:cNvPr id="21" name="Rounded Rectangle 20"/>
-          <p:cNvSpPr/>
-          <p:nvPr/>
-        </p:nvSpPr>
-        <p:spPr>
-          <a:xfrm>
-            <a:off x="731520" y="3300984"/>
-            <a:ext cx="10728655" cy="896112"/>
-          </a:xfrm>
-          <a:prstGeom prst="roundRect">
-            <a:avLst/>
-          </a:prstGeom>
-          <a:solidFill>
-            <a:srgbClr val="F8FAFC"/>
-          </a:solidFill>
-          <a:ln w="12700">
-            <a:solidFill>
-              <a:srgbClr val="E2E8F0"/>
-            </a:solidFill>
-          </a:ln>
-        </p:spPr>
-        <p:style>
-          <a:lnRef idx="1">
-            <a:schemeClr val="accent1"/>
-          </a:lnRef>
-          <a:fillRef idx="3">
-            <a:schemeClr val="accent1"/>
-          </a:fillRef>
-          <a:effectRef idx="2">
-            <a:schemeClr val="accent1"/>
-          </a:effectRef>
-          <a:fontRef idx="minor">
-            <a:schemeClr val="lt1"/>
-          </a:fontRef>
-        </p:style>
-        <p:txBody>
-          <a:bodyPr rtlCol="0" anchor="ctr"/>
-          <a:lstStyle/>
-          <a:p>
-            <a:pPr algn="ctr"/>
-            <a:endParaRPr/>
-          </a:p>
-        </p:txBody>
-      </p:sp>
-      <p:sp>
-        <p:nvSpPr>
-          <p:cNvPr id="22" name="Rounded Rectangle 21"/>
-          <p:cNvSpPr/>
-          <p:nvPr/>
-        </p:nvSpPr>
-        <p:spPr>
-          <a:xfrm>
-            <a:off x="731520" y="3300984"/>
-            <a:ext cx="109728" cy="896112"/>
-          </a:xfrm>
-          <a:prstGeom prst="roundRect">
-            <a:avLst/>
-          </a:prstGeom>
-          <a:solidFill>
-            <a:srgbClr val="005BAA"/>
-          </a:solidFill>
-          <a:ln>
-            <a:noFill/>
-          </a:ln>
-        </p:spPr>
-        <p:style>
-          <a:lnRef idx="1">
-            <a:schemeClr val="accent1"/>
-          </a:lnRef>
-          <a:fillRef idx="3">
-            <a:schemeClr val="accent1"/>
-          </a:fillRef>
-          <a:effectRef idx="2">
-            <a:schemeClr val="accent1"/>
-          </a:effectRef>
-          <a:fontRef idx="minor">
-            <a:schemeClr val="lt1"/>
-          </a:fontRef>
-        </p:style>
-        <p:txBody>
-          <a:bodyPr rtlCol="0" anchor="ctr"/>
-          <a:lstStyle/>
-          <a:p>
-            <a:pPr algn="ctr"/>
-            <a:endParaRPr/>
-          </a:p>
-        </p:txBody>
-      </p:sp>
-      <p:sp>
-        <p:nvSpPr>
-          <p:cNvPr id="23" name="TextBox 22"/>
-          <p:cNvSpPr txBox="1"/>
-          <p:nvPr/>
-        </p:nvSpPr>
-        <p:spPr>
-          <a:xfrm>
-            <a:off x="1005840" y="3392424"/>
-            <a:ext cx="1645920" cy="274320"/>
-          </a:xfrm>
-          <a:prstGeom prst="rect">
-            <a:avLst/>
-          </a:prstGeom>
-          <a:noFill/>
-        </p:spPr>
-        <p:txBody>
-          <a:bodyPr wrap="none">
-            <a:spAutoFit/>
-          </a:bodyPr>
-          <a:lstStyle/>
-          <a:p>
-            <a:pPr>
-              <a:defRPr sz="1000" b="1">
-                <a:solidFill>
-                  <a:srgbClr val="005BAA"/>
-                </a:solidFill>
-                <a:latin typeface="Segoe UI"/>
-              </a:defRPr>
-            </a:pPr>
-            <a:r>
-              <a:t>GIAI ĐOẠN 3</a:t>
-            </a:r>
-          </a:p>
-        </p:txBody>
-      </p:sp>
-      <p:sp>
-        <p:nvSpPr>
-          <p:cNvPr id="24" name="TextBox 23"/>
-          <p:cNvSpPr txBox="1"/>
-          <p:nvPr/>
-        </p:nvSpPr>
-        <p:spPr>
-          <a:xfrm>
-            <a:off x="1005840" y="3621024"/>
-            <a:ext cx="2011680" cy="502920"/>
-          </a:xfrm>
-          <a:prstGeom prst="rect">
-            <a:avLst/>
-          </a:prstGeom>
-          <a:noFill/>
-        </p:spPr>
-        <p:txBody>
-          <a:bodyPr wrap="none">
-            <a:spAutoFit/>
-          </a:bodyPr>
-          <a:lstStyle/>
-          <a:p>
-            <a:pPr>
-              <a:defRPr sz="1100" b="1">
-                <a:solidFill>
-                  <a:srgbClr val="0A2540"/>
-                </a:solidFill>
-                <a:latin typeface="Segoe UI"/>
-              </a:defRPr>
-            </a:pPr>
-            <a:r>
-              <a:t>PHÁT TRIỂN &amp; TEST NỘI BỘ</a:t>
-            </a:r>
-          </a:p>
-        </p:txBody>
-      </p:sp>
-      <p:sp>
-        <p:nvSpPr>
-          <p:cNvPr id="25" name="TextBox 24"/>
-          <p:cNvSpPr txBox="1"/>
-          <p:nvPr/>
-        </p:nvSpPr>
-        <p:spPr>
-          <a:xfrm>
-            <a:off x="3108960" y="3374136"/>
-            <a:ext cx="8229600" cy="749808"/>
-          </a:xfrm>
-          <a:prstGeom prst="rect">
-            <a:avLst/>
-          </a:prstGeom>
-          <a:noFill/>
-        </p:spPr>
-        <p:txBody>
-          <a:bodyPr wrap="square">
-            <a:spAutoFit/>
-          </a:bodyPr>
-          <a:lstStyle/>
-          <a:p>
-            <a:pPr>
-              <a:spcAft>
-                <a:spcPts val="200"/>
-              </a:spcAft>
-              <a:defRPr sz="950">
-                <a:solidFill>
-                  <a:srgbClr val="1E293B"/>
-                </a:solidFill>
-                <a:latin typeface="Segoe UI"/>
-              </a:defRPr>
-            </a:pPr>
-            <a:r>
-              <a:t>• Đội Lập trình (Dev) tiến hành viết mã nguồn theo các Sprint hoặc giai đoạn kiến trúc. QA Team song song chuẩn bị kịch bản kiểm thử (Test Cases).</a:t>
-            </a:r>
-          </a:p>
-          <a:p>
-            <a:pPr>
-              <a:spcAft>
-                <a:spcPts val="200"/>
-              </a:spcAft>
-              <a:defRPr sz="950">
-                <a:solidFill>
-                  <a:srgbClr val="1E293B"/>
-                </a:solidFill>
-                <a:latin typeface="Segoe UI"/>
-              </a:defRPr>
-            </a:pPr>
-            <a:r>
-              <a:t>• Sau khi hoàn tất lập trình, QA thực hiện kiểm thử chức năng và hiệu năng; Dev sửa lỗi đến khi sản phẩm đạt tiêu chuẩn chất lượng nội bộ.</a:t>
-            </a:r>
-          </a:p>
-        </p:txBody>
-      </p:sp>
-      <p:sp>
-        <p:nvSpPr>
-          <p:cNvPr id="26" name="Rounded Rectangle 25"/>
-          <p:cNvSpPr/>
-          <p:nvPr/>
-        </p:nvSpPr>
-        <p:spPr>
-          <a:xfrm>
-            <a:off x="731520" y="4288536"/>
-            <a:ext cx="10728655" cy="896112"/>
-          </a:xfrm>
-          <a:prstGeom prst="roundRect">
-            <a:avLst/>
-          </a:prstGeom>
-          <a:solidFill>
-            <a:srgbClr val="F8FAFC"/>
-          </a:solidFill>
-          <a:ln w="12700">
-            <a:solidFill>
-              <a:srgbClr val="E2E8F0"/>
-            </a:solidFill>
-          </a:ln>
-        </p:spPr>
-        <p:style>
-          <a:lnRef idx="1">
-            <a:schemeClr val="accent1"/>
-          </a:lnRef>
-          <a:fillRef idx="3">
-            <a:schemeClr val="accent1"/>
-          </a:fillRef>
-          <a:effectRef idx="2">
-            <a:schemeClr val="accent1"/>
-          </a:effectRef>
-          <a:fontRef idx="minor">
-            <a:schemeClr val="lt1"/>
-          </a:fontRef>
-        </p:style>
-        <p:txBody>
-          <a:bodyPr rtlCol="0" anchor="ctr"/>
-          <a:lstStyle/>
-          <a:p>
-            <a:pPr algn="ctr"/>
-            <a:endParaRPr/>
-          </a:p>
-        </p:txBody>
-      </p:sp>
-      <p:sp>
-        <p:nvSpPr>
-          <p:cNvPr id="27" name="Rounded Rectangle 26"/>
-          <p:cNvSpPr/>
-          <p:nvPr/>
-        </p:nvSpPr>
-        <p:spPr>
-          <a:xfrm>
-            <a:off x="731520" y="4288536"/>
-            <a:ext cx="109728" cy="896112"/>
-          </a:xfrm>
-          <a:prstGeom prst="roundRect">
-            <a:avLst/>
-          </a:prstGeom>
-          <a:solidFill>
-            <a:srgbClr val="F37021"/>
-          </a:solidFill>
-          <a:ln>
-            <a:noFill/>
-          </a:ln>
-        </p:spPr>
-        <p:style>
-          <a:lnRef idx="1">
-            <a:schemeClr val="accent1"/>
-          </a:lnRef>
-          <a:fillRef idx="3">
-            <a:schemeClr val="accent1"/>
-          </a:fillRef>
-          <a:effectRef idx="2">
-            <a:schemeClr val="accent1"/>
-          </a:effectRef>
-          <a:fontRef idx="minor">
-            <a:schemeClr val="lt1"/>
-          </a:fontRef>
-        </p:style>
-        <p:txBody>
-          <a:bodyPr rtlCol="0" anchor="ctr"/>
-          <a:lstStyle/>
-          <a:p>
-            <a:pPr algn="ctr"/>
-            <a:endParaRPr/>
-          </a:p>
-        </p:txBody>
-      </p:sp>
-      <p:sp>
-        <p:nvSpPr>
-          <p:cNvPr id="28" name="TextBox 27"/>
-          <p:cNvSpPr txBox="1"/>
-          <p:nvPr/>
-        </p:nvSpPr>
-        <p:spPr>
-          <a:xfrm>
-            <a:off x="1005840" y="4379976"/>
-            <a:ext cx="1645920" cy="274320"/>
-          </a:xfrm>
-          <a:prstGeom prst="rect">
-            <a:avLst/>
-          </a:prstGeom>
-          <a:noFill/>
-        </p:spPr>
-        <p:txBody>
-          <a:bodyPr wrap="none">
-            <a:spAutoFit/>
-          </a:bodyPr>
-          <a:lstStyle/>
-          <a:p>
-            <a:pPr>
-              <a:defRPr sz="1000" b="1">
-                <a:solidFill>
-                  <a:srgbClr val="F37021"/>
-                </a:solidFill>
-                <a:latin typeface="Segoe UI"/>
-              </a:defRPr>
-            </a:pPr>
-            <a:r>
-              <a:t>GIAI ĐOẠN 4</a:t>
-            </a:r>
-          </a:p>
-        </p:txBody>
-      </p:sp>
-      <p:sp>
-        <p:nvSpPr>
-          <p:cNvPr id="29" name="TextBox 28"/>
-          <p:cNvSpPr txBox="1"/>
-          <p:nvPr/>
-        </p:nvSpPr>
-        <p:spPr>
-          <a:xfrm>
-            <a:off x="1005840" y="4608576"/>
-            <a:ext cx="2011680" cy="502920"/>
-          </a:xfrm>
-          <a:prstGeom prst="rect">
-            <a:avLst/>
-          </a:prstGeom>
-          <a:noFill/>
-        </p:spPr>
-        <p:txBody>
-          <a:bodyPr wrap="none">
-            <a:spAutoFit/>
-          </a:bodyPr>
-          <a:lstStyle/>
-          <a:p>
-            <a:pPr>
-              <a:defRPr sz="1100" b="1">
-                <a:solidFill>
-                  <a:srgbClr val="0A2540"/>
-                </a:solidFill>
-                <a:latin typeface="Segoe UI"/>
-              </a:defRPr>
-            </a:pPr>
-            <a:r>
-              <a:t>NGHIỆM THU NGƯỜI DÙNG (UAT)</a:t>
-            </a:r>
-          </a:p>
-        </p:txBody>
-      </p:sp>
-      <p:sp>
-        <p:nvSpPr>
-          <p:cNvPr id="30" name="TextBox 29"/>
-          <p:cNvSpPr txBox="1"/>
-          <p:nvPr/>
-        </p:nvSpPr>
-        <p:spPr>
-          <a:xfrm>
-            <a:off x="3108960" y="4361688"/>
-            <a:ext cx="8229600" cy="749808"/>
-          </a:xfrm>
-          <a:prstGeom prst="rect">
-            <a:avLst/>
-          </a:prstGeom>
-          <a:noFill/>
-        </p:spPr>
-        <p:txBody>
-          <a:bodyPr wrap="square">
-            <a:spAutoFit/>
-          </a:bodyPr>
-          <a:lstStyle/>
-          <a:p>
-            <a:pPr>
-              <a:spcAft>
-                <a:spcPts val="200"/>
-              </a:spcAft>
-              <a:defRPr sz="950">
-                <a:solidFill>
-                  <a:srgbClr val="1E293B"/>
-                </a:solidFill>
-                <a:latin typeface="Segoe UI"/>
-              </a:defRPr>
-            </a:pPr>
-            <a:r>
-              <a:t>• PM đưa phần mềm lên môi trường UAT để khách hàng trực tiếp kiểm thử. Nếu có lỗi kỹ thuật, Dev sửa lỗi ngay.</a:t>
-            </a:r>
-          </a:p>
-          <a:p>
-            <a:pPr>
-              <a:spcAft>
-                <a:spcPts val="200"/>
-              </a:spcAft>
-              <a:defRPr sz="950">
-                <a:solidFill>
-                  <a:srgbClr val="1E293B"/>
-                </a:solidFill>
-                <a:latin typeface="Segoe UI"/>
-              </a:defRPr>
-            </a:pPr>
-            <a:r>
-              <a:t>• Nếu phát sinh yêu cầu mới ngoài phạm vi hợp đồng, PM kích hoạt quy trình quản lý thay đổi (CR) và báo giá bổ sung. Khách hàng ký duyệt khi đạt yêu cầu.</a:t>
-            </a:r>
-          </a:p>
-        </p:txBody>
-      </p:sp>
-      <p:sp>
-        <p:nvSpPr>
-          <p:cNvPr id="31" name="Rounded Rectangle 30"/>
-          <p:cNvSpPr/>
-          <p:nvPr/>
-        </p:nvSpPr>
-        <p:spPr>
-          <a:xfrm>
-            <a:off x="731520" y="5276088"/>
-            <a:ext cx="10728655" cy="896112"/>
-          </a:xfrm>
-          <a:prstGeom prst="roundRect">
-            <a:avLst/>
-          </a:prstGeom>
-          <a:solidFill>
-            <a:srgbClr val="F8FAFC"/>
-          </a:solidFill>
-          <a:ln w="12700">
-            <a:solidFill>
-              <a:srgbClr val="E2E8F0"/>
-            </a:solidFill>
-          </a:ln>
-        </p:spPr>
-        <p:style>
-          <a:lnRef idx="1">
-            <a:schemeClr val="accent1"/>
-          </a:lnRef>
-          <a:fillRef idx="3">
-            <a:schemeClr val="accent1"/>
-          </a:fillRef>
-          <a:effectRef idx="2">
-            <a:schemeClr val="accent1"/>
-          </a:effectRef>
-          <a:fontRef idx="minor">
-            <a:schemeClr val="lt1"/>
-          </a:fontRef>
-        </p:style>
-        <p:txBody>
-          <a:bodyPr rtlCol="0" anchor="ctr"/>
-          <a:lstStyle/>
-          <a:p>
-            <a:pPr algn="ctr"/>
-            <a:endParaRPr/>
-          </a:p>
-        </p:txBody>
-      </p:sp>
-      <p:sp>
-        <p:nvSpPr>
-          <p:cNvPr id="32" name="Rounded Rectangle 31"/>
-          <p:cNvSpPr/>
-          <p:nvPr/>
-        </p:nvSpPr>
-        <p:spPr>
-          <a:xfrm>
-            <a:off x="731520" y="5276088"/>
-            <a:ext cx="109728" cy="896112"/>
-          </a:xfrm>
-          <a:prstGeom prst="roundRect">
-            <a:avLst/>
-          </a:prstGeom>
-          <a:solidFill>
-            <a:srgbClr val="0DB14B"/>
-          </a:solidFill>
-          <a:ln>
-            <a:noFill/>
-          </a:ln>
-        </p:spPr>
-        <p:style>
-          <a:lnRef idx="1">
-            <a:schemeClr val="accent1"/>
-          </a:lnRef>
-          <a:fillRef idx="3">
-            <a:schemeClr val="accent1"/>
-          </a:fillRef>
-          <a:effectRef idx="2">
-            <a:schemeClr val="accent1"/>
-          </a:effectRef>
-          <a:fontRef idx="minor">
-            <a:schemeClr val="lt1"/>
-          </a:fontRef>
-        </p:style>
-        <p:txBody>
-          <a:bodyPr rtlCol="0" anchor="ctr"/>
-          <a:lstStyle/>
-          <a:p>
-            <a:pPr algn="ctr"/>
-            <a:endParaRPr/>
-          </a:p>
-        </p:txBody>
-      </p:sp>
-      <p:sp>
-        <p:nvSpPr>
-          <p:cNvPr id="33" name="TextBox 32"/>
-          <p:cNvSpPr txBox="1"/>
-          <p:nvPr/>
-        </p:nvSpPr>
-        <p:spPr>
-          <a:xfrm>
-            <a:off x="1005840" y="5367528"/>
-            <a:ext cx="1645920" cy="274320"/>
-          </a:xfrm>
-          <a:prstGeom prst="rect">
-            <a:avLst/>
-          </a:prstGeom>
-          <a:noFill/>
-        </p:spPr>
-        <p:txBody>
-          <a:bodyPr wrap="none">
-            <a:spAutoFit/>
-          </a:bodyPr>
-          <a:lstStyle/>
-          <a:p>
-            <a:pPr>
-              <a:defRPr sz="1000" b="1">
-                <a:solidFill>
-                  <a:srgbClr val="0DB14B"/>
-                </a:solidFill>
-                <a:latin typeface="Segoe UI"/>
-              </a:defRPr>
-            </a:pPr>
-            <a:r>
-              <a:rPr dirty="0"/>
-              <a:t>GIAI ĐOẠN 5</a:t>
-            </a:r>
-          </a:p>
-        </p:txBody>
-      </p:sp>
-      <p:sp>
-        <p:nvSpPr>
-          <p:cNvPr id="34" name="TextBox 33"/>
-          <p:cNvSpPr txBox="1"/>
-          <p:nvPr/>
-        </p:nvSpPr>
-        <p:spPr>
-          <a:xfrm>
-            <a:off x="1005840" y="5596128"/>
-            <a:ext cx="2011680" cy="502920"/>
-          </a:xfrm>
-          <a:prstGeom prst="rect">
-            <a:avLst/>
-          </a:prstGeom>
-          <a:noFill/>
-        </p:spPr>
-        <p:txBody>
-          <a:bodyPr wrap="none">
-            <a:spAutoFit/>
-          </a:bodyPr>
-          <a:lstStyle/>
-          <a:p>
-            <a:pPr>
-              <a:defRPr sz="1100" b="1">
-                <a:solidFill>
-                  <a:srgbClr val="0A2540"/>
-                </a:solidFill>
-                <a:latin typeface="Segoe UI"/>
-              </a:defRPr>
-            </a:pPr>
-            <a:r>
-              <a:t>BÀN GIAO &amp; ĐÓNG DỰ ÁN</a:t>
-            </a:r>
-          </a:p>
-        </p:txBody>
-      </p:sp>
-      <p:sp>
-        <p:nvSpPr>
-          <p:cNvPr id="35" name="TextBox 34"/>
-          <p:cNvSpPr txBox="1"/>
-          <p:nvPr/>
-        </p:nvSpPr>
-        <p:spPr>
-          <a:xfrm>
-            <a:off x="3108960" y="5349240"/>
-            <a:ext cx="8229600" cy="749808"/>
-          </a:xfrm>
-          <a:prstGeom prst="rect">
-            <a:avLst/>
-          </a:prstGeom>
-          <a:noFill/>
-        </p:spPr>
-        <p:txBody>
-          <a:bodyPr wrap="square">
-            <a:spAutoFit/>
-          </a:bodyPr>
-          <a:lstStyle/>
-          <a:p>
-            <a:pPr>
-              <a:spcAft>
-                <a:spcPts val="200"/>
-              </a:spcAft>
-              <a:defRPr sz="950">
-                <a:solidFill>
-                  <a:srgbClr val="1E293B"/>
-                </a:solidFill>
-                <a:latin typeface="Segoe UI"/>
-              </a:defRPr>
-            </a:pPr>
-            <a:r>
-              <a:t>• Triển khai hệ thống lên môi trường chính thức (Production). Bàn giao toàn bộ mã nguồn, tài liệu hướng dẫn vận hành cho khách hàng.</a:t>
-            </a:r>
-          </a:p>
-          <a:p>
-            <a:pPr>
-              <a:spcAft>
-                <a:spcPts val="200"/>
-              </a:spcAft>
-              <a:defRPr sz="950">
-                <a:solidFill>
-                  <a:srgbClr val="1E293B"/>
-                </a:solidFill>
-                <a:latin typeface="Segoe UI"/>
-              </a:defRPr>
-            </a:pPr>
-            <a:r>
-              <a:t>• Khách hàng ký biên bản nghiệm thu cuối cùng và thực hiện thanh toán; dự án được đóng chính thức trên hệ thống quản lý sau khi xác nhận tài chính.</a:t>
-            </a:r>
-          </a:p>
-        </p:txBody>
-      </p:sp>
-    </p:spTree>
   </p:cSld>
   <p:clrMapOvr>
     <a:masterClrMapping/>
@@ -11798,7 +12298,7 @@
             </a:pPr>
             <a:r>
               <a:rPr lang="vi-VN" dirty="0"/>
-              <a:t>Khai Phá Quy Trình Bằng Các Câu Hỏi Định Tính</a:t>
+              <a:t>Phương Pháp Khai Phá Quy Trình</a:t>
             </a:r>
           </a:p>
         </p:txBody>
@@ -11945,14 +12445,14 @@
       </p:sp>
       <p:sp>
         <p:nvSpPr>
-          <p:cNvPr id="11" name="Rounded Rectangle 10"/>
+          <p:cNvPr id="12" name="Rounded Rectangle 11"/>
           <p:cNvSpPr/>
           <p:nvPr/>
         </p:nvSpPr>
         <p:spPr>
           <a:xfrm>
-            <a:off x="731521" y="1179576"/>
-            <a:ext cx="5242254" cy="5148072"/>
+            <a:off x="731520" y="1517904"/>
+            <a:ext cx="4438127" cy="4468430"/>
           </a:xfrm>
           <a:prstGeom prst="roundRect">
             <a:avLst/>
@@ -11990,14 +12490,14 @@
               </a:spcAft>
               <a:defRPr sz="1300" b="1">
                 <a:solidFill>
-                  <a:srgbClr val="0A2540"/>
+                  <a:srgbClr val="0DB14B"/>
                 </a:solidFill>
                 <a:latin typeface="Segoe UI"/>
               </a:defRPr>
             </a:pPr>
             <a:r>
               <a:rPr lang="vi-VN" dirty="0"/>
-              <a:t>CÂU HỎI CÓ CẤU TRÚC</a:t>
+              <a:t>PHƯƠNG PHÁP TIẾP CẬN</a:t>
             </a:r>
           </a:p>
           <a:p>
@@ -12013,22 +12513,17 @@
               </a:defRPr>
             </a:pPr>
             <a:r>
-              <a:rPr lang="vi-VN" sz="850" b="1" dirty="0">
-                <a:solidFill>
-                  <a:srgbClr val="F37021"/>
-                </a:solidFill>
-                <a:latin typeface="Segoe UI"/>
-              </a:rPr>
-              <a:t>PM: Anh/chị đánh giá thế nào về tính minh bạch của quy trình xử lý Change Request hiện tại?  </a:t>
-            </a:r>
-          </a:p>
-          <a:p>
-            <a:pPr marL="228600" indent="-228600">
+              <a:rPr lang="vi-VN" dirty="0"/>
+              <a:t>Dựa trên bằng chứng (Evidence-based)</a:t>
+            </a:r>
+          </a:p>
+          <a:p>
+            <a:pPr marL="171450" indent="-171450">
               <a:spcAft>
                 <a:spcPts val="300"/>
               </a:spcAft>
-              <a:buFont typeface="+mj-lt"/>
-              <a:buAutoNum type="alphaUcPeriod"/>
+              <a:buFont typeface="Arial" panose="020B0604020202020204" pitchFamily="34" charset="0"/>
+              <a:buChar char="•"/>
               <a:defRPr sz="1050">
                 <a:solidFill>
                   <a:srgbClr val="1E293B"/>
@@ -12037,17 +12532,17 @@
               </a:defRPr>
             </a:pPr>
             <a:r>
-              <a:rPr lang="vi-VN" sz="850" dirty="0"/>
-              <a:t>Rất minh bạch  </a:t>
-            </a:r>
-          </a:p>
-          <a:p>
-            <a:pPr marL="228600" indent="-228600">
+              <a:rPr lang="vi-VN" dirty="0"/>
+              <a:t>Nguồn dữ liệu thực tế:</a:t>
+            </a:r>
+          </a:p>
+          <a:p>
+            <a:pPr marL="171450" indent="-171450">
               <a:spcAft>
                 <a:spcPts val="300"/>
               </a:spcAft>
-              <a:buFont typeface="+mj-lt"/>
-              <a:buAutoNum type="alphaUcPeriod"/>
+              <a:buFont typeface="Arial" panose="020B0604020202020204" pitchFamily="34" charset="0"/>
+              <a:buChar char="•"/>
               <a:defRPr sz="1050">
                 <a:solidFill>
                   <a:srgbClr val="1E293B"/>
@@ -12056,17 +12551,17 @@
               </a:defRPr>
             </a:pPr>
             <a:r>
-              <a:rPr lang="vi-VN" sz="850" dirty="0"/>
-              <a:t>Bình thường  </a:t>
-            </a:r>
-          </a:p>
-          <a:p>
-            <a:pPr marL="228600" indent="-228600">
+              <a:rPr lang="vi-VN" dirty="0"/>
+              <a:t>Hợp đồng,</a:t>
+            </a:r>
+          </a:p>
+          <a:p>
+            <a:pPr marL="171450" indent="-171450">
               <a:spcAft>
                 <a:spcPts val="300"/>
               </a:spcAft>
-              <a:buFont typeface="+mj-lt"/>
-              <a:buAutoNum type="alphaUcPeriod"/>
+              <a:buFont typeface="Arial" panose="020B0604020202020204" pitchFamily="34" charset="0"/>
+              <a:buChar char="•"/>
               <a:defRPr sz="1050">
                 <a:solidFill>
                   <a:srgbClr val="1E293B"/>
@@ -12075,17 +12570,17 @@
               </a:defRPr>
             </a:pPr>
             <a:r>
-              <a:rPr lang="vi-VN" sz="850" dirty="0"/>
-              <a:t>Không minh bạch  </a:t>
-            </a:r>
-          </a:p>
-          <a:p>
-            <a:pPr marL="228600" indent="-228600">
+              <a:rPr lang="vi-VN" dirty="0"/>
+              <a:t>Tài liệu yêu cầu,</a:t>
+            </a:r>
+          </a:p>
+          <a:p>
+            <a:pPr marL="171450" indent="-171450">
               <a:spcAft>
                 <a:spcPts val="300"/>
               </a:spcAft>
-              <a:buFont typeface="+mj-lt"/>
-              <a:buAutoNum type="alphaUcPeriod"/>
+              <a:buFont typeface="Arial" panose="020B0604020202020204" pitchFamily="34" charset="0"/>
+              <a:buChar char="•"/>
               <a:defRPr sz="1050">
                 <a:solidFill>
                   <a:srgbClr val="1E293B"/>
@@ -12094,15 +12589,17 @@
               </a:defRPr>
             </a:pPr>
             <a:r>
-              <a:rPr lang="vi-VN" sz="850" dirty="0"/>
-              <a:t>Rất không minh bạch</a:t>
-            </a:r>
-          </a:p>
-          <a:p>
-            <a:pPr>
+              <a:rPr lang="vi-VN" dirty="0"/>
+              <a:t>Biên bản nghiệm thu,</a:t>
+            </a:r>
+          </a:p>
+          <a:p>
+            <a:pPr marL="171450" indent="-171450">
               <a:spcAft>
                 <a:spcPts val="300"/>
               </a:spcAft>
+              <a:buFont typeface="Arial" panose="020B0604020202020204" pitchFamily="34" charset="0"/>
+              <a:buChar char="•"/>
               <a:defRPr sz="1050">
                 <a:solidFill>
                   <a:srgbClr val="1E293B"/>
@@ -12111,22 +12608,17 @@
               </a:defRPr>
             </a:pPr>
             <a:r>
-              <a:rPr lang="vi-VN" sz="850" b="1" dirty="0">
-                <a:solidFill>
-                  <a:srgbClr val="F37021"/>
-                </a:solidFill>
-                <a:latin typeface="Segoe UI"/>
-              </a:rPr>
-              <a:t>BA: Khó khăn lớn nhất khi chốt tài liệu đặc tả (SRS) với khách hàng là gì?  </a:t>
-            </a:r>
-          </a:p>
-          <a:p>
-            <a:pPr marL="228600" indent="-228600">
+              <a:rPr lang="vi-VN" dirty="0"/>
+              <a:t>Workshop,</a:t>
+            </a:r>
+          </a:p>
+          <a:p>
+            <a:pPr marL="171450" indent="-171450">
               <a:spcAft>
                 <a:spcPts val="300"/>
               </a:spcAft>
-              <a:buFont typeface="+mj-lt"/>
-              <a:buAutoNum type="alphaUcPeriod"/>
+              <a:buFont typeface="Arial" panose="020B0604020202020204" pitchFamily="34" charset="0"/>
+              <a:buChar char="•"/>
               <a:defRPr sz="1050">
                 <a:solidFill>
                   <a:srgbClr val="1E293B"/>
@@ -12135,373 +12627,478 @@
               </a:defRPr>
             </a:pPr>
             <a:r>
-              <a:rPr lang="vi-VN" sz="850" dirty="0"/>
-              <a:t>Khách hàng không nắm rõ nghiệp vụ  </a:t>
-            </a:r>
-          </a:p>
-          <a:p>
-            <a:pPr marL="228600" indent="-228600">
-              <a:spcAft>
-                <a:spcPts val="300"/>
-              </a:spcAft>
-              <a:buFont typeface="+mj-lt"/>
-              <a:buAutoNum type="alphaUcPeriod"/>
-              <a:defRPr sz="1050">
-                <a:solidFill>
-                  <a:srgbClr val="1E293B"/>
-                </a:solidFill>
-                <a:latin typeface="Segoe UI"/>
-              </a:defRPr>
-            </a:pPr>
-            <a:r>
-              <a:rPr lang="vi-VN" sz="850" dirty="0"/>
-              <a:t>Yêu cầu thay đổi liên tục  </a:t>
-            </a:r>
-          </a:p>
-          <a:p>
-            <a:pPr marL="228600" indent="-228600">
-              <a:spcAft>
-                <a:spcPts val="300"/>
-              </a:spcAft>
-              <a:buFont typeface="+mj-lt"/>
-              <a:buAutoNum type="alphaUcPeriod"/>
-              <a:defRPr sz="1050">
-                <a:solidFill>
-                  <a:srgbClr val="1E293B"/>
-                </a:solidFill>
-                <a:latin typeface="Segoe UI"/>
-              </a:defRPr>
-            </a:pPr>
-            <a:r>
-              <a:rPr lang="vi-VN" sz="850" dirty="0"/>
-              <a:t>Tài liệu chưa rõ ràng  </a:t>
-            </a:r>
-          </a:p>
-          <a:p>
-            <a:pPr marL="228600" indent="-228600">
-              <a:spcAft>
-                <a:spcPts val="300"/>
-              </a:spcAft>
-              <a:buFont typeface="+mj-lt"/>
-              <a:buAutoNum type="alphaUcPeriod"/>
-              <a:defRPr sz="1050">
-                <a:solidFill>
-                  <a:srgbClr val="1E293B"/>
-                </a:solidFill>
-                <a:latin typeface="Segoe UI"/>
-              </a:defRPr>
-            </a:pPr>
-            <a:r>
-              <a:rPr lang="vi-VN" sz="850" dirty="0"/>
-              <a:t>Khác</a:t>
-            </a:r>
-          </a:p>
-          <a:p>
-            <a:pPr>
-              <a:spcAft>
-                <a:spcPts val="300"/>
-              </a:spcAft>
-              <a:defRPr sz="1050">
-                <a:solidFill>
-                  <a:srgbClr val="1E293B"/>
-                </a:solidFill>
-                <a:latin typeface="Segoe UI"/>
-              </a:defRPr>
-            </a:pPr>
-            <a:r>
-              <a:rPr lang="vi-VN" sz="850" b="1" dirty="0">
-                <a:solidFill>
-                  <a:srgbClr val="F37021"/>
-                </a:solidFill>
-                <a:latin typeface="Segoe UI"/>
-              </a:rPr>
-              <a:t>QA: Theo anh/chị, nguyên nhân cốt lõi nào dẫn đến việc phát hiện lỗi trễ ở khâu UAT thay vì ở khâu Test nội bộ?  </a:t>
-            </a:r>
-          </a:p>
-          <a:p>
-            <a:pPr marL="228600" indent="-228600">
-              <a:spcAft>
-                <a:spcPts val="300"/>
-              </a:spcAft>
-              <a:buFont typeface="+mj-lt"/>
-              <a:buAutoNum type="alphaUcPeriod"/>
-              <a:defRPr sz="1050">
-                <a:solidFill>
-                  <a:srgbClr val="1E293B"/>
-                </a:solidFill>
-                <a:latin typeface="Segoe UI"/>
-              </a:defRPr>
-            </a:pPr>
-            <a:r>
-              <a:rPr lang="vi-VN" sz="850" dirty="0"/>
-              <a:t>Test case chưa đầy đủ  </a:t>
-            </a:r>
-          </a:p>
-          <a:p>
-            <a:pPr marL="228600" indent="-228600">
-              <a:spcAft>
-                <a:spcPts val="300"/>
-              </a:spcAft>
-              <a:buFont typeface="+mj-lt"/>
-              <a:buAutoNum type="alphaUcPeriod"/>
-              <a:defRPr sz="1050">
-                <a:solidFill>
-                  <a:srgbClr val="1E293B"/>
-                </a:solidFill>
-                <a:latin typeface="Segoe UI"/>
-              </a:defRPr>
-            </a:pPr>
-            <a:r>
-              <a:rPr lang="vi-VN" sz="850" dirty="0"/>
-              <a:t>Môi trường UAT không tương đồng  </a:t>
-            </a:r>
-          </a:p>
-          <a:p>
-            <a:pPr marL="228600" indent="-228600">
-              <a:spcAft>
-                <a:spcPts val="300"/>
-              </a:spcAft>
-              <a:buFont typeface="+mj-lt"/>
-              <a:buAutoNum type="alphaUcPeriod"/>
-              <a:defRPr sz="1050">
-                <a:solidFill>
-                  <a:srgbClr val="1E293B"/>
-                </a:solidFill>
-                <a:latin typeface="Segoe UI"/>
-              </a:defRPr>
-            </a:pPr>
-            <a:r>
-              <a:rPr lang="vi-VN" sz="850" dirty="0"/>
-              <a:t>Khách hàng chưa có kịch bản rõ ràng  </a:t>
-            </a:r>
-          </a:p>
-          <a:p>
-            <a:pPr marL="228600" indent="-228600">
-              <a:spcAft>
-                <a:spcPts val="300"/>
-              </a:spcAft>
-              <a:buFont typeface="+mj-lt"/>
-              <a:buAutoNum type="alphaUcPeriod"/>
-              <a:defRPr sz="1050">
-                <a:solidFill>
-                  <a:srgbClr val="1E293B"/>
-                </a:solidFill>
-                <a:latin typeface="Segoe UI"/>
-              </a:defRPr>
-            </a:pPr>
-            <a:r>
-              <a:rPr lang="vi-VN" sz="850" dirty="0"/>
-              <a:t>Khác</a:t>
-            </a:r>
-          </a:p>
-          <a:p>
-            <a:pPr>
-              <a:spcAft>
-                <a:spcPts val="300"/>
-              </a:spcAft>
-              <a:defRPr sz="1050">
-                <a:solidFill>
-                  <a:srgbClr val="1E293B"/>
-                </a:solidFill>
-                <a:latin typeface="Segoe UI"/>
-              </a:defRPr>
-            </a:pPr>
-            <a:r>
-              <a:rPr lang="vi-VN" sz="850" b="1" dirty="0">
-                <a:solidFill>
-                  <a:srgbClr val="F37021"/>
-                </a:solidFill>
-                <a:latin typeface="Segoe UI"/>
-              </a:rPr>
-              <a:t>Sales: Khách hàng thường phàn nàn về vấn đề gì nhất ở giai đoạn chốt báo giá sơ bộ?  </a:t>
-            </a:r>
-          </a:p>
-          <a:p>
-            <a:pPr marL="228600" indent="-228600">
-              <a:spcAft>
-                <a:spcPts val="300"/>
-              </a:spcAft>
-              <a:buFont typeface="+mj-lt"/>
-              <a:buAutoNum type="alphaUcPeriod"/>
-              <a:defRPr sz="1050">
-                <a:solidFill>
-                  <a:srgbClr val="1E293B"/>
-                </a:solidFill>
-                <a:latin typeface="Segoe UI"/>
-              </a:defRPr>
-            </a:pPr>
-            <a:r>
-              <a:rPr lang="vi-VN" sz="850" dirty="0"/>
-              <a:t>Chi phí cao  </a:t>
-            </a:r>
-          </a:p>
-          <a:p>
-            <a:pPr marL="228600" indent="-228600">
-              <a:spcAft>
-                <a:spcPts val="300"/>
-              </a:spcAft>
-              <a:buFont typeface="+mj-lt"/>
-              <a:buAutoNum type="alphaUcPeriod"/>
-              <a:defRPr sz="1050">
-                <a:solidFill>
-                  <a:srgbClr val="1E293B"/>
-                </a:solidFill>
-                <a:latin typeface="Segoe UI"/>
-              </a:defRPr>
-            </a:pPr>
-            <a:r>
-              <a:rPr lang="vi-VN" sz="850" dirty="0"/>
-              <a:t>Phạm vi chưa rõ  </a:t>
-            </a:r>
-          </a:p>
-          <a:p>
-            <a:pPr marL="228600" indent="-228600">
-              <a:spcAft>
-                <a:spcPts val="300"/>
-              </a:spcAft>
-              <a:buFont typeface="+mj-lt"/>
-              <a:buAutoNum type="alphaUcPeriod"/>
-              <a:defRPr sz="1050">
-                <a:solidFill>
-                  <a:srgbClr val="1E293B"/>
-                </a:solidFill>
-                <a:latin typeface="Segoe UI"/>
-              </a:defRPr>
-            </a:pPr>
-            <a:r>
-              <a:rPr lang="vi-VN" sz="850" dirty="0"/>
-              <a:t>Thời gian chốt quá lâu  </a:t>
-            </a:r>
-          </a:p>
-          <a:p>
-            <a:pPr marL="228600" indent="-228600">
-              <a:spcAft>
-                <a:spcPts val="300"/>
-              </a:spcAft>
-              <a:buFont typeface="+mj-lt"/>
-              <a:buAutoNum type="alphaUcPeriod"/>
-              <a:defRPr sz="1050">
-                <a:solidFill>
-                  <a:srgbClr val="1E293B"/>
-                </a:solidFill>
-                <a:latin typeface="Segoe UI"/>
-              </a:defRPr>
-            </a:pPr>
-            <a:r>
-              <a:rPr lang="vi-VN" sz="850" dirty="0"/>
-              <a:t>Khác</a:t>
-            </a:r>
-          </a:p>
-          <a:p>
-            <a:pPr>
-              <a:spcAft>
-                <a:spcPts val="300"/>
-              </a:spcAft>
-              <a:defRPr sz="1050">
-                <a:solidFill>
-                  <a:srgbClr val="1E293B"/>
-                </a:solidFill>
-                <a:latin typeface="Segoe UI"/>
-              </a:defRPr>
-            </a:pPr>
-            <a:r>
-              <a:rPr lang="vi-VN" sz="850" b="1" dirty="0">
-                <a:solidFill>
-                  <a:srgbClr val="F37021"/>
-                </a:solidFill>
-                <a:latin typeface="Segoe UI"/>
-              </a:rPr>
-              <a:t>Dev: Môi trường Test và UAT hiện tại có đáp ứng đủ nhu cầu triển khai độc lập của team không?  </a:t>
-            </a:r>
-          </a:p>
-          <a:p>
-            <a:pPr marL="228600" indent="-228600">
-              <a:spcAft>
-                <a:spcPts val="300"/>
-              </a:spcAft>
-              <a:buFont typeface="+mj-lt"/>
-              <a:buAutoNum type="alphaUcPeriod"/>
-              <a:defRPr sz="1050">
-                <a:solidFill>
-                  <a:srgbClr val="1E293B"/>
-                </a:solidFill>
-                <a:latin typeface="Segoe UI"/>
-              </a:defRPr>
-            </a:pPr>
-            <a:r>
-              <a:rPr lang="vi-VN" sz="850" dirty="0"/>
-              <a:t>Hoàn toàn đáp ứng  </a:t>
-            </a:r>
-          </a:p>
-          <a:p>
-            <a:pPr marL="228600" indent="-228600">
-              <a:spcAft>
-                <a:spcPts val="300"/>
-              </a:spcAft>
-              <a:buFont typeface="+mj-lt"/>
-              <a:buAutoNum type="alphaUcPeriod"/>
-              <a:defRPr sz="1050">
-                <a:solidFill>
-                  <a:srgbClr val="1E293B"/>
-                </a:solidFill>
-                <a:latin typeface="Segoe UI"/>
-              </a:defRPr>
-            </a:pPr>
-            <a:r>
-              <a:rPr lang="vi-VN" sz="850" dirty="0"/>
-              <a:t>Đáp ứng một phần  </a:t>
-            </a:r>
-          </a:p>
-          <a:p>
-            <a:pPr marL="228600" indent="-228600">
-              <a:spcAft>
-                <a:spcPts val="300"/>
-              </a:spcAft>
-              <a:buFont typeface="+mj-lt"/>
-              <a:buAutoNum type="alphaUcPeriod"/>
-              <a:defRPr sz="1050">
-                <a:solidFill>
-                  <a:srgbClr val="1E293B"/>
-                </a:solidFill>
-                <a:latin typeface="Segoe UI"/>
-              </a:defRPr>
-            </a:pPr>
-            <a:r>
-              <a:rPr lang="vi-VN" sz="850" dirty="0"/>
-              <a:t>Không đáp ứng  </a:t>
-            </a:r>
-          </a:p>
-          <a:p>
-            <a:pPr marL="228600" indent="-228600">
-              <a:spcAft>
-                <a:spcPts val="300"/>
-              </a:spcAft>
-              <a:buFont typeface="+mj-lt"/>
-              <a:buAutoNum type="alphaUcPeriod"/>
-              <a:defRPr sz="1050">
-                <a:solidFill>
-                  <a:srgbClr val="1E293B"/>
-                </a:solidFill>
-                <a:latin typeface="Segoe UI"/>
-              </a:defRPr>
-            </a:pPr>
-            <a:r>
-              <a:rPr lang="vi-VN" sz="850" dirty="0"/>
-              <a:t>Chưa đánh giá</a:t>
-            </a:r>
-          </a:p>
-        </p:txBody>
-      </p:sp>
-      <p:sp>
-        <p:nvSpPr>
-          <p:cNvPr id="12" name="Rounded Rectangle 11"/>
+              <a:rPr lang="vi-VN" dirty="0"/>
+              <a:t>phỏng vấn trực tiếp với người thực thi và khách hàng.</a:t>
+            </a:r>
+            <a:endParaRPr dirty="0"/>
+          </a:p>
+        </p:txBody>
+      </p:sp>
+    </p:spTree>
+  </p:cSld>
+  <p:clrMapOvr>
+    <a:masterClrMapping/>
+  </p:clrMapOvr>
+</p:sld>
+</file>
+
+<file path=ppt/slides/slide6.xml><?xml version="1.0" encoding="utf-8"?>
+<p:sld xmlns:a="http://schemas.openxmlformats.org/drawingml/2006/main" xmlns:r="http://schemas.openxmlformats.org/officeDocument/2006/relationships" xmlns:p="http://schemas.openxmlformats.org/presentationml/2006/main">
+  <p:cSld>
+    <p:spTree>
+      <p:nvGrpSpPr>
+        <p:cNvPr id="1" name="">
+          <a:extLst>
+            <a:ext uri="{FF2B5EF4-FFF2-40B4-BE49-F238E27FC236}">
+              <a16:creationId xmlns:a16="http://schemas.microsoft.com/office/drawing/2014/main" id="{65C9CD64-6F4E-4F4D-00DF-493B2B72D9F9}"/>
+            </a:ext>
+          </a:extLst>
+        </p:cNvPr>
+        <p:cNvGrpSpPr/>
+        <p:nvPr/>
+      </p:nvGrpSpPr>
+      <p:grpSpPr>
+        <a:xfrm>
+          <a:off x="0" y="0"/>
+          <a:ext cx="0" cy="0"/>
+          <a:chOff x="0" y="0"/>
+          <a:chExt cx="0" cy="0"/>
+        </a:xfrm>
+      </p:grpSpPr>
+      <p:sp>
+        <p:nvSpPr>
+          <p:cNvPr id="2" name="Rectangle 1">
+            <a:extLst>
+              <a:ext uri="{FF2B5EF4-FFF2-40B4-BE49-F238E27FC236}">
+                <a16:creationId xmlns:a16="http://schemas.microsoft.com/office/drawing/2014/main" id="{FAAB6900-3A47-33BB-0C83-D99A6825545A}"/>
+              </a:ext>
+            </a:extLst>
+          </p:cNvPr>
           <p:cNvSpPr/>
           <p:nvPr/>
         </p:nvSpPr>
         <p:spPr>
           <a:xfrm>
-            <a:off x="6233465" y="1170432"/>
-            <a:ext cx="5242255" cy="5157216"/>
+            <a:off x="0" y="0"/>
+            <a:ext cx="12191695" cy="1078992"/>
+          </a:xfrm>
+          <a:prstGeom prst="rect">
+            <a:avLst/>
+          </a:prstGeom>
+          <a:solidFill>
+            <a:srgbClr val="FFFFFF"/>
+          </a:solidFill>
+          <a:ln>
+            <a:noFill/>
+          </a:ln>
+        </p:spPr>
+        <p:style>
+          <a:lnRef idx="1">
+            <a:schemeClr val="accent1"/>
+          </a:lnRef>
+          <a:fillRef idx="3">
+            <a:schemeClr val="accent1"/>
+          </a:fillRef>
+          <a:effectRef idx="2">
+            <a:schemeClr val="accent1"/>
+          </a:effectRef>
+          <a:fontRef idx="minor">
+            <a:schemeClr val="lt1"/>
+          </a:fontRef>
+        </p:style>
+        <p:txBody>
+          <a:bodyPr rtlCol="0" anchor="ctr"/>
+          <a:lstStyle/>
+          <a:p>
+            <a:pPr algn="ctr"/>
+            <a:endParaRPr/>
+          </a:p>
+        </p:txBody>
+      </p:sp>
+      <p:sp>
+        <p:nvSpPr>
+          <p:cNvPr id="3" name="Rectangle 2">
+            <a:extLst>
+              <a:ext uri="{FF2B5EF4-FFF2-40B4-BE49-F238E27FC236}">
+                <a16:creationId xmlns:a16="http://schemas.microsoft.com/office/drawing/2014/main" id="{9B429A3E-3CF4-421E-2090-0420326619AD}"/>
+              </a:ext>
+            </a:extLst>
+          </p:cNvPr>
+          <p:cNvSpPr/>
+          <p:nvPr/>
+        </p:nvSpPr>
+        <p:spPr>
+          <a:xfrm>
+            <a:off x="731520" y="1051560"/>
+            <a:ext cx="7772400" cy="36576"/>
+          </a:xfrm>
+          <a:prstGeom prst="rect">
+            <a:avLst/>
+          </a:prstGeom>
+          <a:solidFill>
+            <a:srgbClr val="005BAA"/>
+          </a:solidFill>
+          <a:ln>
+            <a:noFill/>
+          </a:ln>
+        </p:spPr>
+        <p:style>
+          <a:lnRef idx="1">
+            <a:schemeClr val="accent1"/>
+          </a:lnRef>
+          <a:fillRef idx="3">
+            <a:schemeClr val="accent1"/>
+          </a:fillRef>
+          <a:effectRef idx="2">
+            <a:schemeClr val="accent1"/>
+          </a:effectRef>
+          <a:fontRef idx="minor">
+            <a:schemeClr val="lt1"/>
+          </a:fontRef>
+        </p:style>
+        <p:txBody>
+          <a:bodyPr rtlCol="0" anchor="ctr"/>
+          <a:lstStyle/>
+          <a:p>
+            <a:pPr algn="ctr"/>
+            <a:endParaRPr/>
+          </a:p>
+        </p:txBody>
+      </p:sp>
+      <p:sp>
+        <p:nvSpPr>
+          <p:cNvPr id="4" name="Rectangle 3">
+            <a:extLst>
+              <a:ext uri="{FF2B5EF4-FFF2-40B4-BE49-F238E27FC236}">
+                <a16:creationId xmlns:a16="http://schemas.microsoft.com/office/drawing/2014/main" id="{F1B485F5-2A45-54BE-8931-2F71F65898AB}"/>
+              </a:ext>
+            </a:extLst>
+          </p:cNvPr>
+          <p:cNvSpPr/>
+          <p:nvPr/>
+        </p:nvSpPr>
+        <p:spPr>
+          <a:xfrm>
+            <a:off x="8503920" y="1051560"/>
+            <a:ext cx="2926080" cy="36576"/>
+          </a:xfrm>
+          <a:prstGeom prst="rect">
+            <a:avLst/>
+          </a:prstGeom>
+          <a:solidFill>
+            <a:srgbClr val="F37021"/>
+          </a:solidFill>
+          <a:ln>
+            <a:noFill/>
+          </a:ln>
+        </p:spPr>
+        <p:style>
+          <a:lnRef idx="1">
+            <a:schemeClr val="accent1"/>
+          </a:lnRef>
+          <a:fillRef idx="3">
+            <a:schemeClr val="accent1"/>
+          </a:fillRef>
+          <a:effectRef idx="2">
+            <a:schemeClr val="accent1"/>
+          </a:effectRef>
+          <a:fontRef idx="minor">
+            <a:schemeClr val="lt1"/>
+          </a:fontRef>
+        </p:style>
+        <p:txBody>
+          <a:bodyPr rtlCol="0" anchor="ctr"/>
+          <a:lstStyle/>
+          <a:p>
+            <a:pPr algn="ctr"/>
+            <a:endParaRPr/>
+          </a:p>
+        </p:txBody>
+      </p:sp>
+      <p:sp>
+        <p:nvSpPr>
+          <p:cNvPr id="5" name="Rounded Rectangle 4">
+            <a:extLst>
+              <a:ext uri="{FF2B5EF4-FFF2-40B4-BE49-F238E27FC236}">
+                <a16:creationId xmlns:a16="http://schemas.microsoft.com/office/drawing/2014/main" id="{2104D3E9-4217-EFA0-14CA-B24265E30875}"/>
+              </a:ext>
+            </a:extLst>
+          </p:cNvPr>
+          <p:cNvSpPr/>
+          <p:nvPr/>
+        </p:nvSpPr>
+        <p:spPr>
+          <a:xfrm>
+            <a:off x="731520" y="146304"/>
+            <a:ext cx="3840480" cy="256032"/>
+          </a:xfrm>
+          <a:prstGeom prst="roundRect">
+            <a:avLst/>
+          </a:prstGeom>
+          <a:solidFill>
+            <a:srgbClr val="FFF7ED"/>
+          </a:solidFill>
+          <a:ln w="9525">
+            <a:solidFill>
+              <a:srgbClr val="F37021"/>
+            </a:solidFill>
+          </a:ln>
+        </p:spPr>
+        <p:style>
+          <a:lnRef idx="1">
+            <a:schemeClr val="accent1"/>
+          </a:lnRef>
+          <a:fillRef idx="3">
+            <a:schemeClr val="accent1"/>
+          </a:fillRef>
+          <a:effectRef idx="2">
+            <a:schemeClr val="accent1"/>
+          </a:effectRef>
+          <a:fontRef idx="minor">
+            <a:schemeClr val="lt1"/>
+          </a:fontRef>
+        </p:style>
+        <p:txBody>
+          <a:bodyPr wrap="square" lIns="109728" tIns="18288" rtlCol="0" anchor="ctr"/>
+          <a:lstStyle/>
+          <a:p>
+            <a:pPr algn="ctr">
+              <a:defRPr sz="950" b="1">
+                <a:solidFill>
+                  <a:srgbClr val="F37021"/>
+                </a:solidFill>
+                <a:latin typeface="Segoe UI"/>
+              </a:defRPr>
+            </a:pPr>
+            <a:r>
+              <a:t>PHẦN 4: QUY TRÌNH CỐT LÕI</a:t>
+            </a:r>
+          </a:p>
+        </p:txBody>
+      </p:sp>
+      <p:sp>
+        <p:nvSpPr>
+          <p:cNvPr id="6" name="TextBox 5">
+            <a:extLst>
+              <a:ext uri="{FF2B5EF4-FFF2-40B4-BE49-F238E27FC236}">
+                <a16:creationId xmlns:a16="http://schemas.microsoft.com/office/drawing/2014/main" id="{43324C2C-06C6-5D4E-3401-9AF531EAC837}"/>
+              </a:ext>
+            </a:extLst>
+          </p:cNvPr>
+          <p:cNvSpPr txBox="1"/>
+          <p:nvPr/>
+        </p:nvSpPr>
+        <p:spPr>
+          <a:xfrm>
+            <a:off x="731520" y="438912"/>
+            <a:ext cx="8686800" cy="338554"/>
+          </a:xfrm>
+          <a:prstGeom prst="rect">
+            <a:avLst/>
+          </a:prstGeom>
+          <a:noFill/>
+        </p:spPr>
+        <p:txBody>
+          <a:bodyPr wrap="square" lIns="0" tIns="0">
+            <a:spAutoFit/>
+          </a:bodyPr>
+          <a:lstStyle/>
+          <a:p>
+            <a:pPr>
+              <a:defRPr sz="1900" b="1">
+                <a:solidFill>
+                  <a:srgbClr val="0A2540"/>
+                </a:solidFill>
+                <a:latin typeface="Segoe UI"/>
+              </a:defRPr>
+            </a:pPr>
+            <a:r>
+              <a:rPr lang="vi-VN" dirty="0"/>
+              <a:t>Khai Phá Quy Trình Bằng Các Câu Hỏi Định Tính</a:t>
+            </a:r>
+          </a:p>
+        </p:txBody>
+      </p:sp>
+      <p:pic>
+        <p:nvPicPr>
+          <p:cNvPr id="7" name="Picture 6" descr="fpt_software_logo.png">
+            <a:extLst>
+              <a:ext uri="{FF2B5EF4-FFF2-40B4-BE49-F238E27FC236}">
+                <a16:creationId xmlns:a16="http://schemas.microsoft.com/office/drawing/2014/main" id="{549466FE-71DF-C39A-15AE-16F6CF7D7052}"/>
+              </a:ext>
+            </a:extLst>
+          </p:cNvPr>
+          <p:cNvPicPr>
+            <a:picLocks noChangeAspect="1"/>
+          </p:cNvPicPr>
+          <p:nvPr/>
+        </p:nvPicPr>
+        <p:blipFill>
+          <a:blip r:embed="rId2"/>
+          <a:stretch>
+            <a:fillRect/>
+          </a:stretch>
+        </p:blipFill>
+        <p:spPr>
+          <a:xfrm>
+            <a:off x="9784080" y="201168"/>
+            <a:ext cx="1691640" cy="422910"/>
+          </a:xfrm>
+          <a:prstGeom prst="rect">
+            <a:avLst/>
+          </a:prstGeom>
+        </p:spPr>
+      </p:pic>
+      <p:sp>
+        <p:nvSpPr>
+          <p:cNvPr id="8" name="Rectangle 7">
+            <a:extLst>
+              <a:ext uri="{FF2B5EF4-FFF2-40B4-BE49-F238E27FC236}">
+                <a16:creationId xmlns:a16="http://schemas.microsoft.com/office/drawing/2014/main" id="{940BB6B9-159C-5C3E-138C-3C4E4670F7B1}"/>
+              </a:ext>
+            </a:extLst>
+          </p:cNvPr>
+          <p:cNvSpPr/>
+          <p:nvPr/>
+        </p:nvSpPr>
+        <p:spPr>
+          <a:xfrm>
+            <a:off x="731520" y="6419088"/>
+            <a:ext cx="10728655" cy="13716"/>
+          </a:xfrm>
+          <a:prstGeom prst="rect">
+            <a:avLst/>
+          </a:prstGeom>
+          <a:solidFill>
+            <a:srgbClr val="E2E8F0"/>
+          </a:solidFill>
+          <a:ln>
+            <a:noFill/>
+          </a:ln>
+        </p:spPr>
+        <p:style>
+          <a:lnRef idx="1">
+            <a:schemeClr val="accent1"/>
+          </a:lnRef>
+          <a:fillRef idx="3">
+            <a:schemeClr val="accent1"/>
+          </a:fillRef>
+          <a:effectRef idx="2">
+            <a:schemeClr val="accent1"/>
+          </a:effectRef>
+          <a:fontRef idx="minor">
+            <a:schemeClr val="lt1"/>
+          </a:fontRef>
+        </p:style>
+        <p:txBody>
+          <a:bodyPr rtlCol="0" anchor="ctr"/>
+          <a:lstStyle/>
+          <a:p>
+            <a:pPr algn="ctr"/>
+            <a:endParaRPr/>
+          </a:p>
+        </p:txBody>
+      </p:sp>
+      <p:sp>
+        <p:nvSpPr>
+          <p:cNvPr id="9" name="TextBox 8">
+            <a:extLst>
+              <a:ext uri="{FF2B5EF4-FFF2-40B4-BE49-F238E27FC236}">
+                <a16:creationId xmlns:a16="http://schemas.microsoft.com/office/drawing/2014/main" id="{8ADE067D-B018-C445-7C83-CAC5115FEB89}"/>
+              </a:ext>
+            </a:extLst>
+          </p:cNvPr>
+          <p:cNvSpPr txBox="1"/>
+          <p:nvPr/>
+        </p:nvSpPr>
+        <p:spPr>
+          <a:xfrm>
+            <a:off x="731520" y="6473952"/>
+            <a:ext cx="7772400" cy="274320"/>
+          </a:xfrm>
+          <a:prstGeom prst="rect">
+            <a:avLst/>
+          </a:prstGeom>
+          <a:noFill/>
+        </p:spPr>
+        <p:txBody>
+          <a:bodyPr wrap="none">
+            <a:spAutoFit/>
+          </a:bodyPr>
+          <a:lstStyle/>
+          <a:p>
+            <a:pPr>
+              <a:defRPr sz="850">
+                <a:solidFill>
+                  <a:srgbClr val="64748B"/>
+                </a:solidFill>
+                <a:latin typeface="Segoe UI"/>
+              </a:defRPr>
+            </a:pPr>
+            <a:r>
+              <a:t>FPT Software | Hệ thống Quản trị Quy trình Nghiệp vụ (BPM) - Đồ án Môn học - Nhóm 8</a:t>
+            </a:r>
+          </a:p>
+        </p:txBody>
+      </p:sp>
+      <p:sp>
+        <p:nvSpPr>
+          <p:cNvPr id="10" name="TextBox 9">
+            <a:extLst>
+              <a:ext uri="{FF2B5EF4-FFF2-40B4-BE49-F238E27FC236}">
+                <a16:creationId xmlns:a16="http://schemas.microsoft.com/office/drawing/2014/main" id="{CA7B3378-56F1-7936-BB99-C8C4A2BC0924}"/>
+              </a:ext>
+            </a:extLst>
+          </p:cNvPr>
+          <p:cNvSpPr txBox="1"/>
+          <p:nvPr/>
+        </p:nvSpPr>
+        <p:spPr>
+          <a:xfrm>
+            <a:off x="10058400" y="6473952"/>
+            <a:ext cx="1371600" cy="274320"/>
+          </a:xfrm>
+          <a:prstGeom prst="rect">
+            <a:avLst/>
+          </a:prstGeom>
+          <a:noFill/>
+        </p:spPr>
+        <p:txBody>
+          <a:bodyPr wrap="none">
+            <a:spAutoFit/>
+          </a:bodyPr>
+          <a:lstStyle/>
+          <a:p>
+            <a:pPr algn="r">
+              <a:defRPr sz="850" b="1">
+                <a:solidFill>
+                  <a:srgbClr val="005BAA"/>
+                </a:solidFill>
+                <a:latin typeface="Segoe UI"/>
+              </a:defRPr>
+            </a:pPr>
+            <a:r>
+              <a:t>19 / 27</a:t>
+            </a:r>
+          </a:p>
+        </p:txBody>
+      </p:sp>
+      <p:sp>
+        <p:nvSpPr>
+          <p:cNvPr id="11" name="Rounded Rectangle 10">
+            <a:extLst>
+              <a:ext uri="{FF2B5EF4-FFF2-40B4-BE49-F238E27FC236}">
+                <a16:creationId xmlns:a16="http://schemas.microsoft.com/office/drawing/2014/main" id="{7653A2C5-D4F7-56F8-BFDC-DC8A7E1F9FE1}"/>
+              </a:ext>
+            </a:extLst>
+          </p:cNvPr>
+          <p:cNvSpPr/>
+          <p:nvPr/>
+        </p:nvSpPr>
+        <p:spPr>
+          <a:xfrm>
+            <a:off x="731521" y="1179576"/>
+            <a:ext cx="5242254" cy="5148072"/>
           </a:xfrm>
           <a:prstGeom prst="roundRect">
             <a:avLst/>
@@ -12539,6 +13136,561 @@
               </a:spcAft>
               <a:defRPr sz="1300" b="1">
                 <a:solidFill>
+                  <a:srgbClr val="0A2540"/>
+                </a:solidFill>
+                <a:latin typeface="Segoe UI"/>
+              </a:defRPr>
+            </a:pPr>
+            <a:r>
+              <a:rPr lang="vi-VN" dirty="0"/>
+              <a:t>CÂU HỎI CÓ CẤU TRÚC</a:t>
+            </a:r>
+          </a:p>
+          <a:p>
+            <a:pPr>
+              <a:spcAft>
+                <a:spcPts val="300"/>
+              </a:spcAft>
+              <a:defRPr sz="1050">
+                <a:solidFill>
+                  <a:srgbClr val="1E293B"/>
+                </a:solidFill>
+                <a:latin typeface="Segoe UI"/>
+              </a:defRPr>
+            </a:pPr>
+            <a:r>
+              <a:rPr lang="vi-VN" sz="850" b="1" dirty="0">
+                <a:solidFill>
+                  <a:srgbClr val="F37021"/>
+                </a:solidFill>
+                <a:latin typeface="Segoe UI"/>
+              </a:rPr>
+              <a:t>PM: Anh/chị đánh giá thế nào về tính minh bạch của quy trình xử lý Change Request hiện tại?  </a:t>
+            </a:r>
+          </a:p>
+          <a:p>
+            <a:pPr marL="228600" indent="-228600">
+              <a:spcAft>
+                <a:spcPts val="300"/>
+              </a:spcAft>
+              <a:buFont typeface="+mj-lt"/>
+              <a:buAutoNum type="alphaUcPeriod"/>
+              <a:defRPr sz="1050">
+                <a:solidFill>
+                  <a:srgbClr val="1E293B"/>
+                </a:solidFill>
+                <a:latin typeface="Segoe UI"/>
+              </a:defRPr>
+            </a:pPr>
+            <a:r>
+              <a:rPr lang="vi-VN" sz="850" dirty="0"/>
+              <a:t>Rất minh bạch  </a:t>
+            </a:r>
+          </a:p>
+          <a:p>
+            <a:pPr marL="228600" indent="-228600">
+              <a:spcAft>
+                <a:spcPts val="300"/>
+              </a:spcAft>
+              <a:buFont typeface="+mj-lt"/>
+              <a:buAutoNum type="alphaUcPeriod"/>
+              <a:defRPr sz="1050">
+                <a:solidFill>
+                  <a:srgbClr val="1E293B"/>
+                </a:solidFill>
+                <a:latin typeface="Segoe UI"/>
+              </a:defRPr>
+            </a:pPr>
+            <a:r>
+              <a:rPr lang="vi-VN" sz="850" dirty="0"/>
+              <a:t>Bình thường  </a:t>
+            </a:r>
+          </a:p>
+          <a:p>
+            <a:pPr marL="228600" indent="-228600">
+              <a:spcAft>
+                <a:spcPts val="300"/>
+              </a:spcAft>
+              <a:buFont typeface="+mj-lt"/>
+              <a:buAutoNum type="alphaUcPeriod"/>
+              <a:defRPr sz="1050">
+                <a:solidFill>
+                  <a:srgbClr val="1E293B"/>
+                </a:solidFill>
+                <a:latin typeface="Segoe UI"/>
+              </a:defRPr>
+            </a:pPr>
+            <a:r>
+              <a:rPr lang="vi-VN" sz="850" dirty="0"/>
+              <a:t>Không minh bạch  </a:t>
+            </a:r>
+          </a:p>
+          <a:p>
+            <a:pPr marL="228600" indent="-228600">
+              <a:spcAft>
+                <a:spcPts val="300"/>
+              </a:spcAft>
+              <a:buFont typeface="+mj-lt"/>
+              <a:buAutoNum type="alphaUcPeriod"/>
+              <a:defRPr sz="1050">
+                <a:solidFill>
+                  <a:srgbClr val="1E293B"/>
+                </a:solidFill>
+                <a:latin typeface="Segoe UI"/>
+              </a:defRPr>
+            </a:pPr>
+            <a:r>
+              <a:rPr lang="vi-VN" sz="850" dirty="0"/>
+              <a:t>Rất không minh bạch</a:t>
+            </a:r>
+          </a:p>
+          <a:p>
+            <a:pPr>
+              <a:spcAft>
+                <a:spcPts val="300"/>
+              </a:spcAft>
+              <a:defRPr sz="1050">
+                <a:solidFill>
+                  <a:srgbClr val="1E293B"/>
+                </a:solidFill>
+                <a:latin typeface="Segoe UI"/>
+              </a:defRPr>
+            </a:pPr>
+            <a:r>
+              <a:rPr lang="vi-VN" sz="850" b="1" dirty="0">
+                <a:solidFill>
+                  <a:srgbClr val="F37021"/>
+                </a:solidFill>
+                <a:latin typeface="Segoe UI"/>
+              </a:rPr>
+              <a:t>BA: Khó khăn lớn nhất khi chốt tài liệu đặc tả (SRS) với khách hàng là gì?  </a:t>
+            </a:r>
+          </a:p>
+          <a:p>
+            <a:pPr marL="228600" indent="-228600">
+              <a:spcAft>
+                <a:spcPts val="300"/>
+              </a:spcAft>
+              <a:buFont typeface="+mj-lt"/>
+              <a:buAutoNum type="alphaUcPeriod"/>
+              <a:defRPr sz="1050">
+                <a:solidFill>
+                  <a:srgbClr val="1E293B"/>
+                </a:solidFill>
+                <a:latin typeface="Segoe UI"/>
+              </a:defRPr>
+            </a:pPr>
+            <a:r>
+              <a:rPr lang="vi-VN" sz="850" dirty="0"/>
+              <a:t>Khách hàng không nắm rõ nghiệp vụ  </a:t>
+            </a:r>
+          </a:p>
+          <a:p>
+            <a:pPr marL="228600" indent="-228600">
+              <a:spcAft>
+                <a:spcPts val="300"/>
+              </a:spcAft>
+              <a:buFont typeface="+mj-lt"/>
+              <a:buAutoNum type="alphaUcPeriod"/>
+              <a:defRPr sz="1050">
+                <a:solidFill>
+                  <a:srgbClr val="1E293B"/>
+                </a:solidFill>
+                <a:latin typeface="Segoe UI"/>
+              </a:defRPr>
+            </a:pPr>
+            <a:r>
+              <a:rPr lang="vi-VN" sz="850" dirty="0"/>
+              <a:t>Yêu cầu thay đổi liên tục  </a:t>
+            </a:r>
+          </a:p>
+          <a:p>
+            <a:pPr marL="228600" indent="-228600">
+              <a:spcAft>
+                <a:spcPts val="300"/>
+              </a:spcAft>
+              <a:buFont typeface="+mj-lt"/>
+              <a:buAutoNum type="alphaUcPeriod"/>
+              <a:defRPr sz="1050">
+                <a:solidFill>
+                  <a:srgbClr val="1E293B"/>
+                </a:solidFill>
+                <a:latin typeface="Segoe UI"/>
+              </a:defRPr>
+            </a:pPr>
+            <a:r>
+              <a:rPr lang="vi-VN" sz="850" dirty="0"/>
+              <a:t>Tài liệu chưa rõ ràng  </a:t>
+            </a:r>
+          </a:p>
+          <a:p>
+            <a:pPr marL="228600" indent="-228600">
+              <a:spcAft>
+                <a:spcPts val="300"/>
+              </a:spcAft>
+              <a:buFont typeface="+mj-lt"/>
+              <a:buAutoNum type="alphaUcPeriod"/>
+              <a:defRPr sz="1050">
+                <a:solidFill>
+                  <a:srgbClr val="1E293B"/>
+                </a:solidFill>
+                <a:latin typeface="Segoe UI"/>
+              </a:defRPr>
+            </a:pPr>
+            <a:r>
+              <a:rPr lang="vi-VN" sz="850" dirty="0"/>
+              <a:t>Khác</a:t>
+            </a:r>
+          </a:p>
+          <a:p>
+            <a:pPr>
+              <a:spcAft>
+                <a:spcPts val="300"/>
+              </a:spcAft>
+              <a:defRPr sz="1050">
+                <a:solidFill>
+                  <a:srgbClr val="1E293B"/>
+                </a:solidFill>
+                <a:latin typeface="Segoe UI"/>
+              </a:defRPr>
+            </a:pPr>
+            <a:r>
+              <a:rPr lang="vi-VN" sz="850" b="1" dirty="0">
+                <a:solidFill>
+                  <a:srgbClr val="F37021"/>
+                </a:solidFill>
+                <a:latin typeface="Segoe UI"/>
+              </a:rPr>
+              <a:t>QA: Theo anh/chị, nguyên nhân cốt lõi nào dẫn đến việc phát hiện lỗi trễ ở khâu UAT thay vì ở khâu Test nội bộ?  </a:t>
+            </a:r>
+          </a:p>
+          <a:p>
+            <a:pPr marL="228600" indent="-228600">
+              <a:spcAft>
+                <a:spcPts val="300"/>
+              </a:spcAft>
+              <a:buFont typeface="+mj-lt"/>
+              <a:buAutoNum type="alphaUcPeriod"/>
+              <a:defRPr sz="1050">
+                <a:solidFill>
+                  <a:srgbClr val="1E293B"/>
+                </a:solidFill>
+                <a:latin typeface="Segoe UI"/>
+              </a:defRPr>
+            </a:pPr>
+            <a:r>
+              <a:rPr lang="vi-VN" sz="850" dirty="0"/>
+              <a:t>Test case chưa đầy đủ  </a:t>
+            </a:r>
+          </a:p>
+          <a:p>
+            <a:pPr marL="228600" indent="-228600">
+              <a:spcAft>
+                <a:spcPts val="300"/>
+              </a:spcAft>
+              <a:buFont typeface="+mj-lt"/>
+              <a:buAutoNum type="alphaUcPeriod"/>
+              <a:defRPr sz="1050">
+                <a:solidFill>
+                  <a:srgbClr val="1E293B"/>
+                </a:solidFill>
+                <a:latin typeface="Segoe UI"/>
+              </a:defRPr>
+            </a:pPr>
+            <a:r>
+              <a:rPr lang="vi-VN" sz="850" dirty="0"/>
+              <a:t>Môi trường UAT không tương đồng  </a:t>
+            </a:r>
+          </a:p>
+          <a:p>
+            <a:pPr marL="228600" indent="-228600">
+              <a:spcAft>
+                <a:spcPts val="300"/>
+              </a:spcAft>
+              <a:buFont typeface="+mj-lt"/>
+              <a:buAutoNum type="alphaUcPeriod"/>
+              <a:defRPr sz="1050">
+                <a:solidFill>
+                  <a:srgbClr val="1E293B"/>
+                </a:solidFill>
+                <a:latin typeface="Segoe UI"/>
+              </a:defRPr>
+            </a:pPr>
+            <a:r>
+              <a:rPr lang="vi-VN" sz="850" dirty="0"/>
+              <a:t>Khách hàng chưa có kịch bản rõ ràng  </a:t>
+            </a:r>
+          </a:p>
+          <a:p>
+            <a:pPr marL="228600" indent="-228600">
+              <a:spcAft>
+                <a:spcPts val="300"/>
+              </a:spcAft>
+              <a:buFont typeface="+mj-lt"/>
+              <a:buAutoNum type="alphaUcPeriod"/>
+              <a:defRPr sz="1050">
+                <a:solidFill>
+                  <a:srgbClr val="1E293B"/>
+                </a:solidFill>
+                <a:latin typeface="Segoe UI"/>
+              </a:defRPr>
+            </a:pPr>
+            <a:r>
+              <a:rPr lang="vi-VN" sz="850" dirty="0"/>
+              <a:t>Khác</a:t>
+            </a:r>
+          </a:p>
+          <a:p>
+            <a:pPr>
+              <a:spcAft>
+                <a:spcPts val="300"/>
+              </a:spcAft>
+              <a:defRPr sz="1050">
+                <a:solidFill>
+                  <a:srgbClr val="1E293B"/>
+                </a:solidFill>
+                <a:latin typeface="Segoe UI"/>
+              </a:defRPr>
+            </a:pPr>
+            <a:r>
+              <a:rPr lang="vi-VN" sz="850" b="1" dirty="0">
+                <a:solidFill>
+                  <a:srgbClr val="F37021"/>
+                </a:solidFill>
+                <a:latin typeface="Segoe UI"/>
+              </a:rPr>
+              <a:t>Sales: Khách hàng thường phàn nàn về vấn đề gì nhất ở giai đoạn chốt báo giá sơ bộ?  </a:t>
+            </a:r>
+          </a:p>
+          <a:p>
+            <a:pPr marL="228600" indent="-228600">
+              <a:spcAft>
+                <a:spcPts val="300"/>
+              </a:spcAft>
+              <a:buFont typeface="+mj-lt"/>
+              <a:buAutoNum type="alphaUcPeriod"/>
+              <a:defRPr sz="1050">
+                <a:solidFill>
+                  <a:srgbClr val="1E293B"/>
+                </a:solidFill>
+                <a:latin typeface="Segoe UI"/>
+              </a:defRPr>
+            </a:pPr>
+            <a:r>
+              <a:rPr lang="vi-VN" sz="850" dirty="0"/>
+              <a:t>Chi phí cao  </a:t>
+            </a:r>
+          </a:p>
+          <a:p>
+            <a:pPr marL="228600" indent="-228600">
+              <a:spcAft>
+                <a:spcPts val="300"/>
+              </a:spcAft>
+              <a:buFont typeface="+mj-lt"/>
+              <a:buAutoNum type="alphaUcPeriod"/>
+              <a:defRPr sz="1050">
+                <a:solidFill>
+                  <a:srgbClr val="1E293B"/>
+                </a:solidFill>
+                <a:latin typeface="Segoe UI"/>
+              </a:defRPr>
+            </a:pPr>
+            <a:r>
+              <a:rPr lang="vi-VN" sz="850" dirty="0"/>
+              <a:t>Phạm vi chưa rõ  </a:t>
+            </a:r>
+          </a:p>
+          <a:p>
+            <a:pPr marL="228600" indent="-228600">
+              <a:spcAft>
+                <a:spcPts val="300"/>
+              </a:spcAft>
+              <a:buFont typeface="+mj-lt"/>
+              <a:buAutoNum type="alphaUcPeriod"/>
+              <a:defRPr sz="1050">
+                <a:solidFill>
+                  <a:srgbClr val="1E293B"/>
+                </a:solidFill>
+                <a:latin typeface="Segoe UI"/>
+              </a:defRPr>
+            </a:pPr>
+            <a:r>
+              <a:rPr lang="vi-VN" sz="850" dirty="0"/>
+              <a:t>Thời gian chốt quá lâu  </a:t>
+            </a:r>
+          </a:p>
+          <a:p>
+            <a:pPr marL="228600" indent="-228600">
+              <a:spcAft>
+                <a:spcPts val="300"/>
+              </a:spcAft>
+              <a:buFont typeface="+mj-lt"/>
+              <a:buAutoNum type="alphaUcPeriod"/>
+              <a:defRPr sz="1050">
+                <a:solidFill>
+                  <a:srgbClr val="1E293B"/>
+                </a:solidFill>
+                <a:latin typeface="Segoe UI"/>
+              </a:defRPr>
+            </a:pPr>
+            <a:r>
+              <a:rPr lang="vi-VN" sz="850" dirty="0"/>
+              <a:t>Khác</a:t>
+            </a:r>
+          </a:p>
+          <a:p>
+            <a:pPr>
+              <a:spcAft>
+                <a:spcPts val="300"/>
+              </a:spcAft>
+              <a:defRPr sz="1050">
+                <a:solidFill>
+                  <a:srgbClr val="1E293B"/>
+                </a:solidFill>
+                <a:latin typeface="Segoe UI"/>
+              </a:defRPr>
+            </a:pPr>
+            <a:r>
+              <a:rPr lang="vi-VN" sz="850" b="1" dirty="0">
+                <a:solidFill>
+                  <a:srgbClr val="F37021"/>
+                </a:solidFill>
+                <a:latin typeface="Segoe UI"/>
+              </a:rPr>
+              <a:t>Dev: Môi trường Test và UAT hiện tại có đáp ứng đủ nhu cầu triển khai độc lập của team không?  </a:t>
+            </a:r>
+          </a:p>
+          <a:p>
+            <a:pPr marL="228600" indent="-228600">
+              <a:spcAft>
+                <a:spcPts val="300"/>
+              </a:spcAft>
+              <a:buFont typeface="+mj-lt"/>
+              <a:buAutoNum type="alphaUcPeriod"/>
+              <a:defRPr sz="1050">
+                <a:solidFill>
+                  <a:srgbClr val="1E293B"/>
+                </a:solidFill>
+                <a:latin typeface="Segoe UI"/>
+              </a:defRPr>
+            </a:pPr>
+            <a:r>
+              <a:rPr lang="vi-VN" sz="850" dirty="0"/>
+              <a:t>Hoàn toàn đáp ứng  </a:t>
+            </a:r>
+          </a:p>
+          <a:p>
+            <a:pPr marL="228600" indent="-228600">
+              <a:spcAft>
+                <a:spcPts val="300"/>
+              </a:spcAft>
+              <a:buFont typeface="+mj-lt"/>
+              <a:buAutoNum type="alphaUcPeriod"/>
+              <a:defRPr sz="1050">
+                <a:solidFill>
+                  <a:srgbClr val="1E293B"/>
+                </a:solidFill>
+                <a:latin typeface="Segoe UI"/>
+              </a:defRPr>
+            </a:pPr>
+            <a:r>
+              <a:rPr lang="vi-VN" sz="850" dirty="0"/>
+              <a:t>Đáp ứng một phần  </a:t>
+            </a:r>
+          </a:p>
+          <a:p>
+            <a:pPr marL="228600" indent="-228600">
+              <a:spcAft>
+                <a:spcPts val="300"/>
+              </a:spcAft>
+              <a:buFont typeface="+mj-lt"/>
+              <a:buAutoNum type="alphaUcPeriod"/>
+              <a:defRPr sz="1050">
+                <a:solidFill>
+                  <a:srgbClr val="1E293B"/>
+                </a:solidFill>
+                <a:latin typeface="Segoe UI"/>
+              </a:defRPr>
+            </a:pPr>
+            <a:r>
+              <a:rPr lang="vi-VN" sz="850" dirty="0"/>
+              <a:t>Không đáp ứng  </a:t>
+            </a:r>
+          </a:p>
+          <a:p>
+            <a:pPr marL="228600" indent="-228600">
+              <a:spcAft>
+                <a:spcPts val="300"/>
+              </a:spcAft>
+              <a:buFont typeface="+mj-lt"/>
+              <a:buAutoNum type="alphaUcPeriod"/>
+              <a:defRPr sz="1050">
+                <a:solidFill>
+                  <a:srgbClr val="1E293B"/>
+                </a:solidFill>
+                <a:latin typeface="Segoe UI"/>
+              </a:defRPr>
+            </a:pPr>
+            <a:r>
+              <a:rPr lang="vi-VN" sz="850" dirty="0"/>
+              <a:t>Chưa đánh giá</a:t>
+            </a:r>
+          </a:p>
+        </p:txBody>
+      </p:sp>
+      <p:sp>
+        <p:nvSpPr>
+          <p:cNvPr id="12" name="Rounded Rectangle 11">
+            <a:extLst>
+              <a:ext uri="{FF2B5EF4-FFF2-40B4-BE49-F238E27FC236}">
+                <a16:creationId xmlns:a16="http://schemas.microsoft.com/office/drawing/2014/main" id="{D5327493-29FD-F874-94E2-883F087C51B8}"/>
+              </a:ext>
+            </a:extLst>
+          </p:cNvPr>
+          <p:cNvSpPr/>
+          <p:nvPr/>
+        </p:nvSpPr>
+        <p:spPr>
+          <a:xfrm>
+            <a:off x="6233465" y="1170432"/>
+            <a:ext cx="5242255" cy="5157216"/>
+          </a:xfrm>
+          <a:prstGeom prst="roundRect">
+            <a:avLst/>
+          </a:prstGeom>
+          <a:solidFill>
+            <a:srgbClr val="F8FAFC"/>
+          </a:solidFill>
+          <a:ln w="12700">
+            <a:solidFill>
+              <a:srgbClr val="E2E8F0"/>
+            </a:solidFill>
+          </a:ln>
+        </p:spPr>
+        <p:style>
+          <a:lnRef idx="1">
+            <a:schemeClr val="accent1"/>
+          </a:lnRef>
+          <a:fillRef idx="3">
+            <a:schemeClr val="accent1"/>
+          </a:fillRef>
+          <a:effectRef idx="2">
+            <a:schemeClr val="accent1"/>
+          </a:effectRef>
+          <a:fontRef idx="minor">
+            <a:schemeClr val="lt1"/>
+          </a:fontRef>
+        </p:style>
+        <p:txBody>
+          <a:bodyPr wrap="square" lIns="182880" tIns="164592" rIns="182880" bIns="164592" rtlCol="0" anchor="ctr"/>
+          <a:lstStyle/>
+          <a:p>
+            <a:pPr algn="ctr">
+              <a:spcAft>
+                <a:spcPts val="600"/>
+              </a:spcAft>
+              <a:defRPr sz="1300" b="1">
+                <a:solidFill>
                   <a:srgbClr val="0DB14B"/>
                 </a:solidFill>
                 <a:latin typeface="Segoe UI"/>
@@ -12648,6 +13800,11 @@
         </p:txBody>
       </p:sp>
     </p:spTree>
+    <p:extLst>
+      <p:ext uri="{BB962C8B-B14F-4D97-AF65-F5344CB8AC3E}">
+        <p14:creationId xmlns:p14="http://schemas.microsoft.com/office/powerpoint/2010/main" val="305613432"/>
+      </p:ext>
+    </p:extLst>
   </p:cSld>
   <p:clrMapOvr>
     <a:masterClrMapping/>
@@ -12655,7 +13812,7 @@
 </p:sld>
 </file>
 
-<file path=ppt/slides/slide6.xml><?xml version="1.0" encoding="utf-8"?>
+<file path=ppt/slides/slide7.xml><?xml version="1.0" encoding="utf-8"?>
 <p:sld xmlns:a="http://schemas.openxmlformats.org/drawingml/2006/main" xmlns:r="http://schemas.openxmlformats.org/officeDocument/2006/relationships" xmlns:p="http://schemas.openxmlformats.org/presentationml/2006/main">
   <p:cSld>
     <p:spTree>
@@ -13751,7 +14908,498 @@
 </p:sld>
 </file>
 
-<file path=ppt/slides/slide7.xml><?xml version="1.0" encoding="utf-8"?>
+<file path=ppt/slides/slide8.xml><?xml version="1.0" encoding="utf-8"?>
+<p:sld xmlns:a="http://schemas.openxmlformats.org/drawingml/2006/main" xmlns:r="http://schemas.openxmlformats.org/officeDocument/2006/relationships" xmlns:p="http://schemas.openxmlformats.org/presentationml/2006/main">
+  <p:cSld>
+    <p:spTree>
+      <p:nvGrpSpPr>
+        <p:cNvPr id="1" name="">
+          <a:extLst>
+            <a:ext uri="{FF2B5EF4-FFF2-40B4-BE49-F238E27FC236}">
+              <a16:creationId xmlns:a16="http://schemas.microsoft.com/office/drawing/2014/main" id="{A7643587-20BD-D215-C2AB-9B1466FD2D09}"/>
+            </a:ext>
+          </a:extLst>
+        </p:cNvPr>
+        <p:cNvGrpSpPr/>
+        <p:nvPr/>
+      </p:nvGrpSpPr>
+      <p:grpSpPr>
+        <a:xfrm>
+          <a:off x="0" y="0"/>
+          <a:ext cx="0" cy="0"/>
+          <a:chOff x="0" y="0"/>
+          <a:chExt cx="0" cy="0"/>
+        </a:xfrm>
+      </p:grpSpPr>
+      <p:sp>
+        <p:nvSpPr>
+          <p:cNvPr id="2" name="Rectangle 1">
+            <a:extLst>
+              <a:ext uri="{FF2B5EF4-FFF2-40B4-BE49-F238E27FC236}">
+                <a16:creationId xmlns:a16="http://schemas.microsoft.com/office/drawing/2014/main" id="{1F9B070F-5B84-8B39-E747-7844D06A6392}"/>
+              </a:ext>
+            </a:extLst>
+          </p:cNvPr>
+          <p:cNvSpPr/>
+          <p:nvPr/>
+        </p:nvSpPr>
+        <p:spPr>
+          <a:xfrm>
+            <a:off x="0" y="0"/>
+            <a:ext cx="12191695" cy="1078992"/>
+          </a:xfrm>
+          <a:prstGeom prst="rect">
+            <a:avLst/>
+          </a:prstGeom>
+          <a:solidFill>
+            <a:srgbClr val="FFFFFF"/>
+          </a:solidFill>
+          <a:ln>
+            <a:noFill/>
+          </a:ln>
+        </p:spPr>
+        <p:style>
+          <a:lnRef idx="1">
+            <a:schemeClr val="accent1"/>
+          </a:lnRef>
+          <a:fillRef idx="3">
+            <a:schemeClr val="accent1"/>
+          </a:fillRef>
+          <a:effectRef idx="2">
+            <a:schemeClr val="accent1"/>
+          </a:effectRef>
+          <a:fontRef idx="minor">
+            <a:schemeClr val="lt1"/>
+          </a:fontRef>
+        </p:style>
+        <p:txBody>
+          <a:bodyPr rtlCol="0" anchor="ctr"/>
+          <a:lstStyle/>
+          <a:p>
+            <a:pPr algn="ctr"/>
+            <a:endParaRPr/>
+          </a:p>
+        </p:txBody>
+      </p:sp>
+      <p:sp>
+        <p:nvSpPr>
+          <p:cNvPr id="3" name="Rectangle 2">
+            <a:extLst>
+              <a:ext uri="{FF2B5EF4-FFF2-40B4-BE49-F238E27FC236}">
+                <a16:creationId xmlns:a16="http://schemas.microsoft.com/office/drawing/2014/main" id="{37B8395D-040E-C69A-EA00-8461DA7F4FE1}"/>
+              </a:ext>
+            </a:extLst>
+          </p:cNvPr>
+          <p:cNvSpPr/>
+          <p:nvPr/>
+        </p:nvSpPr>
+        <p:spPr>
+          <a:xfrm>
+            <a:off x="731520" y="1051560"/>
+            <a:ext cx="7772400" cy="36576"/>
+          </a:xfrm>
+          <a:prstGeom prst="rect">
+            <a:avLst/>
+          </a:prstGeom>
+          <a:solidFill>
+            <a:srgbClr val="005BAA"/>
+          </a:solidFill>
+          <a:ln>
+            <a:noFill/>
+          </a:ln>
+        </p:spPr>
+        <p:style>
+          <a:lnRef idx="1">
+            <a:schemeClr val="accent1"/>
+          </a:lnRef>
+          <a:fillRef idx="3">
+            <a:schemeClr val="accent1"/>
+          </a:fillRef>
+          <a:effectRef idx="2">
+            <a:schemeClr val="accent1"/>
+          </a:effectRef>
+          <a:fontRef idx="minor">
+            <a:schemeClr val="lt1"/>
+          </a:fontRef>
+        </p:style>
+        <p:txBody>
+          <a:bodyPr rtlCol="0" anchor="ctr"/>
+          <a:lstStyle/>
+          <a:p>
+            <a:pPr algn="ctr"/>
+            <a:endParaRPr/>
+          </a:p>
+        </p:txBody>
+      </p:sp>
+      <p:sp>
+        <p:nvSpPr>
+          <p:cNvPr id="4" name="Rectangle 3">
+            <a:extLst>
+              <a:ext uri="{FF2B5EF4-FFF2-40B4-BE49-F238E27FC236}">
+                <a16:creationId xmlns:a16="http://schemas.microsoft.com/office/drawing/2014/main" id="{483D3CA2-E0A5-7CB0-5CD5-F072D410B5D9}"/>
+              </a:ext>
+            </a:extLst>
+          </p:cNvPr>
+          <p:cNvSpPr/>
+          <p:nvPr/>
+        </p:nvSpPr>
+        <p:spPr>
+          <a:xfrm>
+            <a:off x="8503920" y="1051560"/>
+            <a:ext cx="2926080" cy="36576"/>
+          </a:xfrm>
+          <a:prstGeom prst="rect">
+            <a:avLst/>
+          </a:prstGeom>
+          <a:solidFill>
+            <a:srgbClr val="F37021"/>
+          </a:solidFill>
+          <a:ln>
+            <a:noFill/>
+          </a:ln>
+        </p:spPr>
+        <p:style>
+          <a:lnRef idx="1">
+            <a:schemeClr val="accent1"/>
+          </a:lnRef>
+          <a:fillRef idx="3">
+            <a:schemeClr val="accent1"/>
+          </a:fillRef>
+          <a:effectRef idx="2">
+            <a:schemeClr val="accent1"/>
+          </a:effectRef>
+          <a:fontRef idx="minor">
+            <a:schemeClr val="lt1"/>
+          </a:fontRef>
+        </p:style>
+        <p:txBody>
+          <a:bodyPr rtlCol="0" anchor="ctr"/>
+          <a:lstStyle/>
+          <a:p>
+            <a:pPr algn="ctr"/>
+            <a:endParaRPr/>
+          </a:p>
+        </p:txBody>
+      </p:sp>
+      <p:sp>
+        <p:nvSpPr>
+          <p:cNvPr id="5" name="Rounded Rectangle 4">
+            <a:extLst>
+              <a:ext uri="{FF2B5EF4-FFF2-40B4-BE49-F238E27FC236}">
+                <a16:creationId xmlns:a16="http://schemas.microsoft.com/office/drawing/2014/main" id="{703AE780-F143-72BC-AFCD-1CE2DD8687DD}"/>
+              </a:ext>
+            </a:extLst>
+          </p:cNvPr>
+          <p:cNvSpPr/>
+          <p:nvPr/>
+        </p:nvSpPr>
+        <p:spPr>
+          <a:xfrm>
+            <a:off x="731520" y="146304"/>
+            <a:ext cx="3840480" cy="256032"/>
+          </a:xfrm>
+          <a:prstGeom prst="roundRect">
+            <a:avLst/>
+          </a:prstGeom>
+          <a:solidFill>
+            <a:srgbClr val="FFF7ED"/>
+          </a:solidFill>
+          <a:ln w="9525">
+            <a:solidFill>
+              <a:srgbClr val="F37021"/>
+            </a:solidFill>
+          </a:ln>
+        </p:spPr>
+        <p:style>
+          <a:lnRef idx="1">
+            <a:schemeClr val="accent1"/>
+          </a:lnRef>
+          <a:fillRef idx="3">
+            <a:schemeClr val="accent1"/>
+          </a:fillRef>
+          <a:effectRef idx="2">
+            <a:schemeClr val="accent1"/>
+          </a:effectRef>
+          <a:fontRef idx="minor">
+            <a:schemeClr val="lt1"/>
+          </a:fontRef>
+        </p:style>
+        <p:txBody>
+          <a:bodyPr wrap="square" lIns="109728" tIns="18288" rtlCol="0" anchor="ctr"/>
+          <a:lstStyle/>
+          <a:p>
+            <a:pPr algn="ctr">
+              <a:defRPr sz="950" b="1">
+                <a:solidFill>
+                  <a:srgbClr val="F37021"/>
+                </a:solidFill>
+                <a:latin typeface="Segoe UI"/>
+              </a:defRPr>
+            </a:pPr>
+            <a:r>
+              <a:t>PHẦN 3: QUY TRÌNH QUẢN LÝ</a:t>
+            </a:r>
+          </a:p>
+        </p:txBody>
+      </p:sp>
+      <p:sp>
+        <p:nvSpPr>
+          <p:cNvPr id="6" name="TextBox 5">
+            <a:extLst>
+              <a:ext uri="{FF2B5EF4-FFF2-40B4-BE49-F238E27FC236}">
+                <a16:creationId xmlns:a16="http://schemas.microsoft.com/office/drawing/2014/main" id="{3BE2115A-B580-B21D-860C-CE996E01D7EF}"/>
+              </a:ext>
+            </a:extLst>
+          </p:cNvPr>
+          <p:cNvSpPr txBox="1"/>
+          <p:nvPr/>
+        </p:nvSpPr>
+        <p:spPr>
+          <a:xfrm>
+            <a:off x="731520" y="438912"/>
+            <a:ext cx="8686800" cy="338554"/>
+          </a:xfrm>
+          <a:prstGeom prst="rect">
+            <a:avLst/>
+          </a:prstGeom>
+          <a:noFill/>
+        </p:spPr>
+        <p:txBody>
+          <a:bodyPr wrap="square" lIns="0" tIns="0">
+            <a:spAutoFit/>
+          </a:bodyPr>
+          <a:lstStyle/>
+          <a:p>
+            <a:pPr>
+              <a:defRPr sz="1900" b="1">
+                <a:solidFill>
+                  <a:srgbClr val="0A2540"/>
+                </a:solidFill>
+                <a:latin typeface="Segoe UI"/>
+              </a:defRPr>
+            </a:pPr>
+            <a:r>
+              <a:rPr lang="vi-VN" dirty="0"/>
+              <a:t>Phân Tích Quy Trình – Phân Tích Giá Trị Gia Tăng</a:t>
+            </a:r>
+            <a:endParaRPr dirty="0"/>
+          </a:p>
+        </p:txBody>
+      </p:sp>
+      <p:pic>
+        <p:nvPicPr>
+          <p:cNvPr id="7" name="Picture 6" descr="fpt_software_logo.png">
+            <a:extLst>
+              <a:ext uri="{FF2B5EF4-FFF2-40B4-BE49-F238E27FC236}">
+                <a16:creationId xmlns:a16="http://schemas.microsoft.com/office/drawing/2014/main" id="{665AEA3E-A208-EEF4-34DC-E1892DFC5388}"/>
+              </a:ext>
+            </a:extLst>
+          </p:cNvPr>
+          <p:cNvPicPr>
+            <a:picLocks noChangeAspect="1"/>
+          </p:cNvPicPr>
+          <p:nvPr/>
+        </p:nvPicPr>
+        <p:blipFill>
+          <a:blip r:embed="rId2"/>
+          <a:stretch>
+            <a:fillRect/>
+          </a:stretch>
+        </p:blipFill>
+        <p:spPr>
+          <a:xfrm>
+            <a:off x="9784080" y="201168"/>
+            <a:ext cx="1691640" cy="422910"/>
+          </a:xfrm>
+          <a:prstGeom prst="rect">
+            <a:avLst/>
+          </a:prstGeom>
+        </p:spPr>
+      </p:pic>
+      <p:sp>
+        <p:nvSpPr>
+          <p:cNvPr id="8" name="Rectangle 7">
+            <a:extLst>
+              <a:ext uri="{FF2B5EF4-FFF2-40B4-BE49-F238E27FC236}">
+                <a16:creationId xmlns:a16="http://schemas.microsoft.com/office/drawing/2014/main" id="{0114F01A-BE6F-9D8F-0FAE-39D1A323987B}"/>
+              </a:ext>
+            </a:extLst>
+          </p:cNvPr>
+          <p:cNvSpPr/>
+          <p:nvPr/>
+        </p:nvSpPr>
+        <p:spPr>
+          <a:xfrm>
+            <a:off x="731520" y="6419088"/>
+            <a:ext cx="10728655" cy="13716"/>
+          </a:xfrm>
+          <a:prstGeom prst="rect">
+            <a:avLst/>
+          </a:prstGeom>
+          <a:solidFill>
+            <a:srgbClr val="E2E8F0"/>
+          </a:solidFill>
+          <a:ln>
+            <a:noFill/>
+          </a:ln>
+        </p:spPr>
+        <p:style>
+          <a:lnRef idx="1">
+            <a:schemeClr val="accent1"/>
+          </a:lnRef>
+          <a:fillRef idx="3">
+            <a:schemeClr val="accent1"/>
+          </a:fillRef>
+          <a:effectRef idx="2">
+            <a:schemeClr val="accent1"/>
+          </a:effectRef>
+          <a:fontRef idx="minor">
+            <a:schemeClr val="lt1"/>
+          </a:fontRef>
+        </p:style>
+        <p:txBody>
+          <a:bodyPr rtlCol="0" anchor="ctr"/>
+          <a:lstStyle/>
+          <a:p>
+            <a:pPr algn="ctr"/>
+            <a:endParaRPr/>
+          </a:p>
+        </p:txBody>
+      </p:sp>
+      <p:sp>
+        <p:nvSpPr>
+          <p:cNvPr id="9" name="TextBox 8">
+            <a:extLst>
+              <a:ext uri="{FF2B5EF4-FFF2-40B4-BE49-F238E27FC236}">
+                <a16:creationId xmlns:a16="http://schemas.microsoft.com/office/drawing/2014/main" id="{6196A4DC-FEC9-62FB-8AE1-0F85C2A26FF7}"/>
+              </a:ext>
+            </a:extLst>
+          </p:cNvPr>
+          <p:cNvSpPr txBox="1"/>
+          <p:nvPr/>
+        </p:nvSpPr>
+        <p:spPr>
+          <a:xfrm>
+            <a:off x="731520" y="6473952"/>
+            <a:ext cx="7772400" cy="274320"/>
+          </a:xfrm>
+          <a:prstGeom prst="rect">
+            <a:avLst/>
+          </a:prstGeom>
+          <a:noFill/>
+        </p:spPr>
+        <p:txBody>
+          <a:bodyPr wrap="none">
+            <a:spAutoFit/>
+          </a:bodyPr>
+          <a:lstStyle/>
+          <a:p>
+            <a:pPr>
+              <a:defRPr sz="850">
+                <a:solidFill>
+                  <a:srgbClr val="64748B"/>
+                </a:solidFill>
+                <a:latin typeface="Segoe UI"/>
+              </a:defRPr>
+            </a:pPr>
+            <a:r>
+              <a:t>FPT Software | Hệ thống Quản trị Quy trình Nghiệp vụ (BPM) - Đồ án Môn học - Nhóm 8</a:t>
+            </a:r>
+          </a:p>
+        </p:txBody>
+      </p:sp>
+      <p:sp>
+        <p:nvSpPr>
+          <p:cNvPr id="10" name="TextBox 9">
+            <a:extLst>
+              <a:ext uri="{FF2B5EF4-FFF2-40B4-BE49-F238E27FC236}">
+                <a16:creationId xmlns:a16="http://schemas.microsoft.com/office/drawing/2014/main" id="{1437DD7B-A2DA-1B70-25F0-E556C1B64432}"/>
+              </a:ext>
+            </a:extLst>
+          </p:cNvPr>
+          <p:cNvSpPr txBox="1"/>
+          <p:nvPr/>
+        </p:nvSpPr>
+        <p:spPr>
+          <a:xfrm>
+            <a:off x="10058400" y="6473952"/>
+            <a:ext cx="1371600" cy="274320"/>
+          </a:xfrm>
+          <a:prstGeom prst="rect">
+            <a:avLst/>
+          </a:prstGeom>
+          <a:noFill/>
+        </p:spPr>
+        <p:txBody>
+          <a:bodyPr wrap="none">
+            <a:spAutoFit/>
+          </a:bodyPr>
+          <a:lstStyle/>
+          <a:p>
+            <a:pPr algn="r">
+              <a:defRPr sz="850" b="1">
+                <a:solidFill>
+                  <a:srgbClr val="005BAA"/>
+                </a:solidFill>
+                <a:latin typeface="Segoe UI"/>
+              </a:defRPr>
+            </a:pPr>
+            <a:r>
+              <a:t>9 / 27</a:t>
+            </a:r>
+          </a:p>
+        </p:txBody>
+      </p:sp>
+      <p:pic>
+        <p:nvPicPr>
+          <p:cNvPr id="15" name="Graphic 14">
+            <a:extLst>
+              <a:ext uri="{FF2B5EF4-FFF2-40B4-BE49-F238E27FC236}">
+                <a16:creationId xmlns:a16="http://schemas.microsoft.com/office/drawing/2014/main" id="{285C83A9-82D7-02CE-218F-84A769250011}"/>
+              </a:ext>
+            </a:extLst>
+          </p:cNvPr>
+          <p:cNvPicPr>
+            <a:picLocks noChangeAspect="1"/>
+          </p:cNvPicPr>
+          <p:nvPr/>
+        </p:nvPicPr>
+        <p:blipFill>
+          <a:blip>
+            <a:extLst>
+              <a:ext uri="{96DAC541-7B7A-43D3-8B79-37D633B846F1}">
+                <asvg:svgBlip xmlns:asvg="http://schemas.microsoft.com/office/drawing/2016/SVG/main" r:embed="rId3"/>
+              </a:ext>
+            </a:extLst>
+          </a:blip>
+          <a:stretch>
+            <a:fillRect/>
+          </a:stretch>
+        </p:blipFill>
+        <p:spPr>
+          <a:xfrm>
+            <a:off x="0" y="1860160"/>
+            <a:ext cx="12192000" cy="3137680"/>
+          </a:xfrm>
+          <a:prstGeom prst="rect">
+            <a:avLst/>
+          </a:prstGeom>
+        </p:spPr>
+      </p:pic>
+    </p:spTree>
+    <p:extLst>
+      <p:ext uri="{BB962C8B-B14F-4D97-AF65-F5344CB8AC3E}">
+        <p14:creationId xmlns:p14="http://schemas.microsoft.com/office/powerpoint/2010/main" val="1986253869"/>
+      </p:ext>
+    </p:extLst>
+  </p:cSld>
+  <p:clrMapOvr>
+    <a:masterClrMapping/>
+  </p:clrMapOvr>
+</p:sld>
+</file>
+
+<file path=ppt/slides/slide9.xml><?xml version="1.0" encoding="utf-8"?>
 <p:sld xmlns:a="http://schemas.openxmlformats.org/drawingml/2006/main" xmlns:r="http://schemas.openxmlformats.org/officeDocument/2006/relationships" xmlns:p="http://schemas.openxmlformats.org/presentationml/2006/main">
   <p:cSld>
     <p:spTree>
@@ -15509,1488 +17157,6 @@
     <p:extLst>
       <p:ext uri="{BB962C8B-B14F-4D97-AF65-F5344CB8AC3E}">
         <p14:creationId xmlns:p14="http://schemas.microsoft.com/office/powerpoint/2010/main" val="227310116"/>
-      </p:ext>
-    </p:extLst>
-  </p:cSld>
-  <p:clrMapOvr>
-    <a:masterClrMapping/>
-  </p:clrMapOvr>
-</p:sld>
-</file>
-
-<file path=ppt/slides/slide8.xml><?xml version="1.0" encoding="utf-8"?>
-<p:sld xmlns:a="http://schemas.openxmlformats.org/drawingml/2006/main" xmlns:r="http://schemas.openxmlformats.org/officeDocument/2006/relationships" xmlns:p="http://schemas.openxmlformats.org/presentationml/2006/main">
-  <p:cSld>
-    <p:spTree>
-      <p:nvGrpSpPr>
-        <p:cNvPr id="1" name="">
-          <a:extLst>
-            <a:ext uri="{FF2B5EF4-FFF2-40B4-BE49-F238E27FC236}">
-              <a16:creationId xmlns:a16="http://schemas.microsoft.com/office/drawing/2014/main" id="{FED50985-65D0-9DCC-6D6B-0618F0DEDAA3}"/>
-            </a:ext>
-          </a:extLst>
-        </p:cNvPr>
-        <p:cNvGrpSpPr/>
-        <p:nvPr/>
-      </p:nvGrpSpPr>
-      <p:grpSpPr>
-        <a:xfrm>
-          <a:off x="0" y="0"/>
-          <a:ext cx="0" cy="0"/>
-          <a:chOff x="0" y="0"/>
-          <a:chExt cx="0" cy="0"/>
-        </a:xfrm>
-      </p:grpSpPr>
-      <p:sp>
-        <p:nvSpPr>
-          <p:cNvPr id="2" name="Rectangle 1">
-            <a:extLst>
-              <a:ext uri="{FF2B5EF4-FFF2-40B4-BE49-F238E27FC236}">
-                <a16:creationId xmlns:a16="http://schemas.microsoft.com/office/drawing/2014/main" id="{6563B49D-49CF-A197-DA7F-2306AD3364C2}"/>
-              </a:ext>
-            </a:extLst>
-          </p:cNvPr>
-          <p:cNvSpPr/>
-          <p:nvPr/>
-        </p:nvSpPr>
-        <p:spPr>
-          <a:xfrm>
-            <a:off x="0" y="0"/>
-            <a:ext cx="12191695" cy="1078992"/>
-          </a:xfrm>
-          <a:prstGeom prst="rect">
-            <a:avLst/>
-          </a:prstGeom>
-          <a:solidFill>
-            <a:srgbClr val="FFFFFF"/>
-          </a:solidFill>
-          <a:ln>
-            <a:noFill/>
-          </a:ln>
-        </p:spPr>
-        <p:style>
-          <a:lnRef idx="1">
-            <a:schemeClr val="accent1"/>
-          </a:lnRef>
-          <a:fillRef idx="3">
-            <a:schemeClr val="accent1"/>
-          </a:fillRef>
-          <a:effectRef idx="2">
-            <a:schemeClr val="accent1"/>
-          </a:effectRef>
-          <a:fontRef idx="minor">
-            <a:schemeClr val="lt1"/>
-          </a:fontRef>
-        </p:style>
-        <p:txBody>
-          <a:bodyPr rtlCol="0" anchor="ctr"/>
-          <a:lstStyle/>
-          <a:p>
-            <a:pPr algn="ctr"/>
-            <a:endParaRPr/>
-          </a:p>
-        </p:txBody>
-      </p:sp>
-      <p:sp>
-        <p:nvSpPr>
-          <p:cNvPr id="3" name="Rectangle 2">
-            <a:extLst>
-              <a:ext uri="{FF2B5EF4-FFF2-40B4-BE49-F238E27FC236}">
-                <a16:creationId xmlns:a16="http://schemas.microsoft.com/office/drawing/2014/main" id="{8B8C9C5E-0D5B-0849-6A84-64B8332F673D}"/>
-              </a:ext>
-            </a:extLst>
-          </p:cNvPr>
-          <p:cNvSpPr/>
-          <p:nvPr/>
-        </p:nvSpPr>
-        <p:spPr>
-          <a:xfrm>
-            <a:off x="731520" y="1051560"/>
-            <a:ext cx="7772400" cy="36576"/>
-          </a:xfrm>
-          <a:prstGeom prst="rect">
-            <a:avLst/>
-          </a:prstGeom>
-          <a:solidFill>
-            <a:srgbClr val="005BAA"/>
-          </a:solidFill>
-          <a:ln>
-            <a:noFill/>
-          </a:ln>
-        </p:spPr>
-        <p:style>
-          <a:lnRef idx="1">
-            <a:schemeClr val="accent1"/>
-          </a:lnRef>
-          <a:fillRef idx="3">
-            <a:schemeClr val="accent1"/>
-          </a:fillRef>
-          <a:effectRef idx="2">
-            <a:schemeClr val="accent1"/>
-          </a:effectRef>
-          <a:fontRef idx="minor">
-            <a:schemeClr val="lt1"/>
-          </a:fontRef>
-        </p:style>
-        <p:txBody>
-          <a:bodyPr rtlCol="0" anchor="ctr"/>
-          <a:lstStyle/>
-          <a:p>
-            <a:pPr algn="ctr"/>
-            <a:endParaRPr/>
-          </a:p>
-        </p:txBody>
-      </p:sp>
-      <p:sp>
-        <p:nvSpPr>
-          <p:cNvPr id="4" name="Rectangle 3">
-            <a:extLst>
-              <a:ext uri="{FF2B5EF4-FFF2-40B4-BE49-F238E27FC236}">
-                <a16:creationId xmlns:a16="http://schemas.microsoft.com/office/drawing/2014/main" id="{B49F23B0-29CC-D972-FCDE-1E4DC06E42E5}"/>
-              </a:ext>
-            </a:extLst>
-          </p:cNvPr>
-          <p:cNvSpPr/>
-          <p:nvPr/>
-        </p:nvSpPr>
-        <p:spPr>
-          <a:xfrm>
-            <a:off x="8503920" y="1051560"/>
-            <a:ext cx="2926080" cy="36576"/>
-          </a:xfrm>
-          <a:prstGeom prst="rect">
-            <a:avLst/>
-          </a:prstGeom>
-          <a:solidFill>
-            <a:srgbClr val="F37021"/>
-          </a:solidFill>
-          <a:ln>
-            <a:noFill/>
-          </a:ln>
-        </p:spPr>
-        <p:style>
-          <a:lnRef idx="1">
-            <a:schemeClr val="accent1"/>
-          </a:lnRef>
-          <a:fillRef idx="3">
-            <a:schemeClr val="accent1"/>
-          </a:fillRef>
-          <a:effectRef idx="2">
-            <a:schemeClr val="accent1"/>
-          </a:effectRef>
-          <a:fontRef idx="minor">
-            <a:schemeClr val="lt1"/>
-          </a:fontRef>
-        </p:style>
-        <p:txBody>
-          <a:bodyPr rtlCol="0" anchor="ctr"/>
-          <a:lstStyle/>
-          <a:p>
-            <a:pPr algn="ctr"/>
-            <a:endParaRPr/>
-          </a:p>
-        </p:txBody>
-      </p:sp>
-      <p:sp>
-        <p:nvSpPr>
-          <p:cNvPr id="5" name="Rounded Rectangle 4">
-            <a:extLst>
-              <a:ext uri="{FF2B5EF4-FFF2-40B4-BE49-F238E27FC236}">
-                <a16:creationId xmlns:a16="http://schemas.microsoft.com/office/drawing/2014/main" id="{91FEA4B8-B8A8-0C0E-CBB7-527449897E7D}"/>
-              </a:ext>
-            </a:extLst>
-          </p:cNvPr>
-          <p:cNvSpPr/>
-          <p:nvPr/>
-        </p:nvSpPr>
-        <p:spPr>
-          <a:xfrm>
-            <a:off x="731520" y="146304"/>
-            <a:ext cx="3840480" cy="256032"/>
-          </a:xfrm>
-          <a:prstGeom prst="roundRect">
-            <a:avLst/>
-          </a:prstGeom>
-          <a:solidFill>
-            <a:srgbClr val="FFF7ED"/>
-          </a:solidFill>
-          <a:ln w="9525">
-            <a:solidFill>
-              <a:srgbClr val="F37021"/>
-            </a:solidFill>
-          </a:ln>
-        </p:spPr>
-        <p:style>
-          <a:lnRef idx="1">
-            <a:schemeClr val="accent1"/>
-          </a:lnRef>
-          <a:fillRef idx="3">
-            <a:schemeClr val="accent1"/>
-          </a:fillRef>
-          <a:effectRef idx="2">
-            <a:schemeClr val="accent1"/>
-          </a:effectRef>
-          <a:fontRef idx="minor">
-            <a:schemeClr val="lt1"/>
-          </a:fontRef>
-        </p:style>
-        <p:txBody>
-          <a:bodyPr wrap="square" lIns="109728" tIns="18288" rtlCol="0" anchor="ctr"/>
-          <a:lstStyle/>
-          <a:p>
-            <a:pPr algn="ctr">
-              <a:defRPr sz="950" b="1">
-                <a:solidFill>
-                  <a:srgbClr val="F37021"/>
-                </a:solidFill>
-                <a:latin typeface="Segoe UI"/>
-              </a:defRPr>
-            </a:pPr>
-            <a:r>
-              <a:t>PHẦN 3: QUY TRÌNH QUẢN LÝ</a:t>
-            </a:r>
-          </a:p>
-        </p:txBody>
-      </p:sp>
-      <p:sp>
-        <p:nvSpPr>
-          <p:cNvPr id="6" name="TextBox 5">
-            <a:extLst>
-              <a:ext uri="{FF2B5EF4-FFF2-40B4-BE49-F238E27FC236}">
-                <a16:creationId xmlns:a16="http://schemas.microsoft.com/office/drawing/2014/main" id="{E4A6BF32-7C30-2E10-85DB-1FBC509DD62D}"/>
-              </a:ext>
-            </a:extLst>
-          </p:cNvPr>
-          <p:cNvSpPr txBox="1"/>
-          <p:nvPr/>
-        </p:nvSpPr>
-        <p:spPr>
-          <a:xfrm>
-            <a:off x="731520" y="438912"/>
-            <a:ext cx="8686800" cy="338554"/>
-          </a:xfrm>
-          <a:prstGeom prst="rect">
-            <a:avLst/>
-          </a:prstGeom>
-          <a:noFill/>
-        </p:spPr>
-        <p:txBody>
-          <a:bodyPr wrap="square" lIns="0" tIns="0">
-            <a:spAutoFit/>
-          </a:bodyPr>
-          <a:lstStyle/>
-          <a:p>
-            <a:pPr>
-              <a:defRPr sz="1900" b="1">
-                <a:solidFill>
-                  <a:srgbClr val="0A2540"/>
-                </a:solidFill>
-                <a:latin typeface="Segoe UI"/>
-              </a:defRPr>
-            </a:pPr>
-            <a:r>
-              <a:rPr lang="vi-VN" dirty="0"/>
-              <a:t>Phân Tích Quy Trình – Phân Tích Sự Lãng Phí</a:t>
-            </a:r>
-            <a:endParaRPr dirty="0"/>
-          </a:p>
-        </p:txBody>
-      </p:sp>
-      <p:pic>
-        <p:nvPicPr>
-          <p:cNvPr id="7" name="Picture 6" descr="fpt_software_logo.png">
-            <a:extLst>
-              <a:ext uri="{FF2B5EF4-FFF2-40B4-BE49-F238E27FC236}">
-                <a16:creationId xmlns:a16="http://schemas.microsoft.com/office/drawing/2014/main" id="{525D0DDB-4032-BB55-4B51-C84D6E2A4900}"/>
-              </a:ext>
-            </a:extLst>
-          </p:cNvPr>
-          <p:cNvPicPr>
-            <a:picLocks noChangeAspect="1"/>
-          </p:cNvPicPr>
-          <p:nvPr/>
-        </p:nvPicPr>
-        <p:blipFill>
-          <a:blip r:embed="rId2"/>
-          <a:stretch>
-            <a:fillRect/>
-          </a:stretch>
-        </p:blipFill>
-        <p:spPr>
-          <a:xfrm>
-            <a:off x="9784080" y="201168"/>
-            <a:ext cx="1691640" cy="422910"/>
-          </a:xfrm>
-          <a:prstGeom prst="rect">
-            <a:avLst/>
-          </a:prstGeom>
-        </p:spPr>
-      </p:pic>
-      <p:sp>
-        <p:nvSpPr>
-          <p:cNvPr id="8" name="Rectangle 7">
-            <a:extLst>
-              <a:ext uri="{FF2B5EF4-FFF2-40B4-BE49-F238E27FC236}">
-                <a16:creationId xmlns:a16="http://schemas.microsoft.com/office/drawing/2014/main" id="{A9CE5EEA-69C0-1C17-3DC3-230A71C367A2}"/>
-              </a:ext>
-            </a:extLst>
-          </p:cNvPr>
-          <p:cNvSpPr/>
-          <p:nvPr/>
-        </p:nvSpPr>
-        <p:spPr>
-          <a:xfrm>
-            <a:off x="731520" y="6419088"/>
-            <a:ext cx="10728655" cy="13716"/>
-          </a:xfrm>
-          <a:prstGeom prst="rect">
-            <a:avLst/>
-          </a:prstGeom>
-          <a:solidFill>
-            <a:srgbClr val="E2E8F0"/>
-          </a:solidFill>
-          <a:ln>
-            <a:noFill/>
-          </a:ln>
-        </p:spPr>
-        <p:style>
-          <a:lnRef idx="1">
-            <a:schemeClr val="accent1"/>
-          </a:lnRef>
-          <a:fillRef idx="3">
-            <a:schemeClr val="accent1"/>
-          </a:fillRef>
-          <a:effectRef idx="2">
-            <a:schemeClr val="accent1"/>
-          </a:effectRef>
-          <a:fontRef idx="minor">
-            <a:schemeClr val="lt1"/>
-          </a:fontRef>
-        </p:style>
-        <p:txBody>
-          <a:bodyPr rtlCol="0" anchor="ctr"/>
-          <a:lstStyle/>
-          <a:p>
-            <a:pPr algn="ctr"/>
-            <a:endParaRPr/>
-          </a:p>
-        </p:txBody>
-      </p:sp>
-      <p:sp>
-        <p:nvSpPr>
-          <p:cNvPr id="9" name="TextBox 8">
-            <a:extLst>
-              <a:ext uri="{FF2B5EF4-FFF2-40B4-BE49-F238E27FC236}">
-                <a16:creationId xmlns:a16="http://schemas.microsoft.com/office/drawing/2014/main" id="{A3175763-DA5F-9B86-06AC-89E4A59F32B3}"/>
-              </a:ext>
-            </a:extLst>
-          </p:cNvPr>
-          <p:cNvSpPr txBox="1"/>
-          <p:nvPr/>
-        </p:nvSpPr>
-        <p:spPr>
-          <a:xfrm>
-            <a:off x="731520" y="6473952"/>
-            <a:ext cx="7772400" cy="274320"/>
-          </a:xfrm>
-          <a:prstGeom prst="rect">
-            <a:avLst/>
-          </a:prstGeom>
-          <a:noFill/>
-        </p:spPr>
-        <p:txBody>
-          <a:bodyPr wrap="none">
-            <a:spAutoFit/>
-          </a:bodyPr>
-          <a:lstStyle/>
-          <a:p>
-            <a:pPr>
-              <a:defRPr sz="850">
-                <a:solidFill>
-                  <a:srgbClr val="64748B"/>
-                </a:solidFill>
-                <a:latin typeface="Segoe UI"/>
-              </a:defRPr>
-            </a:pPr>
-            <a:r>
-              <a:t>FPT Software | Hệ thống Quản trị Quy trình Nghiệp vụ (BPM) - Đồ án Môn học - Nhóm 8</a:t>
-            </a:r>
-          </a:p>
-        </p:txBody>
-      </p:sp>
-      <p:sp>
-        <p:nvSpPr>
-          <p:cNvPr id="10" name="TextBox 9">
-            <a:extLst>
-              <a:ext uri="{FF2B5EF4-FFF2-40B4-BE49-F238E27FC236}">
-                <a16:creationId xmlns:a16="http://schemas.microsoft.com/office/drawing/2014/main" id="{49FB1E46-ADEA-F55D-BA16-843C80809752}"/>
-              </a:ext>
-            </a:extLst>
-          </p:cNvPr>
-          <p:cNvSpPr txBox="1"/>
-          <p:nvPr/>
-        </p:nvSpPr>
-        <p:spPr>
-          <a:xfrm>
-            <a:off x="10058400" y="6473952"/>
-            <a:ext cx="1371600" cy="274320"/>
-          </a:xfrm>
-          <a:prstGeom prst="rect">
-            <a:avLst/>
-          </a:prstGeom>
-          <a:noFill/>
-        </p:spPr>
-        <p:txBody>
-          <a:bodyPr wrap="none">
-            <a:spAutoFit/>
-          </a:bodyPr>
-          <a:lstStyle/>
-          <a:p>
-            <a:pPr algn="r">
-              <a:defRPr sz="850" b="1">
-                <a:solidFill>
-                  <a:srgbClr val="005BAA"/>
-                </a:solidFill>
-                <a:latin typeface="Segoe UI"/>
-              </a:defRPr>
-            </a:pPr>
-            <a:r>
-              <a:t>9 / 27</a:t>
-            </a:r>
-          </a:p>
-        </p:txBody>
-      </p:sp>
-      <p:sp>
-        <p:nvSpPr>
-          <p:cNvPr id="11" name="Rounded Rectangle 10">
-            <a:extLst>
-              <a:ext uri="{FF2B5EF4-FFF2-40B4-BE49-F238E27FC236}">
-                <a16:creationId xmlns:a16="http://schemas.microsoft.com/office/drawing/2014/main" id="{D4C28073-A699-797E-AF9D-98ECFAD95931}"/>
-              </a:ext>
-            </a:extLst>
-          </p:cNvPr>
-          <p:cNvSpPr/>
-          <p:nvPr/>
-        </p:nvSpPr>
-        <p:spPr>
-          <a:xfrm>
-            <a:off x="610140" y="1371600"/>
-            <a:ext cx="3429000" cy="4846320"/>
-          </a:xfrm>
-          <a:prstGeom prst="roundRect">
-            <a:avLst/>
-          </a:prstGeom>
-          <a:solidFill>
-            <a:srgbClr val="F8FAFC"/>
-          </a:solidFill>
-          <a:ln w="12700">
-            <a:solidFill>
-              <a:srgbClr val="E2E8F0"/>
-            </a:solidFill>
-          </a:ln>
-        </p:spPr>
-        <p:style>
-          <a:lnRef idx="1">
-            <a:schemeClr val="accent1"/>
-          </a:lnRef>
-          <a:fillRef idx="3">
-            <a:schemeClr val="accent1"/>
-          </a:fillRef>
-          <a:effectRef idx="2">
-            <a:schemeClr val="accent1"/>
-          </a:effectRef>
-          <a:fontRef idx="minor">
-            <a:schemeClr val="lt1"/>
-          </a:fontRef>
-        </p:style>
-        <p:txBody>
-          <a:bodyPr wrap="square" lIns="182880" tIns="164592" rIns="182880" bIns="164592" rtlCol="0" anchor="ctr"/>
-          <a:lstStyle/>
-          <a:p>
-            <a:pPr algn="ctr">
-              <a:spcAft>
-                <a:spcPts val="600"/>
-              </a:spcAft>
-              <a:defRPr sz="1300" b="1">
-                <a:solidFill>
-                  <a:srgbClr val="0A2540"/>
-                </a:solidFill>
-                <a:latin typeface="Segoe UI"/>
-              </a:defRPr>
-            </a:pPr>
-            <a:r>
-              <a:rPr lang="vi-VN" sz="1300" b="1" dirty="0">
-                <a:solidFill>
-                  <a:srgbClr val="005BAA"/>
-                </a:solidFill>
-                <a:latin typeface="Segoe UI"/>
-              </a:rPr>
-              <a:t>MOVE</a:t>
-            </a:r>
-          </a:p>
-          <a:p>
-            <a:pPr algn="ctr">
-              <a:spcAft>
-                <a:spcPts val="600"/>
-              </a:spcAft>
-              <a:defRPr sz="1300" b="1">
-                <a:solidFill>
-                  <a:srgbClr val="0A2540"/>
-                </a:solidFill>
-                <a:latin typeface="Segoe UI"/>
-              </a:defRPr>
-            </a:pPr>
-            <a:r>
-              <a:rPr lang="vi-VN" sz="1000" b="1" dirty="0">
-                <a:solidFill>
-                  <a:srgbClr val="005BAA"/>
-                </a:solidFill>
-                <a:latin typeface="Segoe UI"/>
-              </a:rPr>
-              <a:t>Chuyển giao thông tin.</a:t>
-            </a:r>
-          </a:p>
-          <a:p>
-            <a:pPr marL="171450" indent="-171450">
-              <a:spcAft>
-                <a:spcPts val="300"/>
-              </a:spcAft>
-              <a:buFont typeface="Wingdings" panose="05000000000000000000" pitchFamily="2" charset="2"/>
-              <a:buChar char="ü"/>
-              <a:defRPr sz="1050">
-                <a:solidFill>
-                  <a:srgbClr val="1E293B"/>
-                </a:solidFill>
-                <a:latin typeface="Segoe UI"/>
-              </a:defRPr>
-            </a:pPr>
-            <a:r>
-              <a:rPr lang="vi-VN" dirty="0"/>
-              <a:t>Luồng tin nhắn, yêu cầu chỉnh sửa và gửi lại tài liệu.</a:t>
-            </a:r>
-          </a:p>
-          <a:p>
-            <a:pPr marL="171450" indent="-171450">
-              <a:spcAft>
-                <a:spcPts val="300"/>
-              </a:spcAft>
-              <a:buFont typeface="Wingdings" panose="05000000000000000000" pitchFamily="2" charset="2"/>
-              <a:buChar char="ü"/>
-              <a:defRPr sz="1050">
-                <a:solidFill>
-                  <a:srgbClr val="1E293B"/>
-                </a:solidFill>
-                <a:latin typeface="Segoe UI"/>
-              </a:defRPr>
-            </a:pPr>
-            <a:r>
-              <a:rPr lang="vi-VN" dirty="0"/>
-              <a:t>Báo bug từ QA sang Dev thiếu thông tin, dẫn đến phải trao đổi lại nhiều lần.</a:t>
-            </a:r>
-          </a:p>
-          <a:p>
-            <a:pPr marL="171450" indent="-171450">
-              <a:spcAft>
-                <a:spcPts val="300"/>
-              </a:spcAft>
-              <a:buFont typeface="Wingdings" panose="05000000000000000000" pitchFamily="2" charset="2"/>
-              <a:buChar char="ü"/>
-              <a:defRPr sz="1050">
-                <a:solidFill>
-                  <a:srgbClr val="1E293B"/>
-                </a:solidFill>
-                <a:latin typeface="Segoe UI"/>
-              </a:defRPr>
-            </a:pPr>
-            <a:r>
-              <a:rPr lang="vi-VN" dirty="0"/>
-              <a:t>Nguyên nhân: giao tiếp qua file rời/emails khiến thông tin bị phân mảnh, dễ hiểu sai ý nhau.</a:t>
-            </a:r>
-          </a:p>
-          <a:p>
-            <a:pPr marL="171450" indent="-171450">
-              <a:spcAft>
-                <a:spcPts val="300"/>
-              </a:spcAft>
-              <a:buFont typeface="Wingdings" panose="05000000000000000000" pitchFamily="2" charset="2"/>
-              <a:buChar char="ü"/>
-              <a:defRPr sz="1050">
-                <a:solidFill>
-                  <a:srgbClr val="1E293B"/>
-                </a:solidFill>
-                <a:latin typeface="Segoe UI"/>
-              </a:defRPr>
-            </a:pPr>
-            <a:r>
-              <a:rPr lang="vi-VN" dirty="0"/>
-              <a:t>Giải pháp: dùng công cụ cộng tác trực tuyến như Figma, Google Docs và chuẩn hóa ticket lỗi.</a:t>
-            </a:r>
-            <a:endParaRPr dirty="0"/>
-          </a:p>
-        </p:txBody>
-      </p:sp>
-      <p:sp>
-        <p:nvSpPr>
-          <p:cNvPr id="12" name="Rounded Rectangle 11">
-            <a:extLst>
-              <a:ext uri="{FF2B5EF4-FFF2-40B4-BE49-F238E27FC236}">
-                <a16:creationId xmlns:a16="http://schemas.microsoft.com/office/drawing/2014/main" id="{CF312D4A-8259-893B-A8E6-5BFC0E4A5CFD}"/>
-              </a:ext>
-            </a:extLst>
-          </p:cNvPr>
-          <p:cNvSpPr/>
-          <p:nvPr/>
-        </p:nvSpPr>
-        <p:spPr>
-          <a:xfrm>
-            <a:off x="4389120" y="1371600"/>
-            <a:ext cx="3429000" cy="4846320"/>
-          </a:xfrm>
-          <a:prstGeom prst="roundRect">
-            <a:avLst/>
-          </a:prstGeom>
-          <a:solidFill>
-            <a:srgbClr val="F8FAFC"/>
-          </a:solidFill>
-          <a:ln w="12700">
-            <a:solidFill>
-              <a:srgbClr val="E2E8F0"/>
-            </a:solidFill>
-          </a:ln>
-        </p:spPr>
-        <p:style>
-          <a:lnRef idx="1">
-            <a:schemeClr val="accent1"/>
-          </a:lnRef>
-          <a:fillRef idx="3">
-            <a:schemeClr val="accent1"/>
-          </a:fillRef>
-          <a:effectRef idx="2">
-            <a:schemeClr val="accent1"/>
-          </a:effectRef>
-          <a:fontRef idx="minor">
-            <a:schemeClr val="lt1"/>
-          </a:fontRef>
-        </p:style>
-        <p:txBody>
-          <a:bodyPr wrap="square" lIns="182880" tIns="164592" rIns="182880" bIns="164592" rtlCol="0" anchor="ctr"/>
-          <a:lstStyle/>
-          <a:p>
-            <a:pPr algn="ctr">
-              <a:spcAft>
-                <a:spcPts val="600"/>
-              </a:spcAft>
-              <a:defRPr sz="1300" b="1">
-                <a:solidFill>
-                  <a:srgbClr val="F37021"/>
-                </a:solidFill>
-                <a:latin typeface="Segoe UI"/>
-              </a:defRPr>
-            </a:pPr>
-            <a:r>
-              <a:rPr lang="vi-VN" dirty="0"/>
-              <a:t>HOLD</a:t>
-            </a:r>
-          </a:p>
-          <a:p>
-            <a:pPr algn="ctr">
-              <a:spcAft>
-                <a:spcPts val="600"/>
-              </a:spcAft>
-              <a:defRPr sz="1300" b="1">
-                <a:solidFill>
-                  <a:srgbClr val="F37021"/>
-                </a:solidFill>
-                <a:latin typeface="Segoe UI"/>
-              </a:defRPr>
-            </a:pPr>
-            <a:r>
-              <a:rPr lang="vi-VN" sz="1000" dirty="0">
-                <a:solidFill>
-                  <a:schemeClr val="accent6"/>
-                </a:solidFill>
-                <a:latin typeface="Segoe UI"/>
-              </a:rPr>
-              <a:t>Chờ đợi.</a:t>
-            </a:r>
-          </a:p>
-          <a:p>
-            <a:pPr marL="171450" indent="-171450">
-              <a:spcAft>
-                <a:spcPts val="300"/>
-              </a:spcAft>
-              <a:buFont typeface="Wingdings" panose="05000000000000000000" pitchFamily="2" charset="2"/>
-              <a:buChar char="ü"/>
-              <a:defRPr sz="1050">
-                <a:solidFill>
-                  <a:srgbClr val="1E293B"/>
-                </a:solidFill>
-                <a:latin typeface="Segoe UI"/>
-              </a:defRPr>
-            </a:pPr>
-            <a:r>
-              <a:rPr lang="vi-VN" sz="1050" dirty="0">
-                <a:solidFill>
-                  <a:srgbClr val="1E293B"/>
-                </a:solidFill>
-                <a:latin typeface="Segoe UI"/>
-              </a:rPr>
-              <a:t>Event chờ phản hồi UAT.</a:t>
-            </a:r>
-          </a:p>
-          <a:p>
-            <a:pPr marL="171450" indent="-171450">
-              <a:spcAft>
-                <a:spcPts val="300"/>
-              </a:spcAft>
-              <a:buFont typeface="Wingdings" panose="05000000000000000000" pitchFamily="2" charset="2"/>
-              <a:buChar char="ü"/>
-              <a:defRPr sz="1050">
-                <a:solidFill>
-                  <a:srgbClr val="1E293B"/>
-                </a:solidFill>
-                <a:latin typeface="Segoe UI"/>
-              </a:defRPr>
-            </a:pPr>
-            <a:r>
-              <a:rPr lang="vi-VN" sz="1050" dirty="0">
-                <a:solidFill>
-                  <a:srgbClr val="1E293B"/>
-                </a:solidFill>
-                <a:latin typeface="Segoe UI"/>
-              </a:rPr>
-              <a:t>Event chờ xác nhận thanh toán.</a:t>
-            </a:r>
-          </a:p>
-          <a:p>
-            <a:pPr marL="171450" indent="-171450">
-              <a:spcAft>
-                <a:spcPts val="300"/>
-              </a:spcAft>
-              <a:buFont typeface="Wingdings" panose="05000000000000000000" pitchFamily="2" charset="2"/>
-              <a:buChar char="ü"/>
-              <a:defRPr sz="1050">
-                <a:solidFill>
-                  <a:srgbClr val="1E293B"/>
-                </a:solidFill>
-                <a:latin typeface="Segoe UI"/>
-              </a:defRPr>
-            </a:pPr>
-            <a:r>
-              <a:rPr lang="vi-VN" sz="1050" dirty="0">
-                <a:solidFill>
-                  <a:srgbClr val="1E293B"/>
-                </a:solidFill>
-                <a:latin typeface="Segoe UI"/>
-              </a:rPr>
-              <a:t>Nguyên nhân: khách hàng bận công việc, quy trình kế toán và hồ sơ bàn giao rườm rà.</a:t>
-            </a:r>
-          </a:p>
-          <a:p>
-            <a:pPr marL="171450" indent="-171450">
-              <a:spcAft>
-                <a:spcPts val="300"/>
-              </a:spcAft>
-              <a:buFont typeface="Wingdings" panose="05000000000000000000" pitchFamily="2" charset="2"/>
-              <a:buChar char="ü"/>
-              <a:defRPr sz="1050">
-                <a:solidFill>
-                  <a:srgbClr val="1E293B"/>
-                </a:solidFill>
-                <a:latin typeface="Segoe UI"/>
-              </a:defRPr>
-            </a:pPr>
-            <a:r>
-              <a:rPr lang="vi-VN" sz="1050" dirty="0">
-                <a:solidFill>
-                  <a:srgbClr val="1E293B"/>
-                </a:solidFill>
-                <a:latin typeface="Segoe UI"/>
-              </a:rPr>
-              <a:t>Giải pháp: thỏa thuận SLA UAT và chuẩn bị sẵn hồ sơ nghiệm thu từ trước.</a:t>
-            </a:r>
-            <a:endParaRPr lang="en-US" sz="1050" dirty="0">
-              <a:solidFill>
-                <a:srgbClr val="1E293B"/>
-              </a:solidFill>
-              <a:latin typeface="Segoe UI"/>
-            </a:endParaRPr>
-          </a:p>
-          <a:p>
-            <a:pPr>
-              <a:spcAft>
-                <a:spcPts val="300"/>
-              </a:spcAft>
-              <a:defRPr sz="1050">
-                <a:solidFill>
-                  <a:srgbClr val="1E293B"/>
-                </a:solidFill>
-                <a:latin typeface="Segoe UI"/>
-              </a:defRPr>
-            </a:pPr>
-            <a:endParaRPr dirty="0"/>
-          </a:p>
-        </p:txBody>
-      </p:sp>
-      <p:sp>
-        <p:nvSpPr>
-          <p:cNvPr id="13" name="Rounded Rectangle 12">
-            <a:extLst>
-              <a:ext uri="{FF2B5EF4-FFF2-40B4-BE49-F238E27FC236}">
-                <a16:creationId xmlns:a16="http://schemas.microsoft.com/office/drawing/2014/main" id="{F6BE2B50-BA95-F64E-F3A6-9A34AD9BFF1D}"/>
-              </a:ext>
-            </a:extLst>
-          </p:cNvPr>
-          <p:cNvSpPr/>
-          <p:nvPr/>
-        </p:nvSpPr>
-        <p:spPr>
-          <a:xfrm>
-            <a:off x="8046720" y="1371600"/>
-            <a:ext cx="3413455" cy="4846320"/>
-          </a:xfrm>
-          <a:prstGeom prst="roundRect">
-            <a:avLst/>
-          </a:prstGeom>
-          <a:solidFill>
-            <a:srgbClr val="F8FAFC"/>
-          </a:solidFill>
-          <a:ln w="12700">
-            <a:solidFill>
-              <a:srgbClr val="E2E8F0"/>
-            </a:solidFill>
-          </a:ln>
-        </p:spPr>
-        <p:style>
-          <a:lnRef idx="1">
-            <a:schemeClr val="accent1"/>
-          </a:lnRef>
-          <a:fillRef idx="3">
-            <a:schemeClr val="accent1"/>
-          </a:fillRef>
-          <a:effectRef idx="2">
-            <a:schemeClr val="accent1"/>
-          </a:effectRef>
-          <a:fontRef idx="minor">
-            <a:schemeClr val="lt1"/>
-          </a:fontRef>
-        </p:style>
-        <p:txBody>
-          <a:bodyPr wrap="square" lIns="182880" tIns="164592" rIns="182880" bIns="164592" rtlCol="0" anchor="ctr"/>
-          <a:lstStyle/>
-          <a:p>
-            <a:pPr algn="ctr">
-              <a:spcAft>
-                <a:spcPts val="600"/>
-              </a:spcAft>
-              <a:defRPr sz="1300" b="1">
-                <a:solidFill>
-                  <a:srgbClr val="005BAA"/>
-                </a:solidFill>
-                <a:latin typeface="Segoe UI"/>
-              </a:defRPr>
-            </a:pPr>
-            <a:r>
-              <a:rPr lang="vi-VN" sz="1300" b="1" dirty="0">
-                <a:solidFill>
-                  <a:srgbClr val="0DB14B"/>
-                </a:solidFill>
-                <a:latin typeface="Segoe UI"/>
-              </a:rPr>
-              <a:t>OVERDO</a:t>
-            </a:r>
-          </a:p>
-          <a:p>
-            <a:pPr algn="ctr">
-              <a:spcAft>
-                <a:spcPts val="600"/>
-              </a:spcAft>
-              <a:defRPr sz="1300" b="1">
-                <a:solidFill>
-                  <a:srgbClr val="005BAA"/>
-                </a:solidFill>
-                <a:latin typeface="Segoe UI"/>
-              </a:defRPr>
-            </a:pPr>
-            <a:r>
-              <a:rPr lang="vi-VN" sz="1000" b="1" dirty="0">
-                <a:solidFill>
-                  <a:srgbClr val="0DB14B"/>
-                </a:solidFill>
-                <a:latin typeface="Segoe UI"/>
-              </a:rPr>
-              <a:t>Làm quá mức.</a:t>
-            </a:r>
-          </a:p>
-          <a:p>
-            <a:pPr marL="171450" indent="-171450">
-              <a:spcAft>
-                <a:spcPts val="300"/>
-              </a:spcAft>
-              <a:buFont typeface="Wingdings" panose="05000000000000000000" pitchFamily="2" charset="2"/>
-              <a:buChar char="ü"/>
-              <a:defRPr sz="1050">
-                <a:solidFill>
-                  <a:srgbClr val="1E293B"/>
-                </a:solidFill>
-                <a:latin typeface="Segoe UI"/>
-              </a:defRPr>
-            </a:pPr>
-            <a:r>
-              <a:rPr lang="vi-VN" dirty="0"/>
-              <a:t>Làm báo giá Change Request cho các sửa đổi quá nhỏ như đổi màu nút bấm, sửa vài chữ.</a:t>
-            </a:r>
-          </a:p>
-          <a:p>
-            <a:pPr marL="171450" indent="-171450">
-              <a:spcAft>
-                <a:spcPts val="300"/>
-              </a:spcAft>
-              <a:buFont typeface="Wingdings" panose="05000000000000000000" pitchFamily="2" charset="2"/>
-              <a:buChar char="ü"/>
-              <a:defRPr sz="1050">
-                <a:solidFill>
-                  <a:srgbClr val="1E293B"/>
-                </a:solidFill>
-                <a:latin typeface="Segoe UI"/>
-              </a:defRPr>
-            </a:pPr>
-            <a:r>
-              <a:rPr lang="vi-VN" dirty="0"/>
-              <a:t>Viết test case ở mức độ chi tiết thái quá khi yêu cầu chưa được chốt cứng.</a:t>
-            </a:r>
-          </a:p>
-          <a:p>
-            <a:pPr marL="171450" indent="-171450">
-              <a:spcAft>
-                <a:spcPts val="300"/>
-              </a:spcAft>
-              <a:buFont typeface="Wingdings" panose="05000000000000000000" pitchFamily="2" charset="2"/>
-              <a:buChar char="ü"/>
-              <a:defRPr sz="1050">
-                <a:solidFill>
-                  <a:srgbClr val="1E293B"/>
-                </a:solidFill>
-                <a:latin typeface="Segoe UI"/>
-              </a:defRPr>
-            </a:pPr>
-            <a:r>
-              <a:rPr lang="vi-VN" dirty="0"/>
-              <a:t>Nguyên nhân: quy trình quá cứng nhắc, yêu cầu chưa đúng scope.</a:t>
-            </a:r>
-          </a:p>
-          <a:p>
-            <a:pPr marL="171450" indent="-171450">
-              <a:spcAft>
-                <a:spcPts val="300"/>
-              </a:spcAft>
-              <a:buFont typeface="Wingdings" panose="05000000000000000000" pitchFamily="2" charset="2"/>
-              <a:buChar char="ü"/>
-              <a:defRPr sz="1050">
-                <a:solidFill>
-                  <a:srgbClr val="1E293B"/>
-                </a:solidFill>
-                <a:latin typeface="Segoe UI"/>
-              </a:defRPr>
-            </a:pPr>
-            <a:r>
-              <a:rPr lang="vi-VN" dirty="0"/>
-              <a:t>Giải pháp: dành buffer time 10% dự án và áp dụng checklist thay vì viết test case quá sâu ngay từ đầu.</a:t>
-            </a:r>
-            <a:endParaRPr dirty="0"/>
-          </a:p>
-        </p:txBody>
-      </p:sp>
-    </p:spTree>
-    <p:extLst>
-      <p:ext uri="{BB962C8B-B14F-4D97-AF65-F5344CB8AC3E}">
-        <p14:creationId xmlns:p14="http://schemas.microsoft.com/office/powerpoint/2010/main" val="1086398473"/>
-      </p:ext>
-    </p:extLst>
-  </p:cSld>
-  <p:clrMapOvr>
-    <a:masterClrMapping/>
-  </p:clrMapOvr>
-</p:sld>
-</file>
-
-<file path=ppt/slides/slide9.xml><?xml version="1.0" encoding="utf-8"?>
-<p:sld xmlns:a="http://schemas.openxmlformats.org/drawingml/2006/main" xmlns:r="http://schemas.openxmlformats.org/officeDocument/2006/relationships" xmlns:p="http://schemas.openxmlformats.org/presentationml/2006/main">
-  <p:cSld>
-    <p:spTree>
-      <p:nvGrpSpPr>
-        <p:cNvPr id="1" name="">
-          <a:extLst>
-            <a:ext uri="{FF2B5EF4-FFF2-40B4-BE49-F238E27FC236}">
-              <a16:creationId xmlns:a16="http://schemas.microsoft.com/office/drawing/2014/main" id="{757DF38A-5E8A-0F10-240C-76634376F9C3}"/>
-            </a:ext>
-          </a:extLst>
-        </p:cNvPr>
-        <p:cNvGrpSpPr/>
-        <p:nvPr/>
-      </p:nvGrpSpPr>
-      <p:grpSpPr>
-        <a:xfrm>
-          <a:off x="0" y="0"/>
-          <a:ext cx="0" cy="0"/>
-          <a:chOff x="0" y="0"/>
-          <a:chExt cx="0" cy="0"/>
-        </a:xfrm>
-      </p:grpSpPr>
-      <p:sp>
-        <p:nvSpPr>
-          <p:cNvPr id="2" name="Rectangle 1">
-            <a:extLst>
-              <a:ext uri="{FF2B5EF4-FFF2-40B4-BE49-F238E27FC236}">
-                <a16:creationId xmlns:a16="http://schemas.microsoft.com/office/drawing/2014/main" id="{A8C4108E-80A8-09B6-A237-B871C1180618}"/>
-              </a:ext>
-            </a:extLst>
-          </p:cNvPr>
-          <p:cNvSpPr/>
-          <p:nvPr/>
-        </p:nvSpPr>
-        <p:spPr>
-          <a:xfrm>
-            <a:off x="0" y="0"/>
-            <a:ext cx="12191695" cy="1078992"/>
-          </a:xfrm>
-          <a:prstGeom prst="rect">
-            <a:avLst/>
-          </a:prstGeom>
-          <a:solidFill>
-            <a:srgbClr val="FFFFFF"/>
-          </a:solidFill>
-          <a:ln>
-            <a:noFill/>
-          </a:ln>
-        </p:spPr>
-        <p:style>
-          <a:lnRef idx="1">
-            <a:schemeClr val="accent1"/>
-          </a:lnRef>
-          <a:fillRef idx="3">
-            <a:schemeClr val="accent1"/>
-          </a:fillRef>
-          <a:effectRef idx="2">
-            <a:schemeClr val="accent1"/>
-          </a:effectRef>
-          <a:fontRef idx="minor">
-            <a:schemeClr val="lt1"/>
-          </a:fontRef>
-        </p:style>
-        <p:txBody>
-          <a:bodyPr rtlCol="0" anchor="ctr"/>
-          <a:lstStyle/>
-          <a:p>
-            <a:pPr algn="ctr"/>
-            <a:endParaRPr/>
-          </a:p>
-        </p:txBody>
-      </p:sp>
-      <p:sp>
-        <p:nvSpPr>
-          <p:cNvPr id="3" name="Rectangle 2">
-            <a:extLst>
-              <a:ext uri="{FF2B5EF4-FFF2-40B4-BE49-F238E27FC236}">
-                <a16:creationId xmlns:a16="http://schemas.microsoft.com/office/drawing/2014/main" id="{8A260EE2-B3C2-5BEB-ED61-8F340E4FBEDD}"/>
-              </a:ext>
-            </a:extLst>
-          </p:cNvPr>
-          <p:cNvSpPr/>
-          <p:nvPr/>
-        </p:nvSpPr>
-        <p:spPr>
-          <a:xfrm>
-            <a:off x="731520" y="1051560"/>
-            <a:ext cx="7772400" cy="36576"/>
-          </a:xfrm>
-          <a:prstGeom prst="rect">
-            <a:avLst/>
-          </a:prstGeom>
-          <a:solidFill>
-            <a:srgbClr val="005BAA"/>
-          </a:solidFill>
-          <a:ln>
-            <a:noFill/>
-          </a:ln>
-        </p:spPr>
-        <p:style>
-          <a:lnRef idx="1">
-            <a:schemeClr val="accent1"/>
-          </a:lnRef>
-          <a:fillRef idx="3">
-            <a:schemeClr val="accent1"/>
-          </a:fillRef>
-          <a:effectRef idx="2">
-            <a:schemeClr val="accent1"/>
-          </a:effectRef>
-          <a:fontRef idx="minor">
-            <a:schemeClr val="lt1"/>
-          </a:fontRef>
-        </p:style>
-        <p:txBody>
-          <a:bodyPr rtlCol="0" anchor="ctr"/>
-          <a:lstStyle/>
-          <a:p>
-            <a:pPr algn="ctr"/>
-            <a:endParaRPr/>
-          </a:p>
-        </p:txBody>
-      </p:sp>
-      <p:sp>
-        <p:nvSpPr>
-          <p:cNvPr id="4" name="Rectangle 3">
-            <a:extLst>
-              <a:ext uri="{FF2B5EF4-FFF2-40B4-BE49-F238E27FC236}">
-                <a16:creationId xmlns:a16="http://schemas.microsoft.com/office/drawing/2014/main" id="{069BB8C1-84B9-8777-086C-B32427ABA798}"/>
-              </a:ext>
-            </a:extLst>
-          </p:cNvPr>
-          <p:cNvSpPr/>
-          <p:nvPr/>
-        </p:nvSpPr>
-        <p:spPr>
-          <a:xfrm>
-            <a:off x="8503920" y="1051560"/>
-            <a:ext cx="2926080" cy="36576"/>
-          </a:xfrm>
-          <a:prstGeom prst="rect">
-            <a:avLst/>
-          </a:prstGeom>
-          <a:solidFill>
-            <a:srgbClr val="F37021"/>
-          </a:solidFill>
-          <a:ln>
-            <a:noFill/>
-          </a:ln>
-        </p:spPr>
-        <p:style>
-          <a:lnRef idx="1">
-            <a:schemeClr val="accent1"/>
-          </a:lnRef>
-          <a:fillRef idx="3">
-            <a:schemeClr val="accent1"/>
-          </a:fillRef>
-          <a:effectRef idx="2">
-            <a:schemeClr val="accent1"/>
-          </a:effectRef>
-          <a:fontRef idx="minor">
-            <a:schemeClr val="lt1"/>
-          </a:fontRef>
-        </p:style>
-        <p:txBody>
-          <a:bodyPr rtlCol="0" anchor="ctr"/>
-          <a:lstStyle/>
-          <a:p>
-            <a:pPr algn="ctr"/>
-            <a:endParaRPr/>
-          </a:p>
-        </p:txBody>
-      </p:sp>
-      <p:sp>
-        <p:nvSpPr>
-          <p:cNvPr id="5" name="Rounded Rectangle 4">
-            <a:extLst>
-              <a:ext uri="{FF2B5EF4-FFF2-40B4-BE49-F238E27FC236}">
-                <a16:creationId xmlns:a16="http://schemas.microsoft.com/office/drawing/2014/main" id="{3BCEE898-6120-6ABC-D7FC-7F459F16230D}"/>
-              </a:ext>
-            </a:extLst>
-          </p:cNvPr>
-          <p:cNvSpPr/>
-          <p:nvPr/>
-        </p:nvSpPr>
-        <p:spPr>
-          <a:xfrm>
-            <a:off x="731520" y="146304"/>
-            <a:ext cx="3840480" cy="256032"/>
-          </a:xfrm>
-          <a:prstGeom prst="roundRect">
-            <a:avLst/>
-          </a:prstGeom>
-          <a:solidFill>
-            <a:srgbClr val="FFF7ED"/>
-          </a:solidFill>
-          <a:ln w="9525">
-            <a:solidFill>
-              <a:srgbClr val="F37021"/>
-            </a:solidFill>
-          </a:ln>
-        </p:spPr>
-        <p:style>
-          <a:lnRef idx="1">
-            <a:schemeClr val="accent1"/>
-          </a:lnRef>
-          <a:fillRef idx="3">
-            <a:schemeClr val="accent1"/>
-          </a:fillRef>
-          <a:effectRef idx="2">
-            <a:schemeClr val="accent1"/>
-          </a:effectRef>
-          <a:fontRef idx="minor">
-            <a:schemeClr val="lt1"/>
-          </a:fontRef>
-        </p:style>
-        <p:txBody>
-          <a:bodyPr wrap="square" lIns="109728" tIns="18288" rtlCol="0" anchor="ctr"/>
-          <a:lstStyle/>
-          <a:p>
-            <a:pPr algn="ctr">
-              <a:defRPr sz="950" b="1">
-                <a:solidFill>
-                  <a:srgbClr val="F37021"/>
-                </a:solidFill>
-                <a:latin typeface="Segoe UI"/>
-              </a:defRPr>
-            </a:pPr>
-            <a:r>
-              <a:t>PHẦN 3: QUY TRÌNH QUẢN LÝ</a:t>
-            </a:r>
-          </a:p>
-        </p:txBody>
-      </p:sp>
-      <p:sp>
-        <p:nvSpPr>
-          <p:cNvPr id="6" name="TextBox 5">
-            <a:extLst>
-              <a:ext uri="{FF2B5EF4-FFF2-40B4-BE49-F238E27FC236}">
-                <a16:creationId xmlns:a16="http://schemas.microsoft.com/office/drawing/2014/main" id="{6DF48E84-6BDE-49AB-5E8A-B6234F668599}"/>
-              </a:ext>
-            </a:extLst>
-          </p:cNvPr>
-          <p:cNvSpPr txBox="1"/>
-          <p:nvPr/>
-        </p:nvSpPr>
-        <p:spPr>
-          <a:xfrm>
-            <a:off x="731520" y="438912"/>
-            <a:ext cx="8686800" cy="338554"/>
-          </a:xfrm>
-          <a:prstGeom prst="rect">
-            <a:avLst/>
-          </a:prstGeom>
-          <a:noFill/>
-        </p:spPr>
-        <p:txBody>
-          <a:bodyPr wrap="square" lIns="0" tIns="0">
-            <a:spAutoFit/>
-          </a:bodyPr>
-          <a:lstStyle/>
-          <a:p>
-            <a:pPr>
-              <a:defRPr sz="1900" b="1">
-                <a:solidFill>
-                  <a:srgbClr val="0A2540"/>
-                </a:solidFill>
-                <a:latin typeface="Segoe UI"/>
-              </a:defRPr>
-            </a:pPr>
-            <a:r>
-              <a:rPr lang="vi-VN" dirty="0"/>
-              <a:t>Phân Tích Quy Trình – Phân Tích Các Bên Liên Quan</a:t>
-            </a:r>
-            <a:endParaRPr dirty="0"/>
-          </a:p>
-        </p:txBody>
-      </p:sp>
-      <p:pic>
-        <p:nvPicPr>
-          <p:cNvPr id="7" name="Picture 6" descr="fpt_software_logo.png">
-            <a:extLst>
-              <a:ext uri="{FF2B5EF4-FFF2-40B4-BE49-F238E27FC236}">
-                <a16:creationId xmlns:a16="http://schemas.microsoft.com/office/drawing/2014/main" id="{05F3184E-6F51-8C2A-07F3-62F04B940896}"/>
-              </a:ext>
-            </a:extLst>
-          </p:cNvPr>
-          <p:cNvPicPr>
-            <a:picLocks noChangeAspect="1"/>
-          </p:cNvPicPr>
-          <p:nvPr/>
-        </p:nvPicPr>
-        <p:blipFill>
-          <a:blip r:embed="rId2"/>
-          <a:stretch>
-            <a:fillRect/>
-          </a:stretch>
-        </p:blipFill>
-        <p:spPr>
-          <a:xfrm>
-            <a:off x="9784080" y="201168"/>
-            <a:ext cx="1691640" cy="422910"/>
-          </a:xfrm>
-          <a:prstGeom prst="rect">
-            <a:avLst/>
-          </a:prstGeom>
-        </p:spPr>
-      </p:pic>
-      <p:sp>
-        <p:nvSpPr>
-          <p:cNvPr id="8" name="Rectangle 7">
-            <a:extLst>
-              <a:ext uri="{FF2B5EF4-FFF2-40B4-BE49-F238E27FC236}">
-                <a16:creationId xmlns:a16="http://schemas.microsoft.com/office/drawing/2014/main" id="{DFBD875A-5F73-402E-77B8-41C65E3E5EB2}"/>
-              </a:ext>
-            </a:extLst>
-          </p:cNvPr>
-          <p:cNvSpPr/>
-          <p:nvPr/>
-        </p:nvSpPr>
-        <p:spPr>
-          <a:xfrm>
-            <a:off x="731520" y="6419088"/>
-            <a:ext cx="10728655" cy="13716"/>
-          </a:xfrm>
-          <a:prstGeom prst="rect">
-            <a:avLst/>
-          </a:prstGeom>
-          <a:solidFill>
-            <a:srgbClr val="E2E8F0"/>
-          </a:solidFill>
-          <a:ln>
-            <a:noFill/>
-          </a:ln>
-        </p:spPr>
-        <p:style>
-          <a:lnRef idx="1">
-            <a:schemeClr val="accent1"/>
-          </a:lnRef>
-          <a:fillRef idx="3">
-            <a:schemeClr val="accent1"/>
-          </a:fillRef>
-          <a:effectRef idx="2">
-            <a:schemeClr val="accent1"/>
-          </a:effectRef>
-          <a:fontRef idx="minor">
-            <a:schemeClr val="lt1"/>
-          </a:fontRef>
-        </p:style>
-        <p:txBody>
-          <a:bodyPr rtlCol="0" anchor="ctr"/>
-          <a:lstStyle/>
-          <a:p>
-            <a:pPr algn="ctr"/>
-            <a:endParaRPr/>
-          </a:p>
-        </p:txBody>
-      </p:sp>
-      <p:sp>
-        <p:nvSpPr>
-          <p:cNvPr id="9" name="TextBox 8">
-            <a:extLst>
-              <a:ext uri="{FF2B5EF4-FFF2-40B4-BE49-F238E27FC236}">
-                <a16:creationId xmlns:a16="http://schemas.microsoft.com/office/drawing/2014/main" id="{DDBD5769-6AD6-177B-E44F-4A0625048B10}"/>
-              </a:ext>
-            </a:extLst>
-          </p:cNvPr>
-          <p:cNvSpPr txBox="1"/>
-          <p:nvPr/>
-        </p:nvSpPr>
-        <p:spPr>
-          <a:xfrm>
-            <a:off x="731520" y="6473952"/>
-            <a:ext cx="7772400" cy="274320"/>
-          </a:xfrm>
-          <a:prstGeom prst="rect">
-            <a:avLst/>
-          </a:prstGeom>
-          <a:noFill/>
-        </p:spPr>
-        <p:txBody>
-          <a:bodyPr wrap="none">
-            <a:spAutoFit/>
-          </a:bodyPr>
-          <a:lstStyle/>
-          <a:p>
-            <a:pPr>
-              <a:defRPr sz="850">
-                <a:solidFill>
-                  <a:srgbClr val="64748B"/>
-                </a:solidFill>
-                <a:latin typeface="Segoe UI"/>
-              </a:defRPr>
-            </a:pPr>
-            <a:r>
-              <a:t>FPT Software | Hệ thống Quản trị Quy trình Nghiệp vụ (BPM) - Đồ án Môn học - Nhóm 8</a:t>
-            </a:r>
-          </a:p>
-        </p:txBody>
-      </p:sp>
-      <p:sp>
-        <p:nvSpPr>
-          <p:cNvPr id="10" name="TextBox 9">
-            <a:extLst>
-              <a:ext uri="{FF2B5EF4-FFF2-40B4-BE49-F238E27FC236}">
-                <a16:creationId xmlns:a16="http://schemas.microsoft.com/office/drawing/2014/main" id="{5F03FB04-A3F9-7C26-18CA-6F7114C8AD31}"/>
-              </a:ext>
-            </a:extLst>
-          </p:cNvPr>
-          <p:cNvSpPr txBox="1"/>
-          <p:nvPr/>
-        </p:nvSpPr>
-        <p:spPr>
-          <a:xfrm>
-            <a:off x="10058400" y="6473952"/>
-            <a:ext cx="1371600" cy="274320"/>
-          </a:xfrm>
-          <a:prstGeom prst="rect">
-            <a:avLst/>
-          </a:prstGeom>
-          <a:noFill/>
-        </p:spPr>
-        <p:txBody>
-          <a:bodyPr wrap="none">
-            <a:spAutoFit/>
-          </a:bodyPr>
-          <a:lstStyle/>
-          <a:p>
-            <a:pPr algn="r">
-              <a:defRPr sz="850" b="1">
-                <a:solidFill>
-                  <a:srgbClr val="005BAA"/>
-                </a:solidFill>
-                <a:latin typeface="Segoe UI"/>
-              </a:defRPr>
-            </a:pPr>
-            <a:r>
-              <a:t>9 / 27</a:t>
-            </a:r>
-          </a:p>
-        </p:txBody>
-      </p:sp>
-      <p:pic>
-        <p:nvPicPr>
-          <p:cNvPr id="18" name="Picture 17">
-            <a:extLst>
-              <a:ext uri="{FF2B5EF4-FFF2-40B4-BE49-F238E27FC236}">
-                <a16:creationId xmlns:a16="http://schemas.microsoft.com/office/drawing/2014/main" id="{F98BE5CD-C3FE-5F45-E7AE-50543C31C015}"/>
-              </a:ext>
-            </a:extLst>
-          </p:cNvPr>
-          <p:cNvPicPr>
-            <a:picLocks noChangeAspect="1"/>
-          </p:cNvPicPr>
-          <p:nvPr/>
-        </p:nvPicPr>
-        <p:blipFill>
-          <a:blip r:embed="rId3"/>
-          <a:srcRect t="7837"/>
-          <a:stretch>
-            <a:fillRect/>
-          </a:stretch>
-        </p:blipFill>
-        <p:spPr>
-          <a:xfrm>
-            <a:off x="2086016" y="1453896"/>
-            <a:ext cx="7880944" cy="4844590"/>
-          </a:xfrm>
-          <a:prstGeom prst="rect">
-            <a:avLst/>
-          </a:prstGeom>
-        </p:spPr>
-      </p:pic>
-    </p:spTree>
-    <p:extLst>
-      <p:ext uri="{BB962C8B-B14F-4D97-AF65-F5344CB8AC3E}">
-        <p14:creationId xmlns:p14="http://schemas.microsoft.com/office/powerpoint/2010/main" val="3264731614"/>
       </p:ext>
     </p:extLst>
   </p:cSld>
